--- a/docs/content/t_tests/t_tests_lecture.pptx
+++ b/docs/content/t_tests/t_tests_lecture.pptx
@@ -3362,7 +3362,7 @@
             </a:pPr>
             <a:r>
               <a:rPr/>
-              <a:t>2026-09-04</a:t>
+              <a:t>2026-09-08</a:t>
             </a:r>
           </a:p>
         </p:txBody>

--- a/docs/content/t_tests/t_tests_lecture.pptx
+++ b/docs/content/t_tests/t_tests_lecture.pptx
@@ -3372,7 +3372,7 @@
 </p:sld>
 </file>
 
-<file path=ppt/slides/slide10.xml><?xml version="1.0" encoding="UTF-8"?><p:sld xmlns:a="http://schemas.openxmlformats.org/drawingml/2006/main" xmlns:r="http://schemas.openxmlformats.org/officeDocument/2006/relationships" xmlns:p="http://schemas.openxmlformats.org/presentationml/2006/main"><p:cSld><p:spTree><p:nvGrpSpPr><p:cNvPr id="1" name="" /><p:cNvGrpSpPr /><p:nvPr /></p:nvGrpSpPr><p:grpSpPr><a:xfrm><a:off x="0" y="0" /><a:ext cx="0" cy="0" /><a:chOff x="0" y="0" /><a:chExt cx="0" cy="0" /></a:xfrm></p:grpSpPr><p:sp><p:nvSpPr><p:cNvPr id="2" name="Title 1" /><p:cNvSpPr><a:spLocks noGrp="1" /></p:cNvSpPr><p:nvPr><p:ph type="title" /></p:nvPr></p:nvSpPr><p:spPr><a:xfrm><a:off x="0" y="0" /><a:ext cx="9144000" cy="602780" /></a:xfrm><a:solidFill><a:srgbClr val="1A1A2E" /></a:solidFill></p:spPr><p:txBody><a:bodyPr /><a:lstStyle /><a:p><a:pPr lvl="0" indent="0" marL="0"><a:buNone /></a:pPr><a:r><a:rPr /><a:t>What Is a Two-Sample t-Test?</a:t></a:r></a:p></p:txBody></p:sp><mc:AlternateContent xmlns:mc="http://schemas.openxmlformats.org/markup-compatibility/2006"><mc:Choice xmlns:a14="http://schemas.microsoft.com/office/drawing/2010/main" Requires="a14"><p:sp><p:nvSpPr><p:cNvPr id="3" name="Content Placeholder 2" /><p:cNvSpPr><a:spLocks noGrp="1" /></p:cNvSpPr><p:nvPr><p:ph idx="1" sz="half" /></p:nvPr></p:nvSpPr><p:spPr /><p:txBody><a:bodyPr /><a:lstStyle /><a:p><a:pPr lvl="0" indent="0" marL="0"><a:buNone /></a:pPr><a:r><a:rPr /><a:t>A two-sample t-test compares the </a:t></a:r><a:r><a:rPr b="1" /><a:t>means of two independent groups</a:t></a:r><a:r><a:rPr /><a:t>.</a:t></a:r></a:p><a:p><a:pPr lvl="0" indent="0" marL="0"><a:buNone /></a:pPr><a:r><a:rPr /><a:t>It asks: </a:t></a:r><a:r><a:rPr i="1" /><a:t>Could both groups plausibly be drawn from populations with the same mean?</a:t></a:r></a:p><a:p><a:pPr lvl="0" indent="0" marL="0"><a:buNone /></a:pPr><a:r><a:rPr /><a:t>The </a:t></a:r><a:r><a:rPr b="1" /><a:t>t-statistic</a:t></a:r><a:r><a:rPr /><a:t> is:</a:t></a:r></a:p><a:p><a:pPr lvl="0" indent="0" marL="0"><a:buNone /></a:pPr><a14:m><m:oMathPara xmlns:m="http://schemas.openxmlformats.org/officeDocument/2006/math"><m:oMathParaPr><m:jc m:val="center" /></m:oMathParaPr><m:oMath><m:r><m:t>t</m:t></m:r><m:r><m:rPr><m:sty m:val="p" /></m:rPr><m:t>=</m:t></m:r><m:f><m:fPr><m:type m:val="bar" /></m:fPr><m:num><m:sSub><m:e><m:acc><m:accPr><m:chr m:val="‾" /></m:accPr><m:e><m:r><m:t>x</m:t></m:r></m:e></m:acc></m:e><m:sub><m:r><m:t>1</m:t></m:r></m:sub></m:sSub><m:r><m:rPr><m:sty m:val="p" /></m:rPr><m:t>−</m:t></m:r><m:sSub><m:e><m:acc><m:accPr><m:chr m:val="‾" /></m:accPr><m:e><m:r><m:t>x</m:t></m:r></m:e></m:acc></m:e><m:sub><m:r><m:t>2</m:t></m:r></m:sub></m:sSub></m:num><m:den><m:sSub><m:e><m:r><m:rPr><m:nor /><m:sty m:val="p" /></m:rPr><m:t>SE</m:t></m:r></m:e><m:sub><m:r><m:rPr><m:nor /><m:sty m:val="p" /></m:rPr><m:t>diff</m:t></m:r></m:sub></m:sSub></m:den></m:f></m:oMath></m:oMathPara></a14:m></a:p><a:p><a:pPr lvl="0" /><a:r><a:rPr /><a:t>Numerator: the </a:t></a:r><a:r><a:rPr b="1" /><a:t>observed difference</a:t></a:r><a:r><a:rPr /><a:t> in means</a:t></a:r></a:p><a:p><a:pPr lvl="0" /><a:r><a:rPr /><a:t>Denominator: the </a:t></a:r><a:r><a:rPr b="1" /><a:t>uncertainty</a:t></a:r><a:r><a:rPr /><a:t> in that difference (SE of the difference)</a:t></a:r></a:p><a:p><a:pPr lvl="0" indent="0" marL="0"><a:buNone /></a:pPr><a:r><a:rPr b="1" /><a:t>Large |t|</a:t></a:r><a:r><a:rPr /><a:t> → the difference is large relative to the noise → small </a:t></a:r><a:r><a:rPr i="1" /><a:t>p</a:t></a:r><a:r><a:rPr /><a:t>-value</a:t></a:r></a:p></p:txBody></p:sp></mc:Choice></mc:AlternateContent><p:graphicFrame><p:nvGraphicFramePr><p:cNvPr id="6" name="Content Placeholder 5" /><p:cNvGraphicFramePr><a:graphicFrameLocks noGrp="1" /></p:cNvGraphicFramePr><p:nvPr><p:ph idx="1" /></p:nvPr></p:nvGraphicFramePr><p:xfrm><a:off x="4495800" y="660400" /><a:ext cx="4406900" cy="3810000" /></p:xfrm><a:graphic><a:graphicData uri="http://schemas.openxmlformats.org/drawingml/2006/table"><a:tbl><a:tblPr firstRow="1" bandRow="1"><a:tableStyleId>{5C22544A-7EE6-4342-B048-85BDC9FD1C3A}</a:tableStyleId></a:tblPr><a:tblGrid><a:gridCol w="2197100" /><a:gridCol w="2197100" /></a:tblGrid><a:tr h="0"><a:tc><a:txBody><a:bodyPr /><a:lstStyle /><a:p><a:pPr lvl="0" indent="0" marL="0"><a:buNone /></a:pPr><a:r><a:rPr /><a:t>Component</a:t></a:r></a:p></a:txBody><a:tcPr /></a:tc><a:tc><a:txBody><a:bodyPr /><a:lstStyle /><a:p><a:pPr lvl="0" indent="0" marL="0"><a:buNone /></a:pPr><a:r><a:rPr /><a:t>Our context</a:t></a:r></a:p></a:txBody><a:tcPr /></a:tc></a:tr><a:tr h="0"><a:tc><a:txBody><a:bodyPr /><a:lstStyle /><a:p><a:pPr lvl="0" indent="0" marL="0"><a:buNone /></a:pPr><a:r><a:rPr /><a:t>Group 1</a:t></a:r></a:p></a:txBody></a:tc><a:tc><a:txBody><a:bodyPr /><a:lstStyle /><a:p><a:pPr lvl="0" indent="0" marL="0"><a:buNone /></a:pPr><a:r><a:rPr /><a:t>Shady leaves</a:t></a:r></a:p></a:txBody></a:tc></a:tr><a:tr h="0"><a:tc><a:txBody><a:bodyPr /><a:lstStyle /><a:p><a:pPr lvl="0" indent="0" marL="0"><a:buNone /></a:pPr><a:r><a:rPr /><a:t>Group 2</a:t></a:r></a:p></a:txBody></a:tc><a:tc><a:txBody><a:bodyPr /><a:lstStyle /><a:p><a:pPr lvl="0" indent="0" marL="0"><a:buNone /></a:pPr><a:r><a:rPr /><a:t>Sunny leaves</a:t></a:r></a:p></a:txBody></a:tc></a:tr><a:tr h="0"><a:tc><a:txBody><a:bodyPr /><a:lstStyle /><a:p><a:pPr lvl="0" indent="0" marL="0"><a:buNone /></a:pPr><a:r><a:rPr /><a:t>Measurement</a:t></a:r></a:p></a:txBody></a:tc><a:tc><a:txBody><a:bodyPr /><a:lstStyle /><a:p><a:pPr lvl="0" indent="0" marL="0"><a:buNone /></a:pPr><a:r><a:rPr><a:latin typeface="Courier" /></a:rPr><a:t>weight_g</a:t></a:r></a:p></a:txBody></a:tc></a:tr><a:tr h="0"><a:tc><a:txBody><a:bodyPr /><a:lstStyle /><a:p><a:pPr lvl="0" indent="0" marL="0"><a:buNone /></a:pPr><a:r><a:rPr /><a:t>H₀</a:t></a:r></a:p></a:txBody></a:tc><a:tc><a:txBody><a:bodyPr /><a:lstStyle /><a:p><a:pPr lvl="0" indent="0" marL="0"><a:buNone /></a:pPr><a14:m><m:oMath xmlns:m="http://schemas.openxmlformats.org/officeDocument/2006/math"><m:sSub><m:e><m:r><m:t>μ</m:t></m:r></m:e><m:sub><m:r><m:t>s</m:t></m:r><m:r><m:t>h</m:t></m:r><m:r><m:t>a</m:t></m:r><m:r><m:t>d</m:t></m:r><m:r><m:t>y</m:t></m:r></m:sub></m:sSub><m:r><m:rPr><m:sty m:val="p" /></m:rPr><m:t>=</m:t></m:r><m:sSub><m:e><m:r><m:t>μ</m:t></m:r></m:e><m:sub><m:r><m:t>s</m:t></m:r><m:r><m:t>u</m:t></m:r><m:r><m:t>n</m:t></m:r><m:r><m:t>n</m:t></m:r><m:r><m:t>y</m:t></m:r></m:sub></m:sSub></m:oMath></a14:m></a:p></a:txBody></a:tc></a:tr><a:tr h="0"><a:tc><a:txBody><a:bodyPr /><a:lstStyle /><a:p><a:pPr lvl="0" indent="0" marL="0"><a:buNone /></a:pPr><a:r><a:rPr /><a:t>Hₐ</a:t></a:r></a:p></a:txBody></a:tc><a:tc><a:txBody><a:bodyPr /><a:lstStyle /><a:p><a:pPr lvl="0" indent="0" marL="0"><a:buNone /></a:pPr><a14:m><m:oMath xmlns:m="http://schemas.openxmlformats.org/officeDocument/2006/math"><m:sSub><m:e><m:r><m:t>μ</m:t></m:r></m:e><m:sub><m:r><m:t>s</m:t></m:r><m:r><m:t>h</m:t></m:r><m:r><m:t>a</m:t></m:r><m:r><m:t>d</m:t></m:r><m:r><m:t>y</m:t></m:r></m:sub></m:sSub><m:r><m:rPr><m:sty m:val="p" /></m:rPr><m:t>≠</m:t></m:r><m:sSub><m:e><m:r><m:t>μ</m:t></m:r></m:e><m:sub><m:r><m:t>s</m:t></m:r><m:r><m:t>u</m:t></m:r><m:r><m:t>n</m:t></m:r><m:r><m:t>n</m:t></m:r><m:r><m:t>y</m:t></m:r></m:sub></m:sSub></m:oMath></a14:m></a:p></a:txBody></a:tc></a:tr></a:tbl></a:graphicData></a:graphic></p:graphicFrame></p:spTree></p:cSld></p:sld>
+<file path=ppt/slides/slide10.xml><?xml version="1.0" encoding="UTF-8"?><p:sld xmlns:a="http://schemas.openxmlformats.org/drawingml/2006/main" xmlns:r="http://schemas.openxmlformats.org/officeDocument/2006/relationships" xmlns:p="http://schemas.openxmlformats.org/presentationml/2006/main"><p:cSld><p:spTree><p:nvGrpSpPr><p:cNvPr id="1" name="" /><p:cNvGrpSpPr /><p:nvPr /></p:nvGrpSpPr><p:grpSpPr><a:xfrm><a:off x="0" y="0" /><a:ext cx="0" cy="0" /><a:chOff x="0" y="0" /><a:chExt cx="0" cy="0" /></a:xfrm></p:grpSpPr><p:sp><p:nvSpPr><p:cNvPr id="2" name="Title 1" /><p:cNvSpPr><a:spLocks noGrp="1" /></p:cNvSpPr><p:nvPr><p:ph type="title" /></p:nvPr></p:nvSpPr><p:spPr><a:xfrm><a:off x="0" y="0" /><a:ext cx="9144000" cy="602780" /></a:xfrm><a:solidFill><a:srgbClr val="1A1A2E" /></a:solidFill></p:spPr><p:txBody><a:bodyPr /><a:lstStyle /><a:p><a:pPr lvl="0" indent="0" marL="0"><a:buNone /></a:pPr><a:r><a:rPr /><a:t>What Is a Two-Sample t-Test?</a:t></a:r></a:p></p:txBody></p:sp><mc:AlternateContent xmlns:mc="http://schemas.openxmlformats.org/markup-compatibility/2006"><mc:Choice xmlns:a14="http://schemas.microsoft.com/office/drawing/2010/main" Requires="a14"><p:sp><p:nvSpPr><p:cNvPr id="3" name="Content Placeholder 2" /><p:cNvSpPr><a:spLocks noGrp="1" /></p:cNvSpPr><p:nvPr><p:ph idx="1" sz="half" /></p:nvPr></p:nvSpPr><p:spPr /><p:txBody><a:bodyPr /><a:lstStyle /><a:p><a:pPr lvl="0" indent="0" marL="0"><a:buNone /></a:pPr><a:r><a:rPr /><a:t>A two-sample t-test compares the </a:t></a:r><a:r><a:rPr b="1" /><a:t>means of two independent groups</a:t></a:r><a:r><a:rPr /><a:t>.</a:t></a:r></a:p><a:p><a:pPr lvl="0" indent="0" marL="0"><a:buNone /></a:pPr><a:r><a:rPr /><a:t>It asks: </a:t></a:r><a:r><a:rPr i="1" /><a:t>Could both groups plausibly be drawn from populations with the same mean?</a:t></a:r></a:p><a:p><a:pPr lvl="0" indent="0" marL="0"><a:buNone /></a:pPr><a:r><a:rPr /><a:t>The </a:t></a:r><a:r><a:rPr b="1" /><a:t>t-statistic</a:t></a:r><a:r><a:rPr /><a:t> is:</a:t></a:r></a:p><a:p><a:pPr lvl="0" indent="0" marL="0"><a:buNone /></a:pPr><a14:m><m:oMathPara xmlns:m="http://schemas.openxmlformats.org/officeDocument/2006/math"><m:oMathParaPr><m:jc m:val="center" /></m:oMathParaPr><m:oMath><m:r><m:t>t</m:t></m:r><m:r><m:rPr><m:sty m:val="p" /></m:rPr><m:t>=</m:t></m:r><m:f><m:fPr><m:type m:val="bar" /></m:fPr><m:num><m:sSub><m:e><m:acc><m:accPr><m:chr m:val="‾" /></m:accPr><m:e><m:r><m:t>x</m:t></m:r></m:e></m:acc></m:e><m:sub><m:r><m:t>1</m:t></m:r></m:sub></m:sSub><m:r><m:rPr><m:sty m:val="p" /></m:rPr><m:t>−</m:t></m:r><m:sSub><m:e><m:acc><m:accPr><m:chr m:val="‾" /></m:accPr><m:e><m:r><m:t>x</m:t></m:r></m:e></m:acc></m:e><m:sub><m:r><m:t>2</m:t></m:r></m:sub></m:sSub></m:num><m:den><m:sSub><m:e><m:r><m:rPr><m:nor /><m:sty m:val="p" /></m:rPr><m:t>SE</m:t></m:r></m:e><m:sub><m:r><m:rPr><m:nor /><m:sty m:val="p" /></m:rPr><m:t>diff</m:t></m:r></m:sub></m:sSub></m:den></m:f></m:oMath></m:oMathPara></a14:m></a:p><a:p><a:pPr lvl="0" /><a:r><a:rPr /><a:t>Numerator: the </a:t></a:r><a:r><a:rPr b="1" /><a:t>observed difference</a:t></a:r><a:r><a:rPr /><a:t> in means</a:t></a:r></a:p><a:p><a:pPr lvl="0" /><a:r><a:rPr /><a:t>Denominator: the </a:t></a:r><a:r><a:rPr b="1" /><a:t>uncertainty</a:t></a:r><a:r><a:rPr /><a:t> in that difference (SE of the difference)</a:t></a:r></a:p><a:p><a:pPr lvl="0" indent="0" marL="0"><a:buNone /></a:pPr><a:r><a:rPr b="1" /><a:t>Large |t|</a:t></a:r><a:r><a:rPr /><a:t> → the difference is large relative to the noise → small </a:t></a:r><a:r><a:rPr i="1" /><a:t>p</a:t></a:r><a:r><a:rPr /><a:t>-value</a:t></a:r></a:p></p:txBody></p:sp></mc:Choice></mc:AlternateContent><p:graphicFrame><p:nvGraphicFramePr><p:cNvPr id="6" name="Content Placeholder 5" /><p:cNvGraphicFramePr><a:graphicFrameLocks noGrp="1" /></p:cNvGraphicFramePr><p:nvPr><p:ph idx="1" /></p:nvPr></p:nvGraphicFramePr><p:xfrm><a:off x="4495800" y="660400" /><a:ext cx="4406900" cy="3810000" /></p:xfrm><a:graphic><a:graphicData uri="http://schemas.openxmlformats.org/drawingml/2006/table"><a:tbl><a:tblPr firstRow="1" bandRow="1"><a:tableStyleId>{5C22544A-7EE6-4342-B048-85BDC9FD1C3A}</a:tableStyleId></a:tblPr><a:tblGrid><a:gridCol w="2197100" /><a:gridCol w="2197100" /></a:tblGrid><a:tr h="0"><a:tc><a:txBody><a:bodyPr /><a:lstStyle /><a:p><a:pPr lvl="0" indent="0" marL="0"><a:buNone /></a:pPr><a:r><a:rPr /><a:t>Component</a:t></a:r></a:p></a:txBody><a:tcPr /></a:tc><a:tc><a:txBody><a:bodyPr /><a:lstStyle /><a:p><a:pPr lvl="0" indent="0" marL="0"><a:buNone /></a:pPr><a:r><a:rPr /><a:t>Our context</a:t></a:r></a:p></a:txBody><a:tcPr /></a:tc></a:tr><a:tr h="0"><a:tc><a:txBody><a:bodyPr /><a:lstStyle /><a:p><a:pPr lvl="0" indent="0" marL="0"><a:buNone /></a:pPr><a:r><a:rPr /><a:t>Group 1</a:t></a:r></a:p></a:txBody></a:tc><a:tc><a:txBody><a:bodyPr /><a:lstStyle /><a:p><a:pPr lvl="0" indent="0" marL="0"><a:buNone /></a:pPr><a:r><a:rPr /><a:t>Shady leaves</a:t></a:r></a:p></a:txBody></a:tc></a:tr><a:tr h="0"><a:tc><a:txBody><a:bodyPr /><a:lstStyle /><a:p><a:pPr lvl="0" indent="0" marL="0"><a:buNone /></a:pPr><a:r><a:rPr /><a:t>Group 2</a:t></a:r></a:p></a:txBody></a:tc><a:tc><a:txBody><a:bodyPr /><a:lstStyle /><a:p><a:pPr lvl="0" indent="0" marL="0"><a:buNone /></a:pPr><a:r><a:rPr /><a:t>Sunny leaves</a:t></a:r></a:p></a:txBody></a:tc></a:tr><a:tr h="0"><a:tc><a:txBody><a:bodyPr /><a:lstStyle /><a:p><a:pPr lvl="0" indent="0" marL="0"><a:buNone /></a:pPr><a:r><a:rPr /><a:t>Measurement</a:t></a:r></a:p></a:txBody></a:tc><a:tc><a:txBody><a:bodyPr /><a:lstStyle /><a:p><a:pPr lvl="0" indent="0" marL="0"><a:buNone /></a:pPr><a:r><a:rPr><a:latin typeface="Courier" /></a:rPr><a:t>mass_g</a:t></a:r></a:p></a:txBody></a:tc></a:tr><a:tr h="0"><a:tc><a:txBody><a:bodyPr /><a:lstStyle /><a:p><a:pPr lvl="0" indent="0" marL="0"><a:buNone /></a:pPr><a:r><a:rPr /><a:t>H₀</a:t></a:r></a:p></a:txBody></a:tc><a:tc><a:txBody><a:bodyPr /><a:lstStyle /><a:p><a:pPr lvl="0" indent="0" marL="0"><a:buNone /></a:pPr><a14:m><m:oMath xmlns:m="http://schemas.openxmlformats.org/officeDocument/2006/math"><m:sSub><m:e><m:r><m:t>μ</m:t></m:r></m:e><m:sub><m:r><m:t>s</m:t></m:r><m:r><m:t>h</m:t></m:r><m:r><m:t>a</m:t></m:r><m:r><m:t>d</m:t></m:r><m:r><m:t>y</m:t></m:r></m:sub></m:sSub><m:r><m:rPr><m:sty m:val="p" /></m:rPr><m:t>=</m:t></m:r><m:sSub><m:e><m:r><m:t>μ</m:t></m:r></m:e><m:sub><m:r><m:t>s</m:t></m:r><m:r><m:t>u</m:t></m:r><m:r><m:t>n</m:t></m:r><m:r><m:t>n</m:t></m:r><m:r><m:t>y</m:t></m:r></m:sub></m:sSub></m:oMath></a14:m></a:p></a:txBody></a:tc></a:tr><a:tr h="0"><a:tc><a:txBody><a:bodyPr /><a:lstStyle /><a:p><a:pPr lvl="0" indent="0" marL="0"><a:buNone /></a:pPr><a:r><a:rPr /><a:t>Hₐ</a:t></a:r></a:p></a:txBody></a:tc><a:tc><a:txBody><a:bodyPr /><a:lstStyle /><a:p><a:pPr lvl="0" indent="0" marL="0"><a:buNone /></a:pPr><a14:m><m:oMath xmlns:m="http://schemas.openxmlformats.org/officeDocument/2006/math"><m:sSub><m:e><m:r><m:t>μ</m:t></m:r></m:e><m:sub><m:r><m:t>s</m:t></m:r><m:r><m:t>h</m:t></m:r><m:r><m:t>a</m:t></m:r><m:r><m:t>d</m:t></m:r><m:r><m:t>y</m:t></m:r></m:sub></m:sSub><m:r><m:rPr><m:sty m:val="p" /></m:rPr><m:t>≠</m:t></m:r><m:sSub><m:e><m:r><m:t>μ</m:t></m:r></m:e><m:sub><m:r><m:t>s</m:t></m:r><m:r><m:t>u</m:t></m:r><m:r><m:t>n</m:t></m:r><m:r><m:t>n</m:t></m:r><m:r><m:t>y</m:t></m:r></m:sub></m:sSub></m:oMath></a14:m></a:p></a:txBody></a:tc></a:tr></a:tbl></a:graphicData></a:graphic></p:graphicFrame></p:spTree></p:cSld></p:sld>
 </file>
 
 <file path=ppt/slides/slide11.xml><?xml version="1.0" encoding="utf-8"?>
@@ -3879,7 +3879,7 @@
             </a:r>
             <a:r>
               <a:rPr sz="2000"/>
-              <a:t> t = difference ÷ SE-of-the-difference, and the difference is 4 g. Do you expect |t| to land nearer 1, 5, or 10? Predict before the numbers appear.</a:t>
+              <a:t> t = difference ÷ SE-of-the-difference, and the two means differ by only about 0.02 g. Do you expect |t| to land nearer 0.5, 3, or 10? Predict before the numbers appear.</a:t>
             </a:r>
           </a:p>
         </p:txBody>
@@ -3941,7 +3941,7 @@
                 </a:solidFill>
                 <a:latin typeface="Courier"/>
               </a:rPr>
-              <a:t>stats_df &lt;- tree_df </a:t>
+              <a:t>stats_df &lt;- leaf_df </a:t>
             </a:r>
             <a:r>
               <a:rPr>
@@ -3978,7 +3978,7 @@
                 </a:solidFill>
                 <a:latin typeface="Courier"/>
               </a:rPr>
-              <a:t>(side) </a:t>
+              <a:t>(shade) </a:t>
             </a:r>
             <a:r>
               <a:rPr>
@@ -4088,7 +4088,7 @@
                 </a:solidFill>
                 <a:latin typeface="Courier"/>
               </a:rPr>
-              <a:t>(weight_g)),</a:t>
+              <a:t>(mass_g)),</a:t>
             </a:r>
             <a:br/>
             <a:r>
@@ -4134,7 +4134,7 @@
                 </a:solidFill>
                 <a:latin typeface="Courier"/>
               </a:rPr>
-              <a:t>(weight_g, </a:t>
+              <a:t>(mass_g, </a:t>
             </a:r>
             <a:r>
               <a:rPr>
@@ -4216,7 +4216,7 @@
                 </a:solidFill>
                 <a:latin typeface="Courier"/>
               </a:rPr>
-              <a:t>(weight_g, </a:t>
+              <a:t>(mass_g, </a:t>
             </a:r>
             <a:r>
               <a:rPr>
@@ -4309,7 +4309,7 @@
                 </a:solidFill>
                 <a:latin typeface="Courier"/>
               </a:rPr>
-              <a:t>side </a:t>
+              <a:t>shade </a:t>
             </a:r>
             <a:r>
               <a:rPr>
@@ -4391,7 +4391,7 @@
                 </a:solidFill>
                 <a:latin typeface="Courier"/>
               </a:rPr>
-              <a:t>side </a:t>
+              <a:t>shade </a:t>
             </a:r>
             <a:r>
               <a:rPr>
@@ -4473,7 +4473,7 @@
                 </a:solidFill>
                 <a:latin typeface="Courier"/>
               </a:rPr>
-              <a:t>side </a:t>
+              <a:t>shade </a:t>
             </a:r>
             <a:r>
               <a:rPr>
@@ -4555,7 +4555,7 @@
                 </a:solidFill>
                 <a:latin typeface="Courier"/>
               </a:rPr>
-              <a:t>side </a:t>
+              <a:t>shade </a:t>
             </a:r>
             <a:r>
               <a:rPr>
@@ -4637,7 +4637,7 @@
                 </a:solidFill>
                 <a:latin typeface="Courier"/>
               </a:rPr>
-              <a:t>side </a:t>
+              <a:t>shade </a:t>
             </a:r>
             <a:r>
               <a:rPr>
@@ -4719,7 +4719,7 @@
                 </a:solidFill>
                 <a:latin typeface="Courier"/>
               </a:rPr>
-              <a:t>side </a:t>
+              <a:t>shade </a:t>
             </a:r>
             <a:r>
               <a:rPr>
@@ -5021,7 +5021,7 @@
                 </a:solidFill>
                 <a:latin typeface="Courier"/>
               </a:rPr>
-              <a:t>2</a:t>
+              <a:t>3</a:t>
             </a:r>
             <a:r>
               <a:rPr>
@@ -5077,7 +5077,7 @@
               <a:rPr>
                 <a:latin typeface="Courier"/>
               </a:rPr>
-              <a:t>Difference in means: 4 g</a:t>
+              <a:t>Difference in means: 0.018 g</a:t>
             </a:r>
           </a:p>
           <a:p>
@@ -5201,7 +5201,7 @@
               <a:rPr>
                 <a:latin typeface="Courier"/>
               </a:rPr>
-              <a:t>SE of difference:    0.411 </a:t>
+              <a:t>SE of difference:    0.0505 </a:t>
             </a:r>
           </a:p>
           <a:p>
@@ -5325,7 +5325,7 @@
               <a:rPr>
                 <a:latin typeface="Courier"/>
               </a:rPr>
-              <a:t>t-statistic:         9.733 </a:t>
+              <a:t>t-statistic:         0.356 </a:t>
             </a:r>
           </a:p>
         </p:txBody>
@@ -5361,11 +5361,11 @@
                 </a:pPr>
                 <a:r>
                   <a:rPr/>
-                  <a:t>Difference in means: 7.80 − 3.80 = </a:t>
+                  <a:t>Difference in means: shady − sunny ≈ </a:t>
                 </a:r>
                 <a:r>
                   <a:rPr b="1"/>
-                  <a:t>4.0 g</a:t>
+                  <a:t>0.02 g</a:t>
                 </a:r>
               </a:p>
               <a:p>
@@ -5420,9 +5420,30 @@
                             </m:sSubSup>
                           </m:num>
                           <m:den>
-                            <m:r>
-                              <m:t>10</m:t>
-                            </m:r>
+                            <m:sSub>
+                              <m:e>
+                                <m:r>
+                                  <m:t>n</m:t>
+                                </m:r>
+                              </m:e>
+                              <m:sub>
+                                <m:r>
+                                  <m:t>s</m:t>
+                                </m:r>
+                                <m:r>
+                                  <m:t>h</m:t>
+                                </m:r>
+                                <m:r>
+                                  <m:t>a</m:t>
+                                </m:r>
+                                <m:r>
+                                  <m:t>d</m:t>
+                                </m:r>
+                                <m:r>
+                                  <m:t>y</m:t>
+                                </m:r>
+                              </m:sub>
+                            </m:sSub>
                           </m:den>
                         </m:f>
                         <m:r>
@@ -5467,9 +5488,30 @@
                             </m:sSubSup>
                           </m:num>
                           <m:den>
-                            <m:r>
-                              <m:t>10</m:t>
-                            </m:r>
+                            <m:sSub>
+                              <m:e>
+                                <m:r>
+                                  <m:t>n</m:t>
+                                </m:r>
+                              </m:e>
+                              <m:sub>
+                                <m:r>
+                                  <m:t>s</m:t>
+                                </m:r>
+                                <m:r>
+                                  <m:t>u</m:t>
+                                </m:r>
+                                <m:r>
+                                  <m:t>n</m:t>
+                                </m:r>
+                                <m:r>
+                                  <m:t>n</m:t>
+                                </m:r>
+                                <m:r>
+                                  <m:t>y</m:t>
+                                </m:r>
+                              </m:sub>
+                            </m:sSub>
                           </m:den>
                         </m:f>
                       </m:e>
@@ -5492,7 +5534,15 @@
                 </a:pPr>
                 <a:r>
                   <a:rPr/>
-                  <a:t>The observed difference is ~10 standard errors above zero — very far from what we’d expect if H₀ were true. You’ll try this yourself with a calculator in the activity’s optional section — today the goal is just to see where the number comes from.</a:t>
+                  <a:t>The observed difference is </a:t>
+                </a:r>
+                <a:r>
+                  <a:rPr b="1"/>
+                  <a:t>well under one standard error</a:t>
+                </a:r>
+                <a:r>
+                  <a:rPr/>
+                  <a:t> from zero — right in the range you’d expect if H₀ were true. You’ll try this yourself with a calculator in the activity’s optional section — today the goal is just to see where the number comes from.</a:t>
                 </a:r>
               </a:p>
             </p:txBody>
@@ -5855,7 +5905,7 @@
                 </a:r>
                 <a:r>
                   <a:rPr b="1"/>
-                  <a:t>same mean weight</a:t>
+                  <a:t>same mean mass</a:t>
                 </a:r>
                 <a:r>
                   <a:rPr/>
@@ -5963,7 +6013,7 @@
                 </a:pPr>
                 <a:r>
                   <a:rPr/>
-                  <a:t>The mean leaf weights </a:t>
+                  <a:t>The mean leaf masses </a:t>
                 </a:r>
                 <a:r>
                   <a:rPr b="1"/>
@@ -6154,7 +6204,7 @@
                 </a:solidFill>
                 <a:latin typeface="Courier"/>
               </a:rPr>
-              <a:t>hist_norm_plot &lt;- tree_df </a:t>
+              <a:t>hist_norm_plot &lt;- leaf_df </a:t>
             </a:r>
             <a:r>
               <a:rPr>
@@ -6227,7 +6277,7 @@
                 </a:solidFill>
                 <a:latin typeface="Courier"/>
               </a:rPr>
-              <a:t> weight_g, </a:t>
+              <a:t> mass_g, </a:t>
             </a:r>
             <a:r>
               <a:rPr>
@@ -6245,7 +6295,7 @@
                 </a:solidFill>
                 <a:latin typeface="Courier"/>
               </a:rPr>
-              <a:t> side)) </a:t>
+              <a:t> shade)) </a:t>
             </a:r>
             <a:r>
               <a:rPr>
@@ -6309,7 +6359,7 @@
                 </a:solidFill>
                 <a:latin typeface="Courier"/>
               </a:rPr>
-              <a:t>1</a:t>
+              <a:t>0.05</a:t>
             </a:r>
             <a:r>
               <a:rPr>
@@ -6445,7 +6495,7 @@
                 </a:solidFill>
                 <a:latin typeface="Courier"/>
               </a:rPr>
-              <a:t>side, </a:t>
+              <a:t>shade, </a:t>
             </a:r>
             <a:r>
               <a:rPr>
@@ -6555,7 +6605,7 @@
                 </a:solidFill>
                 <a:latin typeface="Courier"/>
               </a:rPr>
-              <a:t>"Leaf Weight Distribution by Side"</a:t>
+              <a:t>"Leaf Mass Distribution by Shade"</a:t>
             </a:r>
             <a:r>
               <a:rPr>
@@ -6601,7 +6651,7 @@
                 </a:solidFill>
                 <a:latin typeface="Courier"/>
               </a:rPr>
-              <a:t>"Leaf Weight (g)"</a:t>
+              <a:t>"Leaf Mass (g)"</a:t>
             </a:r>
             <a:r>
               <a:rPr>
@@ -6882,15 +6932,7 @@
             </a:pPr>
             <a:r>
               <a:rPr/>
-              <a:t>With n = 10 per group, histograms look lumpy — that is </a:t>
-            </a:r>
-            <a:r>
-              <a:rPr b="1"/>
-              <a:t>normal for small samples</a:t>
-            </a:r>
-            <a:r>
-              <a:rPr/>
-              <a:t>.</a:t>
+              <a:t>With ~25 per group these are readable, but still lumpy — that is normal for real ecological data.</a:t>
             </a:r>
           </a:p>
           <a:p>
@@ -7092,7 +7134,7 @@
                 </a:solidFill>
                 <a:latin typeface="Courier"/>
               </a:rPr>
-              <a:t>tree_df </a:t>
+              <a:t>leaf_df </a:t>
             </a:r>
             <a:r>
               <a:rPr>
@@ -7129,7 +7171,7 @@
                 </a:solidFill>
                 <a:latin typeface="Courier"/>
               </a:rPr>
-              <a:t>(side </a:t>
+              <a:t>(shade </a:t>
             </a:r>
             <a:r>
               <a:rPr>
@@ -7202,7 +7244,7 @@
                 </a:solidFill>
                 <a:latin typeface="Courier"/>
               </a:rPr>
-              <a:t>(weight_g) </a:t>
+              <a:t>(mass_g) </a:t>
             </a:r>
             <a:r>
               <a:rPr>
@@ -7253,7 +7295,7 @@
               <a:t>
     Shapiro-Wilk normality test
 data:  .
-W = 0.8197, p-value = 0.02513</a:t>
+W = 0.95266, p-value = 0.2876</a:t>
             </a:r>
           </a:p>
           <a:p>
@@ -7277,7 +7319,7 @@
                 </a:solidFill>
                 <a:latin typeface="Courier"/>
               </a:rPr>
-              <a:t>tree_df </a:t>
+              <a:t>leaf_df </a:t>
             </a:r>
             <a:r>
               <a:rPr>
@@ -7314,7 +7356,7 @@
                 </a:solidFill>
                 <a:latin typeface="Courier"/>
               </a:rPr>
-              <a:t>(side </a:t>
+              <a:t>(shade </a:t>
             </a:r>
             <a:r>
               <a:rPr>
@@ -7387,7 +7429,7 @@
                 </a:solidFill>
                 <a:latin typeface="Courier"/>
               </a:rPr>
-              <a:t>(weight_g) </a:t>
+              <a:t>(mass_g) </a:t>
             </a:r>
             <a:r>
               <a:rPr>
@@ -7438,7 +7480,7 @@
               <a:t>
     Shapiro-Wilk normality test
 data:  .
-W = 0.89461, p-value = 0.191</a:t>
+W = 0.92364, p-value = 0.0427</a:t>
             </a:r>
           </a:p>
         </p:txBody>
@@ -7515,7 +7557,7 @@
             </a:pPr>
             <a:r>
               <a:rPr sz="2000" b="1"/>
-              <a:t>Small-sample caution:</a:t>
+              <a:t>One side may fail, the other pass.</a:t>
             </a:r>
           </a:p>
           <a:p>
@@ -7524,15 +7566,15 @@
             </a:pPr>
             <a:r>
               <a:rPr sz="2000"/>
-              <a:t>With n = 10, this test has </a:t>
-            </a:r>
-            <a:r>
-              <a:rPr sz="2000" b="1"/>
-              <a:t>low power</a:t>
+              <a:t>A borderline Shapiro result (</a:t>
+            </a:r>
+            <a:r>
+              <a:rPr sz="2000" i="1"/>
+              <a:t>p</a:t>
             </a:r>
             <a:r>
               <a:rPr sz="2000"/>
-              <a:t> — it rarely detects non-normality even when present. The histogram is equally important.</a:t>
+              <a:t> just under 0.05) with a roughly bell-shaped histogram is not a reason to abandon the t-test — it is robust to mild non-normality. Read the histogram and the test together.</a:t>
             </a:r>
           </a:p>
         </p:txBody>
@@ -7739,11 +7781,11 @@
             <a:pPr lvl="0"/>
             <a:r>
               <a:rPr b="1"/>
-              <a:t>Finding:</a:t>
+              <a:t>Prediction:</a:t>
             </a:r>
             <a:r>
               <a:rPr/>
-              <a:t> shady leaves appear heavier, taller, and wider than sunny leaves</a:t>
+              <a:t> shady-side leaves would be heavier than sunny-side leaves</a:t>
             </a:r>
           </a:p>
           <a:p>
@@ -7770,15 +7812,7 @@
             </a:pPr>
             <a:r>
               <a:rPr sz="2000"/>
-              <a:t>We described the pattern in our data. Over the next two lectures we formally test whether that pattern is </a:t>
-            </a:r>
-            <a:r>
-              <a:rPr sz="2000" i="1"/>
-              <a:t>statistically significant</a:t>
-            </a:r>
-            <a:r>
-              <a:rPr sz="2000"/>
-              <a:t> — today we set the test up, next time we run it.</a:t>
+              <a:t>We described the pattern in our data. Over the next two lectures we formally test whether the sides really differ — today we set the test up, next time we run it.</a:t>
             </a:r>
           </a:p>
         </p:txBody>
@@ -7882,7 +7916,7 @@
                 </a:solidFill>
                 <a:latin typeface="Courier"/>
               </a:rPr>
-              <a:t>(weight_g </a:t>
+              <a:t>(mass_g </a:t>
             </a:r>
             <a:r>
               <a:rPr>
@@ -7900,7 +7934,7 @@
                 </a:solidFill>
                 <a:latin typeface="Courier"/>
               </a:rPr>
-              <a:t> side, </a:t>
+              <a:t> shade, </a:t>
             </a:r>
             <a:r>
               <a:rPr>
@@ -7918,7 +7952,7 @@
                 </a:solidFill>
                 <a:latin typeface="Courier"/>
               </a:rPr>
-              <a:t> tree_df)</a:t>
+              <a:t> leaf_df)</a:t>
             </a:r>
           </a:p>
           <a:p>
@@ -7930,9 +7964,11 @@
                 <a:latin typeface="Courier"/>
               </a:rPr>
               <a:t>Levene's Test for Homogeneity of Variance (center = median)
-      Df F value Pr(&gt;F)
-group  1     0.6 0.4486
-      18               </a:t>
+      Df F value  Pr(&gt;F)  
+group  1  2.9667 0.09105 .
+      51                  
+---
+Signif. codes:  0 '***' 0.001 '**' 0.01 '*' 0.05 '.' 0.1 ' ' 1</a:t>
             </a:r>
           </a:p>
         </p:txBody>
@@ -8149,7 +8185,7 @@
                 </a:solidFill>
                 <a:latin typeface="Courier"/>
               </a:rPr>
-              <a:t>(weight_g </a:t>
+              <a:t>(mass_g </a:t>
             </a:r>
             <a:r>
               <a:rPr>
@@ -8167,7 +8203,7 @@
                 </a:solidFill>
                 <a:latin typeface="Courier"/>
               </a:rPr>
-              <a:t> side, </a:t>
+              <a:t> shade, </a:t>
             </a:r>
             <a:r>
               <a:rPr>
@@ -8185,7 +8221,7 @@
                 </a:solidFill>
                 <a:latin typeface="Courier"/>
               </a:rPr>
-              <a:t> tree_df)</a:t>
+              <a:t> leaf_df)</a:t>
             </a:r>
           </a:p>
           <a:p>
@@ -8205,7 +8241,7 @@
               <a:rPr>
                 <a:latin typeface="Courier"/>
               </a:rPr>
-              <a:t>Error in leveneTest(weight_g ~ side, data = tree_df) :
+              <a:t>Error in leveneTest(mass_g ~ shade, data = leaf_df) :
   could not find function "leveneTest"</a:t>
             </a:r>
           </a:p>
@@ -8265,7 +8301,7 @@
                 </a:solidFill>
                 <a:latin typeface="Courier"/>
               </a:rPr>
-              <a:t>(weight_g </a:t>
+              <a:t>(mass_g </a:t>
             </a:r>
             <a:r>
               <a:rPr>
@@ -8283,7 +8319,7 @@
                 </a:solidFill>
                 <a:latin typeface="Courier"/>
               </a:rPr>
-              <a:t> side, </a:t>
+              <a:t> shade, </a:t>
             </a:r>
             <a:r>
               <a:rPr>
@@ -8301,7 +8337,7 @@
                 </a:solidFill>
                 <a:latin typeface="Courier"/>
               </a:rPr>
-              <a:t> tree_df)</a:t>
+              <a:t> leaf_df)</a:t>
             </a:r>
           </a:p>
         </p:txBody>
@@ -8966,7 +9002,7 @@
 </p:sld>
 </file>
 
-<file path=ppt/slides/slide4.xml><?xml version="1.0" encoding="UTF-8"?><p:sld xmlns:a="http://schemas.openxmlformats.org/drawingml/2006/main" xmlns:r="http://schemas.openxmlformats.org/officeDocument/2006/relationships" xmlns:p="http://schemas.openxmlformats.org/presentationml/2006/main"><p:cSld><p:spTree><p:nvGrpSpPr><p:cNvPr id="1" name="" /><p:cNvGrpSpPr /><p:nvPr /></p:nvGrpSpPr><p:grpSpPr><a:xfrm><a:off x="0" y="0" /><a:ext cx="0" cy="0" /><a:chOff x="0" y="0" /><a:chExt cx="0" cy="0" /></a:xfrm></p:grpSpPr><p:sp><p:nvSpPr><p:cNvPr id="2" name="Title 1" /><p:cNvSpPr><a:spLocks noGrp="1" /></p:cNvSpPr><p:nvPr><p:ph type="title" /></p:nvPr></p:nvSpPr><p:spPr><a:xfrm><a:off x="139485" y="78119" /><a:ext cx="8229600" cy="607682" /></a:xfrm></p:spPr><p:txBody><a:bodyPr /><a:lstStyle /><a:p><a:pPr lvl="0" indent="0" marL="0"><a:buNone /></a:pPr><a:r><a:rPr /><a:t>Our Hypotheses — A Reminder</a:t></a:r></a:p></p:txBody></p:sp><p:sp><p:nvSpPr><p:cNvPr id="3" name="Text Placeholder 2" /><p:cNvSpPr><a:spLocks noGrp="1" /></p:cNvSpPr><p:nvPr><p:ph idx="1" type="body" /></p:nvPr></p:nvSpPr><p:spPr /><p:txBody><a:bodyPr /><a:lstStyle /><a:p><a:pPr lvl="0" indent="0" marL="0"><a:buNone /></a:pPr><a:r><a:rPr b="1" /><a:t>Biological prediction:</a:t></a:r></a:p><a:p><a:pPr lvl="0" indent="0" marL="0"><a:buNone /></a:pPr><a:r><a:rPr /><a:t>Shady-side leaves will be </a:t></a:r><a:r><a:rPr b="1" /><a:t>larger and heavier</a:t></a:r><a:r><a:rPr /><a:t> — they need more surface area to capture the limited light filtering through the canopy.</a:t></a:r></a:p></p:txBody></p:sp><p:graphicFrame><p:nvGraphicFramePr><p:cNvPr id="6" name="Content Placeholder 5" /><p:cNvGraphicFramePr><a:graphicFrameLocks noGrp="1" /></p:cNvGraphicFramePr><p:nvPr><p:ph idx="1" /></p:nvPr></p:nvGraphicFramePr><p:xfrm><a:off x="127000" y="1270000" /><a:ext cx="4432300" cy="3302000" /></p:xfrm><a:graphic><a:graphicData uri="http://schemas.openxmlformats.org/drawingml/2006/table"><a:tbl><a:tblPr firstRow="1" bandRow="1"><a:tableStyleId>{5C22544A-7EE6-4342-B048-85BDC9FD1C3A}</a:tableStyleId></a:tblPr><a:tblGrid><a:gridCol w="2209800" /><a:gridCol w="2209800" /></a:tblGrid><a:tr h="0"><a:tc><a:txBody><a:bodyPr /><a:lstStyle /><a:p><a:endParaRPr /></a:p></a:txBody><a:tcPr /></a:tc><a:tc><a:txBody><a:bodyPr /><a:lstStyle /><a:p><a:pPr lvl="0" indent="0" marL="0"><a:buNone /></a:pPr><a:r><a:rPr /><a:t>Formal statement</a:t></a:r></a:p></a:txBody><a:tcPr /></a:tc></a:tr><a:tr h="0"><a:tc><a:txBody><a:bodyPr /><a:lstStyle /><a:p><a:pPr lvl="0" indent="0" marL="0"><a:buNone /></a:pPr><a:r><a:rPr b="1" /><a:t>H₀ — null</a:t></a:r></a:p></a:txBody></a:tc><a:tc><a:txBody><a:bodyPr /><a:lstStyle /><a:p><a:pPr lvl="0" indent="0" marL="0"><a:buNone /></a:pPr><a14:m><m:oMath xmlns:m="http://schemas.openxmlformats.org/officeDocument/2006/math"><m:sSub><m:e><m:r><m:t>μ</m:t></m:r></m:e><m:sub><m:r><m:t>s</m:t></m:r><m:r><m:t>h</m:t></m:r><m:r><m:t>a</m:t></m:r><m:r><m:t>d</m:t></m:r><m:r><m:t>y</m:t></m:r></m:sub></m:sSub><m:r><m:rPr><m:sty m:val="p" /></m:rPr><m:t>=</m:t></m:r><m:sSub><m:e><m:r><m:t>μ</m:t></m:r></m:e><m:sub><m:r><m:t>s</m:t></m:r><m:r><m:t>u</m:t></m:r><m:r><m:t>n</m:t></m:r><m:r><m:t>n</m:t></m:r><m:r><m:t>y</m:t></m:r></m:sub></m:sSub></m:oMath></a14:m><a:r><a:rPr /><a:t> — no difference in mean leaf weight</a:t></a:r></a:p></a:txBody></a:tc></a:tr><a:tr h="0"><a:tc><a:txBody><a:bodyPr /><a:lstStyle /><a:p><a:pPr lvl="0" indent="0" marL="0"><a:buNone /></a:pPr><a:r><a:rPr b="1" /><a:t>Hₐ — alternate</a:t></a:r></a:p></a:txBody></a:tc><a:tc><a:txBody><a:bodyPr /><a:lstStyle /><a:p><a:pPr lvl="0" indent="0" marL="0"><a:buNone /></a:pPr><a14:m><m:oMath xmlns:m="http://schemas.openxmlformats.org/officeDocument/2006/math"><m:sSub><m:e><m:r><m:t>μ</m:t></m:r></m:e><m:sub><m:r><m:t>s</m:t></m:r><m:r><m:t>h</m:t></m:r><m:r><m:t>a</m:t></m:r><m:r><m:t>d</m:t></m:r><m:r><m:t>y</m:t></m:r></m:sub></m:sSub><m:r><m:rPr><m:sty m:val="p" /></m:rPr><m:t>≠</m:t></m:r><m:sSub><m:e><m:r><m:t>μ</m:t></m:r></m:e><m:sub><m:r><m:t>s</m:t></m:r><m:r><m:t>u</m:t></m:r><m:r><m:t>n</m:t></m:r><m:r><m:t>n</m:t></m:r><m:r><m:t>y</m:t></m:r></m:sub></m:sSub></m:oMath></a14:m><a:r><a:rPr /><a:t> — mean leaf weight differs by side</a:t></a:r></a:p></a:txBody></a:tc></a:tr></a:tbl></a:graphicData></a:graphic></p:graphicFrame><p:sp><p:nvSpPr><p:cNvPr id="4" name="Content Placeholder 3" /><p:cNvSpPr><a:spLocks noGrp="1" /></p:cNvSpPr><p:nvPr><p:ph idx="2" sz="half" /></p:nvPr></p:nvSpPr><p:spPr /><p:txBody><a:bodyPr /><a:lstStyle /><a:p><a:pPr lvl="0" indent="0" marL="0"><a:buNone /></a:pPr><a:r><a:rPr /><a:t>We use a </a:t></a:r><a:r><a:rPr b="1" /><a:t>two-tailed</a:t></a:r><a:r><a:rPr /><a:t> test — we will detect a difference in </a:t></a:r><a:r><a:rPr i="1" /><a:t>either</a:t></a:r><a:r><a:rPr /><a:t> direction.</a:t></a:r></a:p></p:txBody></p:sp><p:sp><p:nvSpPr><p:cNvPr id="5" name="Text Placeholder 4" /><p:cNvSpPr><a:spLocks noGrp="1" /></p:cNvSpPr><p:nvPr><p:ph idx="3" sz="quarter" type="body" /></p:nvPr></p:nvSpPr><p:spPr /><p:txBody><a:bodyPr /><a:lstStyle /><a:p><a:pPr lvl="0" indent="0" marL="0"><a:buNone /></a:pPr><a:r><a:rPr b="1" /><a:t>Why two-tailed?</a:t></a:r></a:p><a:p><a:pPr lvl="0" /><a:r><a:rPr /><a:t>We predicted shady &gt; sunny</a:t></a:r></a:p><a:p><a:pPr lvl="0" /><a:r><a:rPr /><a:t>A one-tailed test would only reject H₀ in that direction</a:t></a:r></a:p><a:p><a:pPr lvl="0" /><a:r><a:rPr /><a:t>Two-tailed is </a:t></a:r><a:r><a:rPr b="1" /><a:t>more conservative</a:t></a:r><a:r><a:rPr /><a:t> and more broadly accepted</a:t></a:r></a:p><a:p><a:pPr lvl="0" /><a:r><a:rPr /><a:t>If the result is significant two-tailed, it is also significant one-tailed</a:t></a:r></a:p><a:p><a:pPr lvl="0" indent="0" marL="0"><a:buNone /></a:pPr><a:r><a:rPr b="1" /><a:t>α = 0.05</a:t></a:r><a:r><a:rPr /><a:t> — our threshold for rejecting H₀</a:t></a:r></a:p></p:txBody></p:sp></p:spTree></p:cSld></p:sld>
+<file path=ppt/slides/slide4.xml><?xml version="1.0" encoding="UTF-8"?><p:sld xmlns:a="http://schemas.openxmlformats.org/drawingml/2006/main" xmlns:r="http://schemas.openxmlformats.org/officeDocument/2006/relationships" xmlns:p="http://schemas.openxmlformats.org/presentationml/2006/main"><p:cSld><p:spTree><p:nvGrpSpPr><p:cNvPr id="1" name="" /><p:cNvGrpSpPr /><p:nvPr /></p:nvGrpSpPr><p:grpSpPr><a:xfrm><a:off x="0" y="0" /><a:ext cx="0" cy="0" /><a:chOff x="0" y="0" /><a:chExt cx="0" cy="0" /></a:xfrm></p:grpSpPr><p:sp><p:nvSpPr><p:cNvPr id="2" name="Title 1" /><p:cNvSpPr><a:spLocks noGrp="1" /></p:cNvSpPr><p:nvPr><p:ph type="title" /></p:nvPr></p:nvSpPr><p:spPr><a:xfrm><a:off x="139485" y="78119" /><a:ext cx="8229600" cy="607682" /></a:xfrm></p:spPr><p:txBody><a:bodyPr /><a:lstStyle /><a:p><a:pPr lvl="0" indent="0" marL="0"><a:buNone /></a:pPr><a:r><a:rPr /><a:t>Our Hypotheses — A Reminder</a:t></a:r></a:p></p:txBody></p:sp><p:sp><p:nvSpPr><p:cNvPr id="3" name="Text Placeholder 2" /><p:cNvSpPr><a:spLocks noGrp="1" /></p:cNvSpPr><p:nvPr><p:ph idx="1" type="body" /></p:nvPr></p:nvSpPr><p:spPr /><p:txBody><a:bodyPr /><a:lstStyle /><a:p><a:pPr lvl="0" indent="0" marL="0"><a:buNone /></a:pPr><a:r><a:rPr b="1" /><a:t>Biological prediction:</a:t></a:r></a:p><a:p><a:pPr lvl="0" indent="0" marL="0"><a:buNone /></a:pPr><a:r><a:rPr /><a:t>Shady-side leaves will be </a:t></a:r><a:r><a:rPr b="1" /><a:t>larger and heavier</a:t></a:r><a:r><a:rPr /><a:t> — they need more surface area to capture the limited light filtering through the canopy.</a:t></a:r></a:p></p:txBody></p:sp><p:graphicFrame><p:nvGraphicFramePr><p:cNvPr id="6" name="Content Placeholder 5" /><p:cNvGraphicFramePr><a:graphicFrameLocks noGrp="1" /></p:cNvGraphicFramePr><p:nvPr><p:ph idx="1" /></p:nvPr></p:nvGraphicFramePr><p:xfrm><a:off x="127000" y="1270000" /><a:ext cx="4432300" cy="3302000" /></p:xfrm><a:graphic><a:graphicData uri="http://schemas.openxmlformats.org/drawingml/2006/table"><a:tbl><a:tblPr firstRow="1" bandRow="1"><a:tableStyleId>{5C22544A-7EE6-4342-B048-85BDC9FD1C3A}</a:tableStyleId></a:tblPr><a:tblGrid><a:gridCol w="2209800" /><a:gridCol w="2209800" /></a:tblGrid><a:tr h="0"><a:tc><a:txBody><a:bodyPr /><a:lstStyle /><a:p><a:endParaRPr /></a:p></a:txBody><a:tcPr /></a:tc><a:tc><a:txBody><a:bodyPr /><a:lstStyle /><a:p><a:pPr lvl="0" indent="0" marL="0"><a:buNone /></a:pPr><a:r><a:rPr /><a:t>Formal statement</a:t></a:r></a:p></a:txBody><a:tcPr /></a:tc></a:tr><a:tr h="0"><a:tc><a:txBody><a:bodyPr /><a:lstStyle /><a:p><a:pPr lvl="0" indent="0" marL="0"><a:buNone /></a:pPr><a:r><a:rPr b="1" /><a:t>H₀ — null</a:t></a:r></a:p></a:txBody></a:tc><a:tc><a:txBody><a:bodyPr /><a:lstStyle /><a:p><a:pPr lvl="0" indent="0" marL="0"><a:buNone /></a:pPr><a14:m><m:oMath xmlns:m="http://schemas.openxmlformats.org/officeDocument/2006/math"><m:sSub><m:e><m:r><m:t>μ</m:t></m:r></m:e><m:sub><m:r><m:t>s</m:t></m:r><m:r><m:t>h</m:t></m:r><m:r><m:t>a</m:t></m:r><m:r><m:t>d</m:t></m:r><m:r><m:t>y</m:t></m:r></m:sub></m:sSub><m:r><m:rPr><m:sty m:val="p" /></m:rPr><m:t>=</m:t></m:r><m:sSub><m:e><m:r><m:t>μ</m:t></m:r></m:e><m:sub><m:r><m:t>s</m:t></m:r><m:r><m:t>u</m:t></m:r><m:r><m:t>n</m:t></m:r><m:r><m:t>n</m:t></m:r><m:r><m:t>y</m:t></m:r></m:sub></m:sSub></m:oMath></a14:m><a:r><a:rPr /><a:t> — no difference in mean leaf mass</a:t></a:r></a:p></a:txBody></a:tc></a:tr><a:tr h="0"><a:tc><a:txBody><a:bodyPr /><a:lstStyle /><a:p><a:pPr lvl="0" indent="0" marL="0"><a:buNone /></a:pPr><a:r><a:rPr b="1" /><a:t>Hₐ — alternate</a:t></a:r></a:p></a:txBody></a:tc><a:tc><a:txBody><a:bodyPr /><a:lstStyle /><a:p><a:pPr lvl="0" indent="0" marL="0"><a:buNone /></a:pPr><a14:m><m:oMath xmlns:m="http://schemas.openxmlformats.org/officeDocument/2006/math"><m:sSub><m:e><m:r><m:t>μ</m:t></m:r></m:e><m:sub><m:r><m:t>s</m:t></m:r><m:r><m:t>h</m:t></m:r><m:r><m:t>a</m:t></m:r><m:r><m:t>d</m:t></m:r><m:r><m:t>y</m:t></m:r></m:sub></m:sSub><m:r><m:rPr><m:sty m:val="p" /></m:rPr><m:t>≠</m:t></m:r><m:sSub><m:e><m:r><m:t>μ</m:t></m:r></m:e><m:sub><m:r><m:t>s</m:t></m:r><m:r><m:t>u</m:t></m:r><m:r><m:t>n</m:t></m:r><m:r><m:t>n</m:t></m:r><m:r><m:t>y</m:t></m:r></m:sub></m:sSub></m:oMath></a14:m><a:r><a:rPr /><a:t> — mean leaf mass differs by side</a:t></a:r></a:p></a:txBody></a:tc></a:tr></a:tbl></a:graphicData></a:graphic></p:graphicFrame><p:sp><p:nvSpPr><p:cNvPr id="4" name="Content Placeholder 3" /><p:cNvSpPr><a:spLocks noGrp="1" /></p:cNvSpPr><p:nvPr><p:ph idx="2" sz="half" /></p:nvPr></p:nvSpPr><p:spPr /><p:txBody><a:bodyPr /><a:lstStyle /><a:p><a:pPr lvl="0" indent="0" marL="0"><a:buNone /></a:pPr><a:r><a:rPr /><a:t>We use a </a:t></a:r><a:r><a:rPr b="1" /><a:t>two-tailed</a:t></a:r><a:r><a:rPr /><a:t> test — we will detect a difference in </a:t></a:r><a:r><a:rPr i="1" /><a:t>either</a:t></a:r><a:r><a:rPr /><a:t> direction.</a:t></a:r></a:p></p:txBody></p:sp><p:sp><p:nvSpPr><p:cNvPr id="5" name="Text Placeholder 4" /><p:cNvSpPr><a:spLocks noGrp="1" /></p:cNvSpPr><p:nvPr><p:ph idx="3" sz="quarter" type="body" /></p:nvPr></p:nvSpPr><p:spPr /><p:txBody><a:bodyPr /><a:lstStyle /><a:p><a:pPr lvl="0" indent="0" marL="0"><a:buNone /></a:pPr><a:r><a:rPr b="1" /><a:t>Why two-tailed?</a:t></a:r></a:p><a:p><a:pPr lvl="0" /><a:r><a:rPr /><a:t>We predicted shady &gt; sunny</a:t></a:r></a:p><a:p><a:pPr lvl="0" /><a:r><a:rPr /><a:t>A one-tailed test would only reject H₀ in that direction</a:t></a:r></a:p><a:p><a:pPr lvl="0" /><a:r><a:rPr /><a:t>Two-tailed is </a:t></a:r><a:r><a:rPr b="1" /><a:t>more conservative</a:t></a:r><a:r><a:rPr /><a:t> and more broadly accepted</a:t></a:r></a:p><a:p><a:pPr lvl="0" /><a:r><a:rPr /><a:t>If the result is significant two-tailed, it is also significant one-tailed</a:t></a:r></a:p><a:p><a:pPr lvl="0" indent="0" marL="0"><a:buNone /></a:pPr><a:r><a:rPr b="1" /><a:t>α = 0.05</a:t></a:r><a:r><a:rPr /><a:t> — our threshold for rejecting H₀</a:t></a:r></a:p></p:txBody></p:sp></p:spTree></p:cSld></p:sld>
 </file>
 
 <file path=ppt/slides/slide5.xml><?xml version="1.0" encoding="utf-8"?>
@@ -9051,11 +9087,11 @@
             </a:r>
             <a:r>
               <a:rPr b="1"/>
-              <a:t>activity worksheet</a:t>
+              <a:t>activity</a:t>
             </a:r>
             <a:r>
               <a:rPr/>
-              <a:t> and type the code yourself.</a:t>
+              <a:t> and type the code yourself into your R script.</a:t>
             </a:r>
           </a:p>
           <a:p>
@@ -9160,7 +9196,7 @@
             </a:r>
             <a:r>
               <a:rPr sz="2000"/>
-              <a:t> you see a test result forces you to reason about the test instead of just reading a number off the screen.</a:t>
+              <a:t> you see a test result forces you to reason about the test instead of reading a number off the screen.</a:t>
             </a:r>
           </a:p>
           <a:p>
@@ -9334,6 +9370,34 @@
                 </a:solidFill>
                 <a:latin typeface="Courier"/>
               </a:rPr>
+              <a:t>(janitor) </a:t>
+            </a:r>
+            <a:r>
+              <a:rPr>
+                <a:solidFill>
+                  <a:srgbClr val="5E5E5E"/>
+                </a:solidFill>
+                <a:latin typeface="Courier"/>
+              </a:rPr>
+              <a:t># clean_names()</a:t>
+            </a:r>
+            <a:br/>
+            <a:r>
+              <a:rPr>
+                <a:solidFill>
+                  <a:srgbClr val="4758AB"/>
+                </a:solidFill>
+                <a:latin typeface="Courier"/>
+              </a:rPr>
+              <a:t>library</a:t>
+            </a:r>
+            <a:r>
+              <a:rPr>
+                <a:solidFill>
+                  <a:srgbClr val="003B4F"/>
+                </a:solidFill>
+                <a:latin typeface="Courier"/>
+              </a:rPr>
               <a:t>(car) </a:t>
             </a:r>
             <a:r>
@@ -9367,7 +9431,7 @@
                 </a:solidFill>
                 <a:latin typeface="Courier"/>
               </a:rPr>
-              <a:t>tree_df &lt;- </a:t>
+              <a:t>leaf_df &lt;- </a:t>
             </a:r>
             <a:r>
               <a:rPr>
@@ -9394,16 +9458,53 @@
                 </a:solidFill>
                 <a:latin typeface="Courier"/>
               </a:rPr>
-              <a:t>"data/2026_06_25_tree_experiment_raw_data.xlsx"</a:t>
-            </a:r>
-            <a:r>
-              <a:rPr>
-                <a:solidFill>
-                  <a:srgbClr val="003B4F"/>
-                </a:solidFill>
-                <a:latin typeface="Courier"/>
-              </a:rPr>
-              <a:t>)</a:t>
+              <a:t>"data/2026_09_03_data_sci_leaf_area.xlsx"</a:t>
+            </a:r>
+            <a:r>
+              <a:rPr>
+                <a:solidFill>
+                  <a:srgbClr val="003B4F"/>
+                </a:solidFill>
+                <a:latin typeface="Courier"/>
+              </a:rPr>
+              <a:t>) </a:t>
+            </a:r>
+            <a:r>
+              <a:rPr>
+                <a:solidFill>
+                  <a:srgbClr val="5E5E5E"/>
+                </a:solidFill>
+                <a:latin typeface="Courier"/>
+              </a:rPr>
+              <a:t>%&gt;%</a:t>
+            </a:r>
+            <a:br/>
+            <a:r>
+              <a:rPr>
+                <a:solidFill>
+                  <a:srgbClr val="003B4F"/>
+                </a:solidFill>
+                <a:latin typeface="Courier"/>
+              </a:rPr>
+              <a:t>  </a:t>
+            </a:r>
+            <a:r>
+              <a:rPr>
+                <a:solidFill>
+                  <a:srgbClr val="4758AB"/>
+                </a:solidFill>
+                <a:latin typeface="Courier"/>
+              </a:rPr>
+              <a:t>clean_names</a:t>
+            </a:r>
+            <a:r>
+              <a:rPr>
+                <a:solidFill>
+                  <a:srgbClr val="003B4F"/>
+                </a:solidFill>
+                <a:latin typeface="Courier"/>
+              </a:rPr>
+              <a:t>()</a:t>
             </a:r>
           </a:p>
           <a:p>
@@ -9662,7 +9763,7 @@
                 </a:solidFill>
                 <a:latin typeface="Courier"/>
               </a:rPr>
-              <a:t>recap_plot &lt;- tree_df </a:t>
+              <a:t>recap_plot &lt;- leaf_df </a:t>
             </a:r>
             <a:r>
               <a:rPr>
@@ -9735,7 +9836,7 @@
                 </a:solidFill>
                 <a:latin typeface="Courier"/>
               </a:rPr>
-              <a:t> side, </a:t>
+              <a:t> shade, </a:t>
             </a:r>
             <a:r>
               <a:rPr>
@@ -9753,7 +9854,7 @@
                 </a:solidFill>
                 <a:latin typeface="Courier"/>
               </a:rPr>
-              <a:t> weight_g, </a:t>
+              <a:t> mass_g, </a:t>
             </a:r>
             <a:r>
               <a:rPr>
@@ -9771,7 +9872,7 @@
                 </a:solidFill>
                 <a:latin typeface="Courier"/>
               </a:rPr>
-              <a:t> side)) </a:t>
+              <a:t> shade)) </a:t>
             </a:r>
             <a:r>
               <a:rPr>
@@ -10414,7 +10515,7 @@
                 </a:solidFill>
                 <a:latin typeface="Courier"/>
               </a:rPr>
-              <a:t>"Side"</a:t>
+              <a:t>"Shade"</a:t>
             </a:r>
             <a:r>
               <a:rPr>
@@ -10450,7 +10551,7 @@
                 </a:solidFill>
                 <a:latin typeface="Courier"/>
               </a:rPr>
-              <a:t>"Leaf Weight (g)"</a:t>
+              <a:t>"Leaf Mass (g)"</a:t>
             </a:r>
             <a:r>
               <a:rPr>
@@ -10634,25 +10735,33 @@
             </a:pPr>
             <a:r>
               <a:rPr/>
-              <a:t>The means look different — but:</a:t>
+              <a:t>The two means look </a:t>
+            </a:r>
+            <a:r>
+              <a:rPr b="1"/>
+              <a:t>close</a:t>
+            </a:r>
+            <a:r>
+              <a:rPr/>
+              <a:t> — and with this much scatter, they could easily be the same:</a:t>
             </a:r>
           </a:p>
           <a:p>
             <a:pPr lvl="0"/>
             <a:r>
               <a:rPr/>
-              <a:t>We only have </a:t>
+              <a:t>About </a:t>
             </a:r>
             <a:r>
               <a:rPr b="1"/>
-              <a:t>10 leaves per group</a:t>
+              <a:t>25 leaves per group</a:t>
             </a:r>
           </a:p>
           <a:p>
             <a:pPr lvl="0"/>
             <a:r>
               <a:rPr/>
-              <a:t>There is </a:t>
+              <a:t>Lots of </a:t>
             </a:r>
             <a:r>
               <a:rPr b="1"/>
@@ -10671,11 +10780,7 @@
             </a:r>
             <a:r>
               <a:rPr b="1"/>
-              <a:t>overlap</a:t>
-            </a:r>
-            <a:r>
-              <a:rPr/>
-              <a:t> somewhat</a:t>
+              <a:t>overlap heavily</a:t>
             </a:r>
           </a:p>
           <a:p>
@@ -10701,7 +10806,7 @@
             </a:pPr>
             <a:r>
               <a:rPr sz="2000" i="1"/>
-              <a:t>“If H₀ were true, how often would we see a gap this large just by chance?”</a:t>
+              <a:t>“If H₀ were true, how often would we see a gap at least this large just by chance?”</a:t>
             </a:r>
           </a:p>
           <a:p>
@@ -10710,7 +10815,7 @@
             </a:pPr>
             <a:r>
               <a:rPr/>
-              <a:t>Small </a:t>
+              <a:t>Large </a:t>
             </a:r>
             <a:r>
               <a:rPr i="1"/>
@@ -10718,7 +10823,7 @@
             </a:r>
             <a:r>
               <a:rPr/>
-              <a:t> → the gap is unlikely to be chance.</a:t>
+              <a:t> → a gap this small is nothing unusual.</a:t>
             </a:r>
           </a:p>
         </p:txBody>
@@ -11189,7 +11294,7 @@
             </a:pPr>
             <a:r>
               <a:rPr sz="2000"/>
-              <a:t>With n = 10 per group, our main concern is </a:t>
+              <a:t>With ~25 per group, our main concern is </a:t>
             </a:r>
             <a:r>
               <a:rPr sz="2000" b="1"/>

--- a/docs/content/t_tests/t_tests_lecture.pptx
+++ b/docs/content/t_tests/t_tests_lecture.pptx
@@ -3362,7 +3362,7 @@
             </a:pPr>
             <a:r>
               <a:rPr/>
-              <a:t>2026-09-08</a:t>
+              <a:t>2026-09-10</a:t>
             </a:r>
           </a:p>
         </p:txBody>

--- a/docs/content/t_tests/t_tests_lecture.pptx
+++ b/docs/content/t_tests/t_tests_lecture.pptx
@@ -3362,7 +3362,7 @@
             </a:pPr>
             <a:r>
               <a:rPr/>
-              <a:t>2026-09-10</a:t>
+              <a:t>2026-09-14</a:t>
             </a:r>
           </a:p>
         </p:txBody>

--- a/docs/content/t_tests/t_tests_lecture.pptx
+++ b/docs/content/t_tests/t_tests_lecture.pptx
@@ -3362,7 +3362,7 @@
             </a:pPr>
             <a:r>
               <a:rPr/>
-              <a:t>2026-09-14</a:t>
+              <a:t>2026-09-21</a:t>
             </a:r>
           </a:p>
         </p:txBody>

--- a/docs/content/t_tests/t_tests_lecture.pptx
+++ b/docs/content/t_tests/t_tests_lecture.pptx
@@ -3362,7 +3362,7 @@
             </a:pPr>
             <a:r>
               <a:rPr/>
-              <a:t>2026-09-21</a:t>
+              <a:t>2026-09-22</a:t>
             </a:r>
           </a:p>
         </p:txBody>

--- a/docs/content/t_tests/t_tests_lecture.pptx
+++ b/docs/content/t_tests/t_tests_lecture.pptx
@@ -3362,7 +3362,7 @@
             </a:pPr>
             <a:r>
               <a:rPr/>
-              <a:t>2026-09-22</a:t>
+              <a:t>2026-09-23</a:t>
             </a:r>
           </a:p>
         </p:txBody>

--- a/docs/content/t_tests/t_tests_lecture.pptx
+++ b/docs/content/t_tests/t_tests_lecture.pptx
@@ -9431,7 +9431,17 @@
                 </a:solidFill>
                 <a:latin typeface="Courier"/>
               </a:rPr>
-              <a:t>leaf_df &lt;- </a:t>
+              <a:t>leaf_df &lt;-</a:t>
+            </a:r>
+            <a:br/>
+            <a:r>
+              <a:rPr>
+                <a:solidFill>
+                  <a:srgbClr val="003B4F"/>
+                </a:solidFill>
+                <a:latin typeface="Courier"/>
+              </a:rPr>
+              <a:t>  </a:t>
             </a:r>
             <a:r>
               <a:rPr>

--- a/docs/content/t_tests/t_tests_lecture.pptx
+++ b/docs/content/t_tests/t_tests_lecture.pptx
@@ -3362,7 +3362,7 @@
             </a:pPr>
             <a:r>
               <a:rPr/>
-              <a:t>2026-09-23</a:t>
+              <a:t>2026-09-24</a:t>
             </a:r>
           </a:p>
         </p:txBody>

--- a/docs/content/t_tests/t_tests_lecture.pptx
+++ b/docs/content/t_tests/t_tests_lecture.pptx
@@ -28,6 +28,10 @@
     <p:sldId id="276" r:id="rId22"/>
     <p:sldId id="277" r:id="rId23"/>
     <p:sldId id="278" r:id="rId24"/>
+    <p:sldId id="279" r:id="rId25"/>
+    <p:sldId id="280" r:id="rId26"/>
+    <p:sldId id="281" r:id="rId27"/>
+    <p:sldId id="282" r:id="rId28"/>
   </p:sldIdLst>
   <p:sldSz cx="9144000" cy="5143500" type="screen16x9"/>
   <p:notesSz cx="6858000" cy="9144000"/>
@@ -3331,7 +3335,7 @@
             </a:pPr>
             <a:r>
               <a:rPr/>
-              <a:t>Hypotheses, the t-statistic, and checking assumptions before we test</a:t>
+              <a:t>Hypotheses and checking assumptions before we test</a:t>
             </a:r>
             <a:br/>
             <a:br/>
@@ -3362,7 +3366,7 @@
             </a:pPr>
             <a:r>
               <a:rPr/>
-              <a:t>2026-09-24</a:t>
+              <a:t>2026-09-29</a:t>
             </a:r>
           </a:p>
         </p:txBody>
@@ -3372,7 +3376,90 @@
 </p:sld>
 </file>
 
-<file path=ppt/slides/slide10.xml><?xml version="1.0" encoding="UTF-8"?><p:sld xmlns:a="http://schemas.openxmlformats.org/drawingml/2006/main" xmlns:r="http://schemas.openxmlformats.org/officeDocument/2006/relationships" xmlns:p="http://schemas.openxmlformats.org/presentationml/2006/main"><p:cSld><p:spTree><p:nvGrpSpPr><p:cNvPr id="1" name="" /><p:cNvGrpSpPr /><p:nvPr /></p:nvGrpSpPr><p:grpSpPr><a:xfrm><a:off x="0" y="0" /><a:ext cx="0" cy="0" /><a:chOff x="0" y="0" /><a:chExt cx="0" cy="0" /></a:xfrm></p:grpSpPr><p:sp><p:nvSpPr><p:cNvPr id="2" name="Title 1" /><p:cNvSpPr><a:spLocks noGrp="1" /></p:cNvSpPr><p:nvPr><p:ph type="title" /></p:nvPr></p:nvSpPr><p:spPr><a:xfrm><a:off x="0" y="0" /><a:ext cx="9144000" cy="602780" /></a:xfrm><a:solidFill><a:srgbClr val="1A1A2E" /></a:solidFill></p:spPr><p:txBody><a:bodyPr /><a:lstStyle /><a:p><a:pPr lvl="0" indent="0" marL="0"><a:buNone /></a:pPr><a:r><a:rPr /><a:t>What Is a Two-Sample t-Test?</a:t></a:r></a:p></p:txBody></p:sp><mc:AlternateContent xmlns:mc="http://schemas.openxmlformats.org/markup-compatibility/2006"><mc:Choice xmlns:a14="http://schemas.microsoft.com/office/drawing/2010/main" Requires="a14"><p:sp><p:nvSpPr><p:cNvPr id="3" name="Content Placeholder 2" /><p:cNvSpPr><a:spLocks noGrp="1" /></p:cNvSpPr><p:nvPr><p:ph idx="1" sz="half" /></p:nvPr></p:nvSpPr><p:spPr /><p:txBody><a:bodyPr /><a:lstStyle /><a:p><a:pPr lvl="0" indent="0" marL="0"><a:buNone /></a:pPr><a:r><a:rPr /><a:t>A two-sample t-test compares the </a:t></a:r><a:r><a:rPr b="1" /><a:t>means of two independent groups</a:t></a:r><a:r><a:rPr /><a:t>.</a:t></a:r></a:p><a:p><a:pPr lvl="0" indent="0" marL="0"><a:buNone /></a:pPr><a:r><a:rPr /><a:t>It asks: </a:t></a:r><a:r><a:rPr i="1" /><a:t>Could both groups plausibly be drawn from populations with the same mean?</a:t></a:r></a:p><a:p><a:pPr lvl="0" indent="0" marL="0"><a:buNone /></a:pPr><a:r><a:rPr /><a:t>The </a:t></a:r><a:r><a:rPr b="1" /><a:t>t-statistic</a:t></a:r><a:r><a:rPr /><a:t> is:</a:t></a:r></a:p><a:p><a:pPr lvl="0" indent="0" marL="0"><a:buNone /></a:pPr><a14:m><m:oMathPara xmlns:m="http://schemas.openxmlformats.org/officeDocument/2006/math"><m:oMathParaPr><m:jc m:val="center" /></m:oMathParaPr><m:oMath><m:r><m:t>t</m:t></m:r><m:r><m:rPr><m:sty m:val="p" /></m:rPr><m:t>=</m:t></m:r><m:f><m:fPr><m:type m:val="bar" /></m:fPr><m:num><m:sSub><m:e><m:acc><m:accPr><m:chr m:val="‾" /></m:accPr><m:e><m:r><m:t>x</m:t></m:r></m:e></m:acc></m:e><m:sub><m:r><m:t>1</m:t></m:r></m:sub></m:sSub><m:r><m:rPr><m:sty m:val="p" /></m:rPr><m:t>−</m:t></m:r><m:sSub><m:e><m:acc><m:accPr><m:chr m:val="‾" /></m:accPr><m:e><m:r><m:t>x</m:t></m:r></m:e></m:acc></m:e><m:sub><m:r><m:t>2</m:t></m:r></m:sub></m:sSub></m:num><m:den><m:sSub><m:e><m:r><m:rPr><m:nor /><m:sty m:val="p" /></m:rPr><m:t>SE</m:t></m:r></m:e><m:sub><m:r><m:rPr><m:nor /><m:sty m:val="p" /></m:rPr><m:t>diff</m:t></m:r></m:sub></m:sSub></m:den></m:f></m:oMath></m:oMathPara></a14:m></a:p><a:p><a:pPr lvl="0" /><a:r><a:rPr /><a:t>Numerator: the </a:t></a:r><a:r><a:rPr b="1" /><a:t>observed difference</a:t></a:r><a:r><a:rPr /><a:t> in means</a:t></a:r></a:p><a:p><a:pPr lvl="0" /><a:r><a:rPr /><a:t>Denominator: the </a:t></a:r><a:r><a:rPr b="1" /><a:t>uncertainty</a:t></a:r><a:r><a:rPr /><a:t> in that difference (SE of the difference)</a:t></a:r></a:p><a:p><a:pPr lvl="0" indent="0" marL="0"><a:buNone /></a:pPr><a:r><a:rPr b="1" /><a:t>Large |t|</a:t></a:r><a:r><a:rPr /><a:t> → the difference is large relative to the noise → small </a:t></a:r><a:r><a:rPr i="1" /><a:t>p</a:t></a:r><a:r><a:rPr /><a:t>-value</a:t></a:r></a:p></p:txBody></p:sp></mc:Choice></mc:AlternateContent><p:graphicFrame><p:nvGraphicFramePr><p:cNvPr id="6" name="Content Placeholder 5" /><p:cNvGraphicFramePr><a:graphicFrameLocks noGrp="1" /></p:cNvGraphicFramePr><p:nvPr><p:ph idx="1" /></p:nvPr></p:nvGraphicFramePr><p:xfrm><a:off x="4495800" y="660400" /><a:ext cx="4406900" cy="3810000" /></p:xfrm><a:graphic><a:graphicData uri="http://schemas.openxmlformats.org/drawingml/2006/table"><a:tbl><a:tblPr firstRow="1" bandRow="1"><a:tableStyleId>{5C22544A-7EE6-4342-B048-85BDC9FD1C3A}</a:tableStyleId></a:tblPr><a:tblGrid><a:gridCol w="2197100" /><a:gridCol w="2197100" /></a:tblGrid><a:tr h="0"><a:tc><a:txBody><a:bodyPr /><a:lstStyle /><a:p><a:pPr lvl="0" indent="0" marL="0"><a:buNone /></a:pPr><a:r><a:rPr /><a:t>Component</a:t></a:r></a:p></a:txBody><a:tcPr /></a:tc><a:tc><a:txBody><a:bodyPr /><a:lstStyle /><a:p><a:pPr lvl="0" indent="0" marL="0"><a:buNone /></a:pPr><a:r><a:rPr /><a:t>Our context</a:t></a:r></a:p></a:txBody><a:tcPr /></a:tc></a:tr><a:tr h="0"><a:tc><a:txBody><a:bodyPr /><a:lstStyle /><a:p><a:pPr lvl="0" indent="0" marL="0"><a:buNone /></a:pPr><a:r><a:rPr /><a:t>Group 1</a:t></a:r></a:p></a:txBody></a:tc><a:tc><a:txBody><a:bodyPr /><a:lstStyle /><a:p><a:pPr lvl="0" indent="0" marL="0"><a:buNone /></a:pPr><a:r><a:rPr /><a:t>Shady leaves</a:t></a:r></a:p></a:txBody></a:tc></a:tr><a:tr h="0"><a:tc><a:txBody><a:bodyPr /><a:lstStyle /><a:p><a:pPr lvl="0" indent="0" marL="0"><a:buNone /></a:pPr><a:r><a:rPr /><a:t>Group 2</a:t></a:r></a:p></a:txBody></a:tc><a:tc><a:txBody><a:bodyPr /><a:lstStyle /><a:p><a:pPr lvl="0" indent="0" marL="0"><a:buNone /></a:pPr><a:r><a:rPr /><a:t>Sunny leaves</a:t></a:r></a:p></a:txBody></a:tc></a:tr><a:tr h="0"><a:tc><a:txBody><a:bodyPr /><a:lstStyle /><a:p><a:pPr lvl="0" indent="0" marL="0"><a:buNone /></a:pPr><a:r><a:rPr /><a:t>Measurement</a:t></a:r></a:p></a:txBody></a:tc><a:tc><a:txBody><a:bodyPr /><a:lstStyle /><a:p><a:pPr lvl="0" indent="0" marL="0"><a:buNone /></a:pPr><a:r><a:rPr><a:latin typeface="Courier" /></a:rPr><a:t>mass_g</a:t></a:r></a:p></a:txBody></a:tc></a:tr><a:tr h="0"><a:tc><a:txBody><a:bodyPr /><a:lstStyle /><a:p><a:pPr lvl="0" indent="0" marL="0"><a:buNone /></a:pPr><a:r><a:rPr /><a:t>H₀</a:t></a:r></a:p></a:txBody></a:tc><a:tc><a:txBody><a:bodyPr /><a:lstStyle /><a:p><a:pPr lvl="0" indent="0" marL="0"><a:buNone /></a:pPr><a14:m><m:oMath xmlns:m="http://schemas.openxmlformats.org/officeDocument/2006/math"><m:sSub><m:e><m:r><m:t>μ</m:t></m:r></m:e><m:sub><m:r><m:t>s</m:t></m:r><m:r><m:t>h</m:t></m:r><m:r><m:t>a</m:t></m:r><m:r><m:t>d</m:t></m:r><m:r><m:t>y</m:t></m:r></m:sub></m:sSub><m:r><m:rPr><m:sty m:val="p" /></m:rPr><m:t>=</m:t></m:r><m:sSub><m:e><m:r><m:t>μ</m:t></m:r></m:e><m:sub><m:r><m:t>s</m:t></m:r><m:r><m:t>u</m:t></m:r><m:r><m:t>n</m:t></m:r><m:r><m:t>n</m:t></m:r><m:r><m:t>y</m:t></m:r></m:sub></m:sSub></m:oMath></a14:m></a:p></a:txBody></a:tc></a:tr><a:tr h="0"><a:tc><a:txBody><a:bodyPr /><a:lstStyle /><a:p><a:pPr lvl="0" indent="0" marL="0"><a:buNone /></a:pPr><a:r><a:rPr /><a:t>Hₐ</a:t></a:r></a:p></a:txBody></a:tc><a:tc><a:txBody><a:bodyPr /><a:lstStyle /><a:p><a:pPr lvl="0" indent="0" marL="0"><a:buNone /></a:pPr><a14:m><m:oMath xmlns:m="http://schemas.openxmlformats.org/officeDocument/2006/math"><m:sSub><m:e><m:r><m:t>μ</m:t></m:r></m:e><m:sub><m:r><m:t>s</m:t></m:r><m:r><m:t>h</m:t></m:r><m:r><m:t>a</m:t></m:r><m:r><m:t>d</m:t></m:r><m:r><m:t>y</m:t></m:r></m:sub></m:sSub><m:r><m:rPr><m:sty m:val="p" /></m:rPr><m:t>≠</m:t></m:r><m:sSub><m:e><m:r><m:t>μ</m:t></m:r></m:e><m:sub><m:r><m:t>s</m:t></m:r><m:r><m:t>u</m:t></m:r><m:r><m:t>n</m:t></m:r><m:r><m:t>n</m:t></m:r><m:r><m:t>y</m:t></m:r></m:sub></m:sSub></m:oMath></a14:m></a:p></a:txBody></a:tc></a:tr></a:tbl></a:graphicData></a:graphic></p:graphicFrame></p:spTree></p:cSld></p:sld>
+<file path=ppt/slides/slide10.xml><?xml version="1.0" encoding="utf-8"?>
+<p:sld xmlns:a="http://schemas.openxmlformats.org/drawingml/2006/main" xmlns:r="http://schemas.openxmlformats.org/officeDocument/2006/relationships" xmlns:p="http://schemas.openxmlformats.org/presentationml/2006/main">
+  <p:cSld>
+    <p:spTree>
+      <p:nvGrpSpPr>
+        <p:cNvPr id="1" name=""/>
+        <p:cNvGrpSpPr/>
+        <p:nvPr/>
+      </p:nvGrpSpPr>
+      <p:grpSpPr>
+        <a:xfrm>
+          <a:off x="0" y="0"/>
+          <a:ext cx="0" cy="0"/>
+          <a:chOff x="0" y="0"/>
+          <a:chExt cx="0" cy="0"/>
+        </a:xfrm>
+      </p:grpSpPr>
+      <p:sp>
+        <p:nvSpPr>
+          <p:cNvPr id="2" name="Title 1"/>
+          <p:cNvSpPr>
+            <a:spLocks noGrp="1"/>
+          </p:cNvSpPr>
+          <p:nvPr>
+            <p:ph type="title"/>
+          </p:nvPr>
+        </p:nvSpPr>
+        <p:spPr>
+          <a:xfrm>
+            <a:off x="0" y="0"/>
+            <a:ext cx="9144000" cy="582780"/>
+          </a:xfrm>
+        </p:spPr>
+        <p:txBody>
+          <a:bodyPr/>
+          <a:lstStyle/>
+          <a:p>
+            <a:pPr lvl="0" indent="0" marL="0">
+              <a:buNone/>
+            </a:pPr>
+            <a:r>
+              <a:rPr/>
+              <a:t>→ ACTIVITY 9 Parts 1–2 now</a:t>
+            </a:r>
+          </a:p>
+        </p:txBody>
+      </p:sp>
+      <p:sp>
+        <p:nvSpPr>
+          <p:cNvPr id="3" name="Content Placeholder 2"/>
+          <p:cNvSpPr>
+            <a:spLocks noGrp="1"/>
+          </p:cNvSpPr>
+          <p:nvPr>
+            <p:ph idx="1"/>
+          </p:nvPr>
+        </p:nvSpPr>
+        <p:spPr/>
+        <p:txBody>
+          <a:bodyPr/>
+          <a:lstStyle/>
+          <a:p>
+            <a:pPr lvl="0" indent="0" marL="0">
+              <a:buNone/>
+            </a:pPr>
+            <a:r>
+              <a:rPr b="1"/>
+              <a:t>🛑 Do Activity Parts 1–2 now</a:t>
+            </a:r>
+          </a:p>
+          <a:p>
+            <a:pPr lvl="0" indent="0" marL="0">
+              <a:buNone/>
+            </a:pPr>
+            <a:r>
+              <a:rPr/>
+              <a:t>Load the data and recompute the group means and SDs. Predict each output, type it, run it.</a:t>
+            </a:r>
+          </a:p>
+        </p:txBody>
+      </p:sp>
+    </p:spTree>
+  </p:cSld>
+</p:sld>
 </file>
 
 <file path=ppt/slides/slide11.xml><?xml version="1.0" encoding="utf-8"?>
@@ -3405,11 +3492,8 @@
         <p:spPr>
           <a:xfrm>
             <a:off x="0" y="0"/>
-            <a:ext cx="9144000" cy="602780"/>
+            <a:ext cx="9144000" cy="582780"/>
           </a:xfrm>
-          <a:solidFill>
-            <a:srgbClr val="1A1A2E"/>
-          </a:solidFill>
         </p:spPr>
         <p:txBody>
           <a:bodyPr/>
@@ -3420,273 +3504,19 @@
             </a:pPr>
             <a:r>
               <a:rPr/>
-              <a:t>Why Welch’s? — Don’t Assume Equal Variance</a:t>
-            </a:r>
-          </a:p>
-        </p:txBody>
-      </p:sp>
-      <mc:AlternateContent xmlns:mc="http://schemas.openxmlformats.org/markup-compatibility/2006">
-        <mc:Choice xmlns:a14="http://schemas.microsoft.com/office/drawing/2010/main" Requires="a14">
-          <p:sp>
-            <p:nvSpPr>
-              <p:cNvPr id="3" name="Content Placeholder 2"/>
-              <p:cNvSpPr>
-                <a:spLocks noGrp="1"/>
-              </p:cNvSpPr>
-              <p:nvPr>
-                <p:ph idx="1" sz="half"/>
-              </p:nvPr>
-            </p:nvSpPr>
-            <p:spPr/>
-            <p:txBody>
-              <a:bodyPr/>
-              <a:lstStyle/>
-              <a:p>
-                <a:pPr lvl="0" indent="0" marL="0">
-                  <a:buNone/>
-                </a:pPr>
-                <a:r>
-                  <a:rPr b="1"/>
-                  <a:t>Standard t-test</a:t>
-                </a:r>
-                <a:r>
-                  <a:rPr/>
-                  <a:t> — pools the two variances into one estimate. Requires both groups to have the </a:t>
-                </a:r>
-                <a:r>
-                  <a:rPr b="1"/>
-                  <a:t>same population variance</a:t>
-                </a:r>
-                <a:r>
-                  <a:rPr/>
-                  <a:t>.</a:t>
-                </a:r>
-              </a:p>
-              <a:p>
-                <a:pPr lvl="0" indent="0" marL="0">
-                  <a:buNone/>
-                </a:pPr>
-                <a:r>
-                  <a:rPr b="1"/>
-                  <a:t>Welch’s t-test</a:t>
-                </a:r>
-                <a:r>
-                  <a:rPr/>
-                  <a:t> — uses each group’s variance separately. Does </a:t>
-                </a:r>
-                <a:r>
-                  <a:rPr b="1"/>
-                  <a:t>not</a:t>
-                </a:r>
-                <a:r>
-                  <a:rPr/>
-                  <a:t> require equal variance.</a:t>
-                </a:r>
-              </a:p>
-              <a:p>
-                <a:pPr lvl="0" indent="0" marL="0">
-                  <a:buNone/>
-                </a:pPr>
-                <a14:m>
-                  <m:oMathPara xmlns:m="http://schemas.openxmlformats.org/officeDocument/2006/math">
-                    <m:oMathParaPr>
-                      <m:jc m:val="center"/>
-                    </m:oMathParaPr>
-                    <m:oMath>
-                      <m:sSub>
-                        <m:e>
-                          <m:r>
-                            <m:t>t</m:t>
-                          </m:r>
-                        </m:e>
-                        <m:sub>
-                          <m:r>
-                            <m:t>W</m:t>
-                          </m:r>
-                        </m:sub>
-                      </m:sSub>
-                      <m:r>
-                        <m:rPr>
-                          <m:sty m:val="p"/>
-                        </m:rPr>
-                        <m:t>=</m:t>
-                      </m:r>
-                      <m:f>
-                        <m:fPr>
-                          <m:type m:val="bar"/>
-                        </m:fPr>
-                        <m:num>
-                          <m:sSub>
-                            <m:e>
-                              <m:acc>
-                                <m:accPr>
-                                  <m:chr m:val="‾"/>
-                                </m:accPr>
-                                <m:e>
-                                  <m:r>
-                                    <m:t>x</m:t>
-                                  </m:r>
-                                </m:e>
-                              </m:acc>
-                            </m:e>
-                            <m:sub>
-                              <m:r>
-                                <m:t>1</m:t>
-                              </m:r>
-                            </m:sub>
-                          </m:sSub>
-                          <m:r>
-                            <m:rPr>
-                              <m:sty m:val="p"/>
-                            </m:rPr>
-                            <m:t>−</m:t>
-                          </m:r>
-                          <m:sSub>
-                            <m:e>
-                              <m:acc>
-                                <m:accPr>
-                                  <m:chr m:val="‾"/>
-                                </m:accPr>
-                                <m:e>
-                                  <m:r>
-                                    <m:t>x</m:t>
-                                  </m:r>
-                                </m:e>
-                              </m:acc>
-                            </m:e>
-                            <m:sub>
-                              <m:r>
-                                <m:t>2</m:t>
-                              </m:r>
-                            </m:sub>
-                          </m:sSub>
-                        </m:num>
-                        <m:den>
-                          <m:rad>
-                            <m:radPr>
-                              <m:degHide m:val="on"/>
-                            </m:radPr>
-                            <m:deg/>
-                            <m:e>
-                              <m:f>
-                                <m:fPr>
-                                  <m:type m:val="bar"/>
-                                </m:fPr>
-                                <m:num>
-                                  <m:sSubSup>
-                                    <m:e>
-                                      <m:r>
-                                        <m:t>s</m:t>
-                                      </m:r>
-                                    </m:e>
-                                    <m:sub>
-                                      <m:r>
-                                        <m:t>1</m:t>
-                                      </m:r>
-                                    </m:sub>
-                                    <m:sup>
-                                      <m:r>
-                                        <m:t>2</m:t>
-                                      </m:r>
-                                    </m:sup>
-                                  </m:sSubSup>
-                                </m:num>
-                                <m:den>
-                                  <m:sSub>
-                                    <m:e>
-                                      <m:r>
-                                        <m:t>n</m:t>
-                                      </m:r>
-                                    </m:e>
-                                    <m:sub>
-                                      <m:r>
-                                        <m:t>1</m:t>
-                                      </m:r>
-                                    </m:sub>
-                                  </m:sSub>
-                                </m:den>
-                              </m:f>
-                              <m:r>
-                                <m:rPr>
-                                  <m:sty m:val="p"/>
-                                </m:rPr>
-                                <m:t>+</m:t>
-                              </m:r>
-                              <m:f>
-                                <m:fPr>
-                                  <m:type m:val="bar"/>
-                                </m:fPr>
-                                <m:num>
-                                  <m:sSubSup>
-                                    <m:e>
-                                      <m:r>
-                                        <m:t>s</m:t>
-                                      </m:r>
-                                    </m:e>
-                                    <m:sub>
-                                      <m:r>
-                                        <m:t>2</m:t>
-                                      </m:r>
-                                    </m:sub>
-                                    <m:sup>
-                                      <m:r>
-                                        <m:t>2</m:t>
-                                      </m:r>
-                                    </m:sup>
-                                  </m:sSubSup>
-                                </m:num>
-                                <m:den>
-                                  <m:sSub>
-                                    <m:e>
-                                      <m:r>
-                                        <m:t>n</m:t>
-                                      </m:r>
-                                    </m:e>
-                                    <m:sub>
-                                      <m:r>
-                                        <m:t>2</m:t>
-                                      </m:r>
-                                    </m:sub>
-                                  </m:sSub>
-                                </m:den>
-                              </m:f>
-                            </m:e>
-                          </m:rad>
-                        </m:den>
-                      </m:f>
-                    </m:oMath>
-                  </m:oMathPara>
-                </a14:m>
-              </a:p>
-              <a:p>
-                <a:pPr lvl="0" indent="0" marL="0">
-                  <a:buNone/>
-                </a:pPr>
-                <a:r>
-                  <a:rPr/>
-                  <a:t>The denominator is the </a:t>
-                </a:r>
-                <a:r>
-                  <a:rPr b="1"/>
-                  <a:t>true SE of the difference</a:t>
-                </a:r>
-                <a:r>
-                  <a:rPr/>
-                  <a:t> — no pooling.</a:t>
-                </a:r>
-              </a:p>
-            </p:txBody>
-          </p:sp>
-        </mc:Choice>
-      </mc:AlternateContent>
-      <p:sp>
-        <p:nvSpPr>
-          <p:cNvPr id="4" name="Content Placeholder 3"/>
-          <p:cNvSpPr>
-            <a:spLocks noGrp="1"/>
-          </p:cNvSpPr>
-          <p:nvPr>
-            <p:ph idx="2" sz="half"/>
+              <a:t>🧩 Chunk 2 of 3 · Steps 1–3: Hypotheses &amp; Assumptions</a:t>
+            </a:r>
+          </a:p>
+        </p:txBody>
+      </p:sp>
+      <p:sp>
+        <p:nvSpPr>
+          <p:cNvPr id="3" name="Content Placeholder 2"/>
+          <p:cNvSpPr>
+            <a:spLocks noGrp="1"/>
+          </p:cNvSpPr>
+          <p:nvPr>
+            <p:ph idx="1"/>
           </p:nvPr>
         </p:nvSpPr>
         <p:spPr/>
@@ -3699,97 +3529,32 @@
             </a:pPr>
             <a:r>
               <a:rPr b="1"/>
-              <a:t>Why always use Welch’s?</a:t>
-            </a:r>
-          </a:p>
-          <a:p>
-            <a:pPr lvl="0"/>
-            <a:r>
-              <a:rPr/>
-              <a:t>When variances </a:t>
+              <a:t>We will cover:</a:t>
+            </a:r>
+            <a:r>
+              <a:rPr/>
+              <a:t> writing H₀ / Hₐ, checking normality three ways (histogram, </a:t>
             </a:r>
             <a:r>
               <a:rPr b="1"/>
-              <a:t>are</a:t>
-            </a:r>
-            <a:r>
-              <a:rPr/>
-              <a:t> equal: almost identical result — minimal loss of power</a:t>
-            </a:r>
-          </a:p>
-          <a:p>
-            <a:pPr lvl="0"/>
-            <a:r>
-              <a:rPr/>
-              <a:t>When variances </a:t>
-            </a:r>
+              <a:t>QQ plot</a:t>
+            </a:r>
+            <a:r>
+              <a:rPr/>
+              <a:t>, Shapiro-Wilk), and checking equal variance (Levene’s).</a:t>
+            </a:r>
+          </a:p>
+          <a:p>
+            <a:pPr lvl="0" indent="0" marL="0">
+              <a:buNone/>
+            </a:pPr>
             <a:r>
               <a:rPr b="1"/>
-              <a:t>are not</a:t>
-            </a:r>
-            <a:r>
-              <a:rPr/>
-              <a:t> equal: standard t-test gives </a:t>
-            </a:r>
-            <a:r>
-              <a:rPr b="1"/>
-              <a:t>inflated Type I error</a:t>
-            </a:r>
-            <a:r>
-              <a:rPr/>
-              <a:t> (false positives)</a:t>
-            </a:r>
-          </a:p>
-          <a:p>
-            <a:pPr lvl="0"/>
-            <a:r>
-              <a:rPr b="1"/>
-              <a:t>Welch’s protects you either way</a:t>
-            </a:r>
-          </a:p>
-          <a:p>
-            <a:pPr lvl="0" indent="0" marL="1270000">
-              <a:buNone/>
-            </a:pPr>
-            <a:r>
-              <a:rPr sz="2000" b="1"/>
-              <a:t>Tip</a:t>
-            </a:r>
-          </a:p>
-          <a:p>
-            <a:pPr lvl="0" indent="0" marL="1270000">
-              <a:buNone/>
-            </a:pPr>
-            <a:r>
-              <a:rPr sz="2000" b="1"/>
-              <a:t>Best practice:</a:t>
-            </a:r>
-            <a:r>
-              <a:rPr sz="2000"/>
-              <a:t> use Welch’s as your </a:t>
-            </a:r>
-            <a:r>
-              <a:rPr sz="2000" b="1"/>
-              <a:t>default</a:t>
-            </a:r>
-            <a:r>
-              <a:rPr sz="2000"/>
-              <a:t> for all two-group comparisons.</a:t>
-            </a:r>
-          </a:p>
-          <a:p>
-            <a:pPr lvl="0" indent="0" marL="1270000">
-              <a:buNone/>
-            </a:pPr>
-            <a:r>
-              <a:rPr sz="2000"/>
-              <a:t>In R: </a:t>
-            </a:r>
-            <a:r>
-              <a:rPr sz="2000" b="1">
-                <a:latin typeface="Courier"/>
-              </a:rPr>
-              <a:t>var.equal = FALSE</a:t>
+              <a:t>🛑 After this chunk: Activity Parts 3–7</a:t>
+            </a:r>
+            <a:r>
+              <a:rPr/>
+              <a:t> (hypotheses, histogram, box plot + QQ plot, Shapiro-Wilk, Levene’s).</a:t>
             </a:r>
           </a:p>
         </p:txBody>
@@ -3799,94 +3564,7 @@
 </p:sld>
 </file>
 
-<file path=ppt/slides/slide12.xml><?xml version="1.0" encoding="utf-8"?>
-<p:sld xmlns:a="http://schemas.openxmlformats.org/drawingml/2006/main" xmlns:r="http://schemas.openxmlformats.org/officeDocument/2006/relationships" xmlns:p="http://schemas.openxmlformats.org/presentationml/2006/main">
-  <p:cSld>
-    <p:spTree>
-      <p:nvGrpSpPr>
-        <p:cNvPr id="1" name=""/>
-        <p:cNvGrpSpPr/>
-        <p:nvPr/>
-      </p:nvGrpSpPr>
-      <p:grpSpPr>
-        <a:xfrm>
-          <a:off x="0" y="0"/>
-          <a:ext cx="0" cy="0"/>
-          <a:chOff x="0" y="0"/>
-          <a:chExt cx="0" cy="0"/>
-        </a:xfrm>
-      </p:grpSpPr>
-      <p:sp>
-        <p:nvSpPr>
-          <p:cNvPr id="2" name="Title 1"/>
-          <p:cNvSpPr>
-            <a:spLocks noGrp="1"/>
-          </p:cNvSpPr>
-          <p:nvPr>
-            <p:ph type="title"/>
-          </p:nvPr>
-        </p:nvSpPr>
-        <p:spPr>
-          <a:xfrm>
-            <a:off x="0" y="0"/>
-            <a:ext cx="9144000" cy="582780"/>
-          </a:xfrm>
-        </p:spPr>
-        <p:txBody>
-          <a:bodyPr/>
-          <a:lstStyle/>
-          <a:p>
-            <a:pPr lvl="0" indent="0" marL="0">
-              <a:buNone/>
-            </a:pPr>
-            <a:r>
-              <a:rPr/>
-              <a:t>Seeing the Formula in Action</a:t>
-            </a:r>
-          </a:p>
-        </p:txBody>
-      </p:sp>
-      <p:sp>
-        <p:nvSpPr>
-          <p:cNvPr id="3" name="Content Placeholder 2"/>
-          <p:cNvSpPr>
-            <a:spLocks noGrp="1"/>
-          </p:cNvSpPr>
-          <p:nvPr>
-            <p:ph idx="1"/>
-          </p:nvPr>
-        </p:nvSpPr>
-        <p:spPr/>
-        <p:txBody>
-          <a:bodyPr/>
-          <a:lstStyle/>
-          <a:p>
-            <a:pPr lvl="0" indent="0" marL="1270000">
-              <a:buNone/>
-            </a:pPr>
-            <a:r>
-              <a:rPr sz="2000" b="1"/>
-              <a:t>Note</a:t>
-            </a:r>
-          </a:p>
-          <a:p>
-            <a:pPr lvl="0" indent="0" marL="1270000">
-              <a:buNone/>
-            </a:pPr>
-            <a:r>
-              <a:rPr sz="2000" b="1"/>
-              <a:t>🔮 Predict first:</a:t>
-            </a:r>
-            <a:r>
-              <a:rPr sz="2000"/>
-              <a:t> t = difference ÷ SE-of-the-difference, and the two means differ by only about 0.02 g. Do you expect |t| to land nearer 0.5, 3, or 10? Predict before the numbers appear.</a:t>
-            </a:r>
-          </a:p>
-        </p:txBody>
-      </p:sp>
-    </p:spTree>
-  </p:cSld>
-</p:sld>
+<file path=ppt/slides/slide12.xml><?xml version="1.0" encoding="UTF-8"?><p:sld xmlns:a="http://schemas.openxmlformats.org/drawingml/2006/main" xmlns:r="http://schemas.openxmlformats.org/officeDocument/2006/relationships" xmlns:p="http://schemas.openxmlformats.org/presentationml/2006/main"><p:cSld><p:spTree><p:nvGrpSpPr><p:cNvPr id="1" name="" /><p:cNvGrpSpPr /><p:nvPr /></p:nvGrpSpPr><p:grpSpPr><a:xfrm><a:off x="0" y="0" /><a:ext cx="0" cy="0" /><a:chOff x="0" y="0" /><a:chExt cx="0" cy="0" /></a:xfrm></p:grpSpPr><p:sp><p:nvSpPr><p:cNvPr id="2" name="Title 1" /><p:cNvSpPr><a:spLocks noGrp="1" /></p:cNvSpPr><p:nvPr><p:ph type="title" /></p:nvPr></p:nvSpPr><p:spPr><a:xfrm><a:off x="139485" y="78119" /><a:ext cx="8229600" cy="607682" /></a:xfrm></p:spPr><p:txBody><a:bodyPr /><a:lstStyle /><a:p><a:pPr lvl="0" indent="0" marL="0"><a:buNone /></a:pPr><a:r><a:rPr /><a:t>Step 1 — Hypotheses</a:t></a:r></a:p></p:txBody></p:sp><p:sp><p:nvSpPr><p:cNvPr id="3" name="Text Placeholder 2" /><p:cNvSpPr><a:spLocks noGrp="1" /></p:cNvSpPr><p:nvPr><p:ph idx="1" type="body" /></p:nvPr></p:nvSpPr><p:spPr /><p:txBody><a:bodyPr /><a:lstStyle /><a:p><a:pPr lvl="0" indent="0" marL="0"><a:buNone /></a:pPr><a:r><a:rPr b="1" /><a:t>Biological prediction:</a:t></a:r><a:r><a:rPr /><a:t> shady-side leaves will be </a:t></a:r><a:r><a:rPr b="1" /><a:t>larger and heavier</a:t></a:r><a:r><a:rPr /><a:t> — they need more surface area to capture the limited light under the canopy.</a:t></a:r></a:p></p:txBody></p:sp><p:graphicFrame><p:nvGraphicFramePr><p:cNvPr id="6" name="Content Placeholder 5" /><p:cNvGraphicFramePr><a:graphicFrameLocks noGrp="1" /></p:cNvGraphicFramePr><p:nvPr><p:ph idx="1" /></p:nvPr></p:nvGraphicFramePr><p:xfrm><a:off x="127000" y="1270000" /><a:ext cx="4432300" cy="3302000" /></p:xfrm><a:graphic><a:graphicData uri="http://schemas.openxmlformats.org/drawingml/2006/table"><a:tbl><a:tblPr firstRow="1" bandRow="1"><a:tableStyleId>{5C22544A-7EE6-4342-B048-85BDC9FD1C3A}</a:tableStyleId></a:tblPr><a:tblGrid><a:gridCol w="1333500" /><a:gridCol w="3098800" /></a:tblGrid><a:tr h="0"><a:tc><a:txBody><a:bodyPr /><a:lstStyle /><a:p><a:endParaRPr /></a:p></a:txBody><a:tcPr /></a:tc><a:tc><a:txBody><a:bodyPr /><a:lstStyle /><a:p><a:pPr lvl="0" indent="0" marL="0"><a:buNone /></a:pPr><a:r><a:rPr /><a:t>Formal statement</a:t></a:r></a:p></a:txBody><a:tcPr /></a:tc></a:tr><a:tr h="0"><a:tc><a:txBody><a:bodyPr /><a:lstStyle /><a:p><a:pPr lvl="0" indent="0" marL="0"><a:buNone /></a:pPr><a:r><a:rPr b="1" /><a:t>H₀ — null</a:t></a:r></a:p></a:txBody></a:tc><a:tc><a:txBody><a:bodyPr /><a:lstStyle /><a:p><a:pPr lvl="0" indent="0" marL="0"><a:buNone /></a:pPr><a14:m><m:oMath xmlns:m="http://schemas.openxmlformats.org/officeDocument/2006/math"><m:sSub><m:e><m:r><m:t>μ</m:t></m:r></m:e><m:sub><m:r><m:t>s</m:t></m:r><m:r><m:t>h</m:t></m:r><m:r><m:t>a</m:t></m:r><m:r><m:t>d</m:t></m:r><m:r><m:t>y</m:t></m:r></m:sub></m:sSub><m:r><m:rPr><m:sty m:val="p" /></m:rPr><m:t>=</m:t></m:r><m:sSub><m:e><m:r><m:t>μ</m:t></m:r></m:e><m:sub><m:r><m:t>s</m:t></m:r><m:r><m:t>u</m:t></m:r><m:r><m:t>n</m:t></m:r><m:r><m:t>n</m:t></m:r><m:r><m:t>y</m:t></m:r></m:sub></m:sSub></m:oMath></a14:m><a:r><a:rPr /><a:t> — no difference in mean leaf mass</a:t></a:r></a:p></a:txBody></a:tc></a:tr><a:tr h="0"><a:tc><a:txBody><a:bodyPr /><a:lstStyle /><a:p><a:pPr lvl="0" indent="0" marL="0"><a:buNone /></a:pPr><a:r><a:rPr b="1" /><a:t>Hₐ — alternate</a:t></a:r></a:p></a:txBody></a:tc><a:tc><a:txBody><a:bodyPr /><a:lstStyle /><a:p><a:pPr lvl="0" indent="0" marL="0"><a:buNone /></a:pPr><a14:m><m:oMath xmlns:m="http://schemas.openxmlformats.org/officeDocument/2006/math"><m:sSub><m:e><m:r><m:t>μ</m:t></m:r></m:e><m:sub><m:r><m:t>s</m:t></m:r><m:r><m:t>h</m:t></m:r><m:r><m:t>a</m:t></m:r><m:r><m:t>d</m:t></m:r><m:r><m:t>y</m:t></m:r></m:sub></m:sSub><m:r><m:rPr><m:sty m:val="p" /></m:rPr><m:t>≠</m:t></m:r><m:sSub><m:e><m:r><m:t>μ</m:t></m:r></m:e><m:sub><m:r><m:t>s</m:t></m:r><m:r><m:t>u</m:t></m:r><m:r><m:t>n</m:t></m:r><m:r><m:t>n</m:t></m:r><m:r><m:t>y</m:t></m:r></m:sub></m:sSub></m:oMath></a14:m><a:r><a:rPr /><a:t> — mean leaf mass differs by side</a:t></a:r></a:p></a:txBody></a:tc></a:tr></a:tbl></a:graphicData></a:graphic></p:graphicFrame><p:sp><p:nvSpPr><p:cNvPr id="4" name="Content Placeholder 3" /><p:cNvSpPr><a:spLocks noGrp="1" /></p:cNvSpPr><p:nvPr><p:ph idx="2" sz="half" /></p:nvPr></p:nvSpPr><p:spPr /><p:txBody><a:bodyPr /><a:lstStyle /><a:p><a:pPr lvl="0" indent="0" marL="0"><a:buNone /></a:pPr><a:r><a:rPr b="1" /><a:t>Two-tailed</a:t></a:r><a:r><a:rPr /><a:t> — detects a difference in </a:t></a:r><a:r><a:rPr i="1" /><a:t>either</a:t></a:r><a:r><a:rPr /><a:t> direction. </a:t></a:r><a:r><a:rPr b="1" /><a:t>α = 0.05</a:t></a:r><a:r><a:rPr /><a:t> — reject H₀ if </a:t></a:r><a:r><a:rPr i="1" /><a:t>p</a:t></a:r><a:r><a:rPr /><a:t> &lt; 0.05.</a:t></a:r></a:p></p:txBody></p:sp><p:sp><p:nvSpPr><p:cNvPr id="5" name="Text Placeholder 4" /><p:cNvSpPr><a:spLocks noGrp="1" /></p:cNvSpPr><p:nvPr><p:ph idx="3" sz="quarter" type="body" /></p:nvPr></p:nvSpPr><p:spPr /><p:txBody><a:bodyPr /><a:lstStyle /><a:p><a:pPr lvl="0" indent="0" marL="0"><a:buNone /></a:pPr><a:r><a:rPr b="1" /><a:t>Why two-tailed when we predicted shady &gt; sunny?</a:t></a:r></a:p><a:p><a:pPr lvl="0" /><a:r><a:rPr /><a:t>A one-tailed test only looks in one direction</a:t></a:r></a:p><a:p><a:pPr lvl="0" /><a:r><a:rPr /><a:t>Two-tailed is </a:t></a:r><a:r><a:rPr b="1" /><a:t>more conservative</a:t></a:r><a:r><a:rPr /><a:t> and the standard in most journals</a:t></a:r></a:p><a:p><a:pPr lvl="0" indent="0" marL="0"><a:buNone /></a:pPr><a:r><a:rPr b="1" /><a:t>Why write hypotheses first?</a:t></a:r></a:p><a:p><a:pPr lvl="0" /><a:r><a:rPr /><a:t>Keeps the analysis honest</a:t></a:r></a:p><a:p><a:pPr lvl="0" /><a:r><a:rPr /><a:t>Prevents “HARKing” — </a:t></a:r><a:r><a:rPr b="1" /><a:t>H</a:t></a:r><a:r><a:rPr /><a:t>ypothesizing </a:t></a:r><a:r><a:rPr b="1" /><a:t>A</a:t></a:r><a:r><a:rPr /><a:t>fter the </a:t></a:r><a:r><a:rPr b="1" /><a:t>R</a:t></a:r><a:r><a:rPr /><a:t>esults are </a:t></a:r><a:r><a:rPr b="1" /><a:t>K</a:t></a:r><a:r><a:rPr /><a:t>nown</a:t></a:r></a:p></p:txBody></p:sp></p:spTree></p:cSld></p:sld>
 </file>
 
 <file path=ppt/slides/slide13.xml><?xml version="1.0" encoding="utf-8"?>
@@ -3908,19 +3586,49 @@
       </p:grpSpPr>
       <p:sp>
         <p:nvSpPr>
-          <p:cNvPr id="3" name="Content Placeholder 2"/>
-          <p:cNvSpPr>
-            <a:spLocks noGrp="1"/>
-          </p:cNvSpPr>
-          <p:nvPr>
-            <p:ph idx="1" sz="half"/>
-          </p:nvPr>
-        </p:nvSpPr>
-        <p:spPr/>
+          <p:cNvPr id="2" name="Title 1"/>
+          <p:cNvSpPr>
+            <a:spLocks noGrp="1"/>
+          </p:cNvSpPr>
+          <p:nvPr>
+            <p:ph type="title"/>
+          </p:nvPr>
+        </p:nvSpPr>
+        <p:spPr>
+          <a:xfrm>
+            <a:off x="139485" y="78119"/>
+            <a:ext cx="8229600" cy="607682"/>
+          </a:xfrm>
+        </p:spPr>
         <p:txBody>
           <a:bodyPr/>
           <a:lstStyle/>
           <a:p>
+            <a:pPr lvl="0" indent="0" marL="0">
+              <a:buNone/>
+            </a:pPr>
+            <a:r>
+              <a:rPr/>
+              <a:t>Step 2 — Normality: Histograms</a:t>
+            </a:r>
+          </a:p>
+        </p:txBody>
+      </p:sp>
+      <p:sp>
+        <p:nvSpPr>
+          <p:cNvPr id="3" name="Text Placeholder 2"/>
+          <p:cNvSpPr>
+            <a:spLocks noGrp="1"/>
+          </p:cNvSpPr>
+          <p:nvPr>
+            <p:ph idx="1" type="body"/>
+          </p:nvPr>
+        </p:nvSpPr>
+        <p:spPr/>
+        <p:txBody>
+          <a:bodyPr/>
+          <a:lstStyle/>
+          <a:p>
             <a:pPr lvl="0" indent="0">
               <a:buNone/>
             </a:pPr>
@@ -3931,7 +3639,7 @@
                 </a:solidFill>
                 <a:latin typeface="Courier"/>
               </a:rPr>
-              <a:t># Watch the instructor plug numbers into the formula ----</a:t>
+              <a:t># Histograms stacked in one column — same x-axis --------</a:t>
             </a:r>
             <a:br/>
             <a:r>
@@ -3941,7 +3649,7 @@
                 </a:solidFill>
                 <a:latin typeface="Courier"/>
               </a:rPr>
-              <a:t>stats_df &lt;- leaf_df </a:t>
+              <a:t>hist_norm_plot &lt;- leaf_df </a:t>
             </a:r>
             <a:r>
               <a:rPr>
@@ -3969,16 +3677,70 @@
                 </a:solidFill>
                 <a:latin typeface="Courier"/>
               </a:rPr>
-              <a:t>group_by</a:t>
-            </a:r>
-            <a:r>
-              <a:rPr>
-                <a:solidFill>
-                  <a:srgbClr val="003B4F"/>
-                </a:solidFill>
-                <a:latin typeface="Courier"/>
-              </a:rPr>
-              <a:t>(shade) </a:t>
+              <a:t>ggplot</a:t>
+            </a:r>
+            <a:r>
+              <a:rPr>
+                <a:solidFill>
+                  <a:srgbClr val="003B4F"/>
+                </a:solidFill>
+                <a:latin typeface="Courier"/>
+              </a:rPr>
+              <a:t>(</a:t>
+            </a:r>
+            <a:r>
+              <a:rPr>
+                <a:solidFill>
+                  <a:srgbClr val="4758AB"/>
+                </a:solidFill>
+                <a:latin typeface="Courier"/>
+              </a:rPr>
+              <a:t>aes</a:t>
+            </a:r>
+            <a:r>
+              <a:rPr>
+                <a:solidFill>
+                  <a:srgbClr val="003B4F"/>
+                </a:solidFill>
+                <a:latin typeface="Courier"/>
+              </a:rPr>
+              <a:t>(</a:t>
+            </a:r>
+            <a:r>
+              <a:rPr>
+                <a:solidFill>
+                  <a:srgbClr val="657422"/>
+                </a:solidFill>
+                <a:latin typeface="Courier"/>
+              </a:rPr>
+              <a:t>x =</a:t>
+            </a:r>
+            <a:r>
+              <a:rPr>
+                <a:solidFill>
+                  <a:srgbClr val="003B4F"/>
+                </a:solidFill>
+                <a:latin typeface="Courier"/>
+              </a:rPr>
+              <a:t> mass_g, </a:t>
+            </a:r>
+            <a:r>
+              <a:rPr>
+                <a:solidFill>
+                  <a:srgbClr val="657422"/>
+                </a:solidFill>
+                <a:latin typeface="Courier"/>
+              </a:rPr>
+              <a:t>fill =</a:t>
+            </a:r>
+            <a:r>
+              <a:rPr>
+                <a:solidFill>
+                  <a:srgbClr val="003B4F"/>
+                </a:solidFill>
+                <a:latin typeface="Courier"/>
+              </a:rPr>
+              <a:t> shade)) </a:t>
             </a:r>
             <a:r>
               <a:rPr>
@@ -3987,7 +3749,7 @@
                 </a:solidFill>
                 <a:latin typeface="Courier"/>
               </a:rPr>
-              <a:t>%&gt;%</a:t>
+              <a:t>+</a:t>
             </a:r>
             <a:br/>
             <a:r>
@@ -4006,7 +3768,7 @@
                 </a:solidFill>
                 <a:latin typeface="Courier"/>
               </a:rPr>
-              <a:t>summarize</a:t>
+              <a:t>geom_histogram</a:t>
             </a:r>
             <a:r>
               <a:rPr>
@@ -4017,6 +3779,51 @@
               </a:rPr>
               <a:t>(</a:t>
             </a:r>
+            <a:r>
+              <a:rPr>
+                <a:solidFill>
+                  <a:srgbClr val="657422"/>
+                </a:solidFill>
+                <a:latin typeface="Courier"/>
+              </a:rPr>
+              <a:t>binwidth =</a:t>
+            </a:r>
+            <a:r>
+              <a:rPr>
+                <a:solidFill>
+                  <a:srgbClr val="003B4F"/>
+                </a:solidFill>
+                <a:latin typeface="Courier"/>
+              </a:rPr>
+              <a:t> </a:t>
+            </a:r>
+            <a:r>
+              <a:rPr>
+                <a:solidFill>
+                  <a:srgbClr val="AD0000"/>
+                </a:solidFill>
+                <a:latin typeface="Courier"/>
+              </a:rPr>
+              <a:t>0.05</a:t>
+            </a:r>
+            <a:r>
+              <a:rPr>
+                <a:solidFill>
+                  <a:srgbClr val="003B4F"/>
+                </a:solidFill>
+                <a:latin typeface="Courier"/>
+              </a:rPr>
+              <a:t>) </a:t>
+            </a:r>
+            <a:r>
+              <a:rPr>
+                <a:solidFill>
+                  <a:srgbClr val="5E5E5E"/>
+                </a:solidFill>
+                <a:latin typeface="Courier"/>
+              </a:rPr>
+              <a:t>+</a:t>
+            </a:r>
             <a:br/>
             <a:r>
               <a:rPr>
@@ -4025,7 +3832,43 @@
                 </a:solidFill>
                 <a:latin typeface="Courier"/>
               </a:rPr>
-              <a:t>    </a:t>
+              <a:t>  </a:t>
+            </a:r>
+            <a:r>
+              <a:rPr>
+                <a:solidFill>
+                  <a:srgbClr val="4758AB"/>
+                </a:solidFill>
+                <a:latin typeface="Courier"/>
+              </a:rPr>
+              <a:t>facet_wrap</a:t>
+            </a:r>
+            <a:r>
+              <a:rPr>
+                <a:solidFill>
+                  <a:srgbClr val="003B4F"/>
+                </a:solidFill>
+                <a:latin typeface="Courier"/>
+              </a:rPr>
+              <a:t>(</a:t>
+            </a:r>
+            <a:r>
+              <a:rPr>
+                <a:solidFill>
+                  <a:srgbClr val="5E5E5E"/>
+                </a:solidFill>
+                <a:latin typeface="Courier"/>
+              </a:rPr>
+              <a:t>~</a:t>
+            </a:r>
+            <a:r>
+              <a:rPr>
+                <a:solidFill>
+                  <a:srgbClr val="003B4F"/>
+                </a:solidFill>
+                <a:latin typeface="Courier"/>
+              </a:rPr>
+              <a:t>shade, </a:t>
             </a:r>
             <a:r>
               <a:rPr>
@@ -4034,7 +3877,7 @@
                 </a:solidFill>
                 <a:latin typeface="Courier"/>
               </a:rPr>
-              <a:t>n =</a:t>
+              <a:t>ncol =</a:t>
             </a:r>
             <a:r>
               <a:rPr>
@@ -4048,11 +3891,48 @@
             <a:r>
               <a:rPr>
                 <a:solidFill>
+                  <a:srgbClr val="AD0000"/>
+                </a:solidFill>
+                <a:latin typeface="Courier"/>
+              </a:rPr>
+              <a:t>1</a:t>
+            </a:r>
+            <a:r>
+              <a:rPr>
+                <a:solidFill>
+                  <a:srgbClr val="003B4F"/>
+                </a:solidFill>
+                <a:latin typeface="Courier"/>
+              </a:rPr>
+              <a:t>) </a:t>
+            </a:r>
+            <a:r>
+              <a:rPr>
+                <a:solidFill>
+                  <a:srgbClr val="5E5E5E"/>
+                </a:solidFill>
+                <a:latin typeface="Courier"/>
+              </a:rPr>
+              <a:t>+</a:t>
+            </a:r>
+            <a:br/>
+            <a:r>
+              <a:rPr>
+                <a:solidFill>
+                  <a:srgbClr val="003B4F"/>
+                </a:solidFill>
+                <a:latin typeface="Courier"/>
+              </a:rPr>
+              <a:t>  </a:t>
+            </a:r>
+            <a:r>
+              <a:rPr>
+                <a:solidFill>
                   <a:srgbClr val="4758AB"/>
                 </a:solidFill>
                 <a:latin typeface="Courier"/>
               </a:rPr>
-              <a:t>sum</a:t>
+              <a:t>labs</a:t>
             </a:r>
             <a:r>
               <a:rPr>
@@ -4066,11 +3946,93 @@
             <a:r>
               <a:rPr>
                 <a:solidFill>
+                  <a:srgbClr val="657422"/>
+                </a:solidFill>
+                <a:latin typeface="Courier"/>
+              </a:rPr>
+              <a:t>x =</a:t>
+            </a:r>
+            <a:r>
+              <a:rPr>
+                <a:solidFill>
+                  <a:srgbClr val="003B4F"/>
+                </a:solidFill>
+                <a:latin typeface="Courier"/>
+              </a:rPr>
+              <a:t> </a:t>
+            </a:r>
+            <a:r>
+              <a:rPr>
+                <a:solidFill>
+                  <a:srgbClr val="20794D"/>
+                </a:solidFill>
+                <a:latin typeface="Courier"/>
+              </a:rPr>
+              <a:t>"Leaf Mass (g)"</a:t>
+            </a:r>
+            <a:r>
+              <a:rPr>
+                <a:solidFill>
+                  <a:srgbClr val="003B4F"/>
+                </a:solidFill>
+                <a:latin typeface="Courier"/>
+              </a:rPr>
+              <a:t>, </a:t>
+            </a:r>
+            <a:r>
+              <a:rPr>
+                <a:solidFill>
+                  <a:srgbClr val="657422"/>
+                </a:solidFill>
+                <a:latin typeface="Courier"/>
+              </a:rPr>
+              <a:t>y =</a:t>
+            </a:r>
+            <a:r>
+              <a:rPr>
+                <a:solidFill>
+                  <a:srgbClr val="003B4F"/>
+                </a:solidFill>
+                <a:latin typeface="Courier"/>
+              </a:rPr>
+              <a:t> </a:t>
+            </a:r>
+            <a:r>
+              <a:rPr>
+                <a:solidFill>
+                  <a:srgbClr val="20794D"/>
+                </a:solidFill>
+                <a:latin typeface="Courier"/>
+              </a:rPr>
+              <a:t>"Count"</a:t>
+            </a:r>
+            <a:r>
+              <a:rPr>
+                <a:solidFill>
+                  <a:srgbClr val="003B4F"/>
+                </a:solidFill>
+                <a:latin typeface="Courier"/>
+              </a:rPr>
+              <a:t>) </a:t>
+            </a:r>
+            <a:r>
+              <a:rPr>
+                <a:solidFill>
                   <a:srgbClr val="5E5E5E"/>
                 </a:solidFill>
                 <a:latin typeface="Courier"/>
               </a:rPr>
-              <a:t>!</a:t>
+              <a:t>+</a:t>
+            </a:r>
+            <a:br/>
+            <a:r>
+              <a:rPr>
+                <a:solidFill>
+                  <a:srgbClr val="003B4F"/>
+                </a:solidFill>
+                <a:latin typeface="Courier"/>
+              </a:rPr>
+              <a:t>  </a:t>
             </a:r>
             <a:r>
               <a:rPr>
@@ -4079,16 +4041,25 @@
                 </a:solidFill>
                 <a:latin typeface="Courier"/>
               </a:rPr>
-              <a:t>is.na</a:t>
-            </a:r>
-            <a:r>
-              <a:rPr>
-                <a:solidFill>
-                  <a:srgbClr val="003B4F"/>
-                </a:solidFill>
-                <a:latin typeface="Courier"/>
-              </a:rPr>
-              <a:t>(mass_g)),</a:t>
+              <a:t>theme_minimal</a:t>
+            </a:r>
+            <a:r>
+              <a:rPr>
+                <a:solidFill>
+                  <a:srgbClr val="003B4F"/>
+                </a:solidFill>
+                <a:latin typeface="Courier"/>
+              </a:rPr>
+              <a:t>() </a:t>
+            </a:r>
+            <a:r>
+              <a:rPr>
+                <a:solidFill>
+                  <a:srgbClr val="5E5E5E"/>
+                </a:solidFill>
+                <a:latin typeface="Courier"/>
+              </a:rPr>
+              <a:t>+</a:t>
             </a:r>
             <a:br/>
             <a:r>
@@ -4098,7 +4069,25 @@
                 </a:solidFill>
                 <a:latin typeface="Courier"/>
               </a:rPr>
-              <a:t>    </a:t>
+              <a:t>  </a:t>
+            </a:r>
+            <a:r>
+              <a:rPr>
+                <a:solidFill>
+                  <a:srgbClr val="4758AB"/>
+                </a:solidFill>
+                <a:latin typeface="Courier"/>
+              </a:rPr>
+              <a:t>theme</a:t>
+            </a:r>
+            <a:r>
+              <a:rPr>
+                <a:solidFill>
+                  <a:srgbClr val="003B4F"/>
+                </a:solidFill>
+                <a:latin typeface="Courier"/>
+              </a:rPr>
+              <a:t>(</a:t>
             </a:r>
             <a:r>
               <a:rPr>
@@ -4107,7 +4096,7 @@
                 </a:solidFill>
                 <a:latin typeface="Courier"/>
               </a:rPr>
-              <a:t>m =</a:t>
+              <a:t>legend.position =</a:t>
             </a:r>
             <a:r>
               <a:rPr>
@@ -4121,56 +4110,20 @@
             <a:r>
               <a:rPr>
                 <a:solidFill>
-                  <a:srgbClr val="4758AB"/>
-                </a:solidFill>
-                <a:latin typeface="Courier"/>
-              </a:rPr>
-              <a:t>mean</a:t>
-            </a:r>
-            <a:r>
-              <a:rPr>
-                <a:solidFill>
-                  <a:srgbClr val="003B4F"/>
-                </a:solidFill>
-                <a:latin typeface="Courier"/>
-              </a:rPr>
-              <a:t>(mass_g, </a:t>
-            </a:r>
-            <a:r>
-              <a:rPr>
-                <a:solidFill>
-                  <a:srgbClr val="657422"/>
-                </a:solidFill>
-                <a:latin typeface="Courier"/>
-              </a:rPr>
-              <a:t>na.rm =</a:t>
-            </a:r>
-            <a:r>
-              <a:rPr>
-                <a:solidFill>
-                  <a:srgbClr val="003B4F"/>
-                </a:solidFill>
-                <a:latin typeface="Courier"/>
-              </a:rPr>
-              <a:t> </a:t>
-            </a:r>
-            <a:r>
-              <a:rPr>
-                <a:solidFill>
-                  <a:srgbClr val="8F5902"/>
-                </a:solidFill>
-                <a:latin typeface="Courier"/>
-              </a:rPr>
-              <a:t>TRUE</a:t>
-            </a:r>
-            <a:r>
-              <a:rPr>
-                <a:solidFill>
-                  <a:srgbClr val="003B4F"/>
-                </a:solidFill>
-                <a:latin typeface="Courier"/>
-              </a:rPr>
-              <a:t>),</a:t>
+                  <a:srgbClr val="20794D"/>
+                </a:solidFill>
+                <a:latin typeface="Courier"/>
+              </a:rPr>
+              <a:t>"none"</a:t>
+            </a:r>
+            <a:r>
+              <a:rPr>
+                <a:solidFill>
+                  <a:srgbClr val="003B4F"/>
+                </a:solidFill>
+                <a:latin typeface="Courier"/>
+              </a:rPr>
+              <a:t>)</a:t>
             </a:r>
             <a:br/>
             <a:r>
@@ -4180,1375 +4133,169 @@
                 </a:solidFill>
                 <a:latin typeface="Courier"/>
               </a:rPr>
-              <a:t>    </a:t>
-            </a:r>
-            <a:r>
-              <a:rPr>
-                <a:solidFill>
-                  <a:srgbClr val="657422"/>
-                </a:solidFill>
-                <a:latin typeface="Courier"/>
-              </a:rPr>
-              <a:t>s =</a:t>
-            </a:r>
-            <a:r>
-              <a:rPr>
-                <a:solidFill>
-                  <a:srgbClr val="003B4F"/>
-                </a:solidFill>
-                <a:latin typeface="Courier"/>
-              </a:rPr>
-              <a:t> </a:t>
-            </a:r>
-            <a:r>
-              <a:rPr>
-                <a:solidFill>
-                  <a:srgbClr val="4758AB"/>
-                </a:solidFill>
-                <a:latin typeface="Courier"/>
-              </a:rPr>
-              <a:t>sd</a:t>
-            </a:r>
-            <a:r>
-              <a:rPr>
-                <a:solidFill>
-                  <a:srgbClr val="003B4F"/>
-                </a:solidFill>
-                <a:latin typeface="Courier"/>
-              </a:rPr>
-              <a:t>(mass_g, </a:t>
-            </a:r>
-            <a:r>
-              <a:rPr>
-                <a:solidFill>
-                  <a:srgbClr val="657422"/>
-                </a:solidFill>
-                <a:latin typeface="Courier"/>
-              </a:rPr>
-              <a:t>na.rm =</a:t>
-            </a:r>
-            <a:r>
-              <a:rPr>
-                <a:solidFill>
-                  <a:srgbClr val="003B4F"/>
-                </a:solidFill>
-                <a:latin typeface="Courier"/>
-              </a:rPr>
-              <a:t> </a:t>
-            </a:r>
-            <a:r>
-              <a:rPr>
-                <a:solidFill>
-                  <a:srgbClr val="8F5902"/>
-                </a:solidFill>
-                <a:latin typeface="Courier"/>
-              </a:rPr>
-              <a:t>TRUE</a:t>
-            </a:r>
-            <a:r>
-              <a:rPr>
-                <a:solidFill>
-                  <a:srgbClr val="003B4F"/>
-                </a:solidFill>
-                <a:latin typeface="Courier"/>
-              </a:rPr>
-              <a:t>)</a:t>
-            </a:r>
-            <a:br/>
-            <a:r>
-              <a:rPr>
-                <a:solidFill>
-                  <a:srgbClr val="003B4F"/>
-                </a:solidFill>
-                <a:latin typeface="Courier"/>
-              </a:rPr>
-              <a:t>  )</a:t>
-            </a:r>
-            <a:br/>
-            <a:br/>
-            <a:r>
-              <a:rPr>
-                <a:solidFill>
-                  <a:srgbClr val="003B4F"/>
-                </a:solidFill>
-                <a:latin typeface="Courier"/>
-              </a:rPr>
-              <a:t>m_sha &lt;- stats_df</a:t>
-            </a:r>
-            <a:r>
-              <a:rPr>
-                <a:solidFill>
-                  <a:srgbClr val="5E5E5E"/>
-                </a:solidFill>
-                <a:latin typeface="Courier"/>
-              </a:rPr>
-              <a:t>$</a:t>
-            </a:r>
-            <a:r>
-              <a:rPr>
-                <a:solidFill>
-                  <a:srgbClr val="003B4F"/>
-                </a:solidFill>
-                <a:latin typeface="Courier"/>
-              </a:rPr>
-              <a:t>m[stats_df</a:t>
-            </a:r>
-            <a:r>
-              <a:rPr>
-                <a:solidFill>
-                  <a:srgbClr val="5E5E5E"/>
-                </a:solidFill>
-                <a:latin typeface="Courier"/>
-              </a:rPr>
-              <a:t>$</a:t>
-            </a:r>
-            <a:r>
-              <a:rPr>
-                <a:solidFill>
-                  <a:srgbClr val="003B4F"/>
-                </a:solidFill>
-                <a:latin typeface="Courier"/>
-              </a:rPr>
-              <a:t>shade </a:t>
-            </a:r>
-            <a:r>
-              <a:rPr>
-                <a:solidFill>
-                  <a:srgbClr val="5E5E5E"/>
-                </a:solidFill>
-                <a:latin typeface="Courier"/>
-              </a:rPr>
-              <a:t>==</a:t>
-            </a:r>
-            <a:r>
-              <a:rPr>
-                <a:solidFill>
-                  <a:srgbClr val="003B4F"/>
-                </a:solidFill>
-                <a:latin typeface="Courier"/>
-              </a:rPr>
-              <a:t> </a:t>
-            </a:r>
-            <a:r>
-              <a:rPr>
-                <a:solidFill>
-                  <a:srgbClr val="20794D"/>
-                </a:solidFill>
-                <a:latin typeface="Courier"/>
-              </a:rPr>
-              <a:t>"shady"</a:t>
-            </a:r>
-            <a:r>
-              <a:rPr>
-                <a:solidFill>
-                  <a:srgbClr val="003B4F"/>
-                </a:solidFill>
-                <a:latin typeface="Courier"/>
-              </a:rPr>
-              <a:t>]</a:t>
-            </a:r>
-            <a:br/>
-            <a:r>
-              <a:rPr>
-                <a:solidFill>
-                  <a:srgbClr val="003B4F"/>
-                </a:solidFill>
-                <a:latin typeface="Courier"/>
-              </a:rPr>
-              <a:t>m_sun &lt;- stats_df</a:t>
-            </a:r>
-            <a:r>
-              <a:rPr>
-                <a:solidFill>
-                  <a:srgbClr val="5E5E5E"/>
-                </a:solidFill>
-                <a:latin typeface="Courier"/>
-              </a:rPr>
-              <a:t>$</a:t>
-            </a:r>
-            <a:r>
-              <a:rPr>
-                <a:solidFill>
-                  <a:srgbClr val="003B4F"/>
-                </a:solidFill>
-                <a:latin typeface="Courier"/>
-              </a:rPr>
-              <a:t>m[stats_df</a:t>
-            </a:r>
-            <a:r>
-              <a:rPr>
-                <a:solidFill>
-                  <a:srgbClr val="5E5E5E"/>
-                </a:solidFill>
-                <a:latin typeface="Courier"/>
-              </a:rPr>
-              <a:t>$</a:t>
-            </a:r>
-            <a:r>
-              <a:rPr>
-                <a:solidFill>
-                  <a:srgbClr val="003B4F"/>
-                </a:solidFill>
-                <a:latin typeface="Courier"/>
-              </a:rPr>
-              <a:t>shade </a:t>
-            </a:r>
-            <a:r>
-              <a:rPr>
-                <a:solidFill>
-                  <a:srgbClr val="5E5E5E"/>
-                </a:solidFill>
-                <a:latin typeface="Courier"/>
-              </a:rPr>
-              <a:t>==</a:t>
-            </a:r>
-            <a:r>
-              <a:rPr>
-                <a:solidFill>
-                  <a:srgbClr val="003B4F"/>
-                </a:solidFill>
-                <a:latin typeface="Courier"/>
-              </a:rPr>
-              <a:t> </a:t>
-            </a:r>
-            <a:r>
-              <a:rPr>
-                <a:solidFill>
-                  <a:srgbClr val="20794D"/>
-                </a:solidFill>
-                <a:latin typeface="Courier"/>
-              </a:rPr>
-              <a:t>"sunny"</a:t>
-            </a:r>
-            <a:r>
-              <a:rPr>
-                <a:solidFill>
-                  <a:srgbClr val="003B4F"/>
-                </a:solidFill>
-                <a:latin typeface="Courier"/>
-              </a:rPr>
-              <a:t>]</a:t>
-            </a:r>
-            <a:br/>
-            <a:r>
-              <a:rPr>
-                <a:solidFill>
-                  <a:srgbClr val="003B4F"/>
-                </a:solidFill>
-                <a:latin typeface="Courier"/>
-              </a:rPr>
-              <a:t>s_sha &lt;- stats_df</a:t>
-            </a:r>
-            <a:r>
-              <a:rPr>
-                <a:solidFill>
-                  <a:srgbClr val="5E5E5E"/>
-                </a:solidFill>
-                <a:latin typeface="Courier"/>
-              </a:rPr>
-              <a:t>$</a:t>
-            </a:r>
-            <a:r>
-              <a:rPr>
-                <a:solidFill>
-                  <a:srgbClr val="003B4F"/>
-                </a:solidFill>
-                <a:latin typeface="Courier"/>
-              </a:rPr>
-              <a:t>s[stats_df</a:t>
-            </a:r>
-            <a:r>
-              <a:rPr>
-                <a:solidFill>
-                  <a:srgbClr val="5E5E5E"/>
-                </a:solidFill>
-                <a:latin typeface="Courier"/>
-              </a:rPr>
-              <a:t>$</a:t>
-            </a:r>
-            <a:r>
-              <a:rPr>
-                <a:solidFill>
-                  <a:srgbClr val="003B4F"/>
-                </a:solidFill>
-                <a:latin typeface="Courier"/>
-              </a:rPr>
-              <a:t>shade </a:t>
-            </a:r>
-            <a:r>
-              <a:rPr>
-                <a:solidFill>
-                  <a:srgbClr val="5E5E5E"/>
-                </a:solidFill>
-                <a:latin typeface="Courier"/>
-              </a:rPr>
-              <a:t>==</a:t>
-            </a:r>
-            <a:r>
-              <a:rPr>
-                <a:solidFill>
-                  <a:srgbClr val="003B4F"/>
-                </a:solidFill>
-                <a:latin typeface="Courier"/>
-              </a:rPr>
-              <a:t> </a:t>
-            </a:r>
-            <a:r>
-              <a:rPr>
-                <a:solidFill>
-                  <a:srgbClr val="20794D"/>
-                </a:solidFill>
-                <a:latin typeface="Courier"/>
-              </a:rPr>
-              <a:t>"shady"</a:t>
-            </a:r>
-            <a:r>
-              <a:rPr>
-                <a:solidFill>
-                  <a:srgbClr val="003B4F"/>
-                </a:solidFill>
-                <a:latin typeface="Courier"/>
-              </a:rPr>
-              <a:t>]</a:t>
-            </a:r>
-            <a:br/>
-            <a:r>
-              <a:rPr>
-                <a:solidFill>
-                  <a:srgbClr val="003B4F"/>
-                </a:solidFill>
-                <a:latin typeface="Courier"/>
-              </a:rPr>
-              <a:t>s_sun &lt;- stats_df</a:t>
-            </a:r>
-            <a:r>
-              <a:rPr>
-                <a:solidFill>
-                  <a:srgbClr val="5E5E5E"/>
-                </a:solidFill>
-                <a:latin typeface="Courier"/>
-              </a:rPr>
-              <a:t>$</a:t>
-            </a:r>
-            <a:r>
-              <a:rPr>
-                <a:solidFill>
-                  <a:srgbClr val="003B4F"/>
-                </a:solidFill>
-                <a:latin typeface="Courier"/>
-              </a:rPr>
-              <a:t>s[stats_df</a:t>
-            </a:r>
-            <a:r>
-              <a:rPr>
-                <a:solidFill>
-                  <a:srgbClr val="5E5E5E"/>
-                </a:solidFill>
-                <a:latin typeface="Courier"/>
-              </a:rPr>
-              <a:t>$</a:t>
-            </a:r>
-            <a:r>
-              <a:rPr>
-                <a:solidFill>
-                  <a:srgbClr val="003B4F"/>
-                </a:solidFill>
-                <a:latin typeface="Courier"/>
-              </a:rPr>
-              <a:t>shade </a:t>
-            </a:r>
-            <a:r>
-              <a:rPr>
-                <a:solidFill>
-                  <a:srgbClr val="5E5E5E"/>
-                </a:solidFill>
-                <a:latin typeface="Courier"/>
-              </a:rPr>
-              <a:t>==</a:t>
-            </a:r>
-            <a:r>
-              <a:rPr>
-                <a:solidFill>
-                  <a:srgbClr val="003B4F"/>
-                </a:solidFill>
-                <a:latin typeface="Courier"/>
-              </a:rPr>
-              <a:t> </a:t>
-            </a:r>
-            <a:r>
-              <a:rPr>
-                <a:solidFill>
-                  <a:srgbClr val="20794D"/>
-                </a:solidFill>
-                <a:latin typeface="Courier"/>
-              </a:rPr>
-              <a:t>"sunny"</a:t>
-            </a:r>
-            <a:r>
-              <a:rPr>
-                <a:solidFill>
-                  <a:srgbClr val="003B4F"/>
-                </a:solidFill>
-                <a:latin typeface="Courier"/>
-              </a:rPr>
-              <a:t>]</a:t>
-            </a:r>
-            <a:br/>
-            <a:r>
-              <a:rPr>
-                <a:solidFill>
-                  <a:srgbClr val="003B4F"/>
-                </a:solidFill>
-                <a:latin typeface="Courier"/>
-              </a:rPr>
-              <a:t>n_sha &lt;- stats_df</a:t>
-            </a:r>
-            <a:r>
-              <a:rPr>
-                <a:solidFill>
-                  <a:srgbClr val="5E5E5E"/>
-                </a:solidFill>
-                <a:latin typeface="Courier"/>
-              </a:rPr>
-              <a:t>$</a:t>
-            </a:r>
-            <a:r>
-              <a:rPr>
-                <a:solidFill>
-                  <a:srgbClr val="003B4F"/>
-                </a:solidFill>
-                <a:latin typeface="Courier"/>
-              </a:rPr>
-              <a:t>n[stats_df</a:t>
-            </a:r>
-            <a:r>
-              <a:rPr>
-                <a:solidFill>
-                  <a:srgbClr val="5E5E5E"/>
-                </a:solidFill>
-                <a:latin typeface="Courier"/>
-              </a:rPr>
-              <a:t>$</a:t>
-            </a:r>
-            <a:r>
-              <a:rPr>
-                <a:solidFill>
-                  <a:srgbClr val="003B4F"/>
-                </a:solidFill>
-                <a:latin typeface="Courier"/>
-              </a:rPr>
-              <a:t>shade </a:t>
-            </a:r>
-            <a:r>
-              <a:rPr>
-                <a:solidFill>
-                  <a:srgbClr val="5E5E5E"/>
-                </a:solidFill>
-                <a:latin typeface="Courier"/>
-              </a:rPr>
-              <a:t>==</a:t>
-            </a:r>
-            <a:r>
-              <a:rPr>
-                <a:solidFill>
-                  <a:srgbClr val="003B4F"/>
-                </a:solidFill>
-                <a:latin typeface="Courier"/>
-              </a:rPr>
-              <a:t> </a:t>
-            </a:r>
-            <a:r>
-              <a:rPr>
-                <a:solidFill>
-                  <a:srgbClr val="20794D"/>
-                </a:solidFill>
-                <a:latin typeface="Courier"/>
-              </a:rPr>
-              <a:t>"shady"</a:t>
-            </a:r>
-            <a:r>
-              <a:rPr>
-                <a:solidFill>
-                  <a:srgbClr val="003B4F"/>
-                </a:solidFill>
-                <a:latin typeface="Courier"/>
-              </a:rPr>
-              <a:t>]</a:t>
-            </a:r>
-            <a:br/>
-            <a:r>
-              <a:rPr>
-                <a:solidFill>
-                  <a:srgbClr val="003B4F"/>
-                </a:solidFill>
-                <a:latin typeface="Courier"/>
-              </a:rPr>
-              <a:t>n_sun &lt;- stats_df</a:t>
-            </a:r>
-            <a:r>
-              <a:rPr>
-                <a:solidFill>
-                  <a:srgbClr val="5E5E5E"/>
-                </a:solidFill>
-                <a:latin typeface="Courier"/>
-              </a:rPr>
-              <a:t>$</a:t>
-            </a:r>
-            <a:r>
-              <a:rPr>
-                <a:solidFill>
-                  <a:srgbClr val="003B4F"/>
-                </a:solidFill>
-                <a:latin typeface="Courier"/>
-              </a:rPr>
-              <a:t>n[stats_df</a:t>
-            </a:r>
-            <a:r>
-              <a:rPr>
-                <a:solidFill>
-                  <a:srgbClr val="5E5E5E"/>
-                </a:solidFill>
-                <a:latin typeface="Courier"/>
-              </a:rPr>
-              <a:t>$</a:t>
-            </a:r>
-            <a:r>
-              <a:rPr>
-                <a:solidFill>
-                  <a:srgbClr val="003B4F"/>
-                </a:solidFill>
-                <a:latin typeface="Courier"/>
-              </a:rPr>
-              <a:t>shade </a:t>
-            </a:r>
-            <a:r>
-              <a:rPr>
-                <a:solidFill>
-                  <a:srgbClr val="5E5E5E"/>
-                </a:solidFill>
-                <a:latin typeface="Courier"/>
-              </a:rPr>
-              <a:t>==</a:t>
-            </a:r>
-            <a:r>
-              <a:rPr>
-                <a:solidFill>
-                  <a:srgbClr val="003B4F"/>
-                </a:solidFill>
-                <a:latin typeface="Courier"/>
-              </a:rPr>
-              <a:t> </a:t>
-            </a:r>
-            <a:r>
-              <a:rPr>
-                <a:solidFill>
-                  <a:srgbClr val="20794D"/>
-                </a:solidFill>
-                <a:latin typeface="Courier"/>
-              </a:rPr>
-              <a:t>"sunny"</a:t>
-            </a:r>
-            <a:r>
-              <a:rPr>
-                <a:solidFill>
-                  <a:srgbClr val="003B4F"/>
-                </a:solidFill>
-                <a:latin typeface="Courier"/>
-              </a:rPr>
-              <a:t>]</a:t>
-            </a:r>
-            <a:br/>
-            <a:br/>
-            <a:r>
-              <a:rPr>
-                <a:solidFill>
-                  <a:srgbClr val="003B4F"/>
-                </a:solidFill>
-                <a:latin typeface="Courier"/>
-              </a:rPr>
-              <a:t>se_diff &lt;- </a:t>
-            </a:r>
-            <a:r>
-              <a:rPr>
-                <a:solidFill>
-                  <a:srgbClr val="4758AB"/>
-                </a:solidFill>
-                <a:latin typeface="Courier"/>
-              </a:rPr>
-              <a:t>sqrt</a:t>
-            </a:r>
-            <a:r>
-              <a:rPr>
-                <a:solidFill>
-                  <a:srgbClr val="003B4F"/>
-                </a:solidFill>
-                <a:latin typeface="Courier"/>
-              </a:rPr>
-              <a:t>((s_sha</a:t>
-            </a:r>
-            <a:r>
-              <a:rPr>
-                <a:solidFill>
-                  <a:srgbClr val="5E5E5E"/>
-                </a:solidFill>
-                <a:latin typeface="Courier"/>
-              </a:rPr>
-              <a:t>^</a:t>
-            </a:r>
-            <a:r>
-              <a:rPr>
-                <a:solidFill>
-                  <a:srgbClr val="AD0000"/>
-                </a:solidFill>
-                <a:latin typeface="Courier"/>
-              </a:rPr>
-              <a:t>2</a:t>
-            </a:r>
-            <a:r>
-              <a:rPr>
-                <a:solidFill>
-                  <a:srgbClr val="003B4F"/>
-                </a:solidFill>
-                <a:latin typeface="Courier"/>
-              </a:rPr>
-              <a:t> </a:t>
-            </a:r>
-            <a:r>
-              <a:rPr>
-                <a:solidFill>
-                  <a:srgbClr val="5E5E5E"/>
-                </a:solidFill>
-                <a:latin typeface="Courier"/>
-              </a:rPr>
-              <a:t>/</a:t>
-            </a:r>
-            <a:r>
-              <a:rPr>
-                <a:solidFill>
-                  <a:srgbClr val="003B4F"/>
-                </a:solidFill>
-                <a:latin typeface="Courier"/>
-              </a:rPr>
-              <a:t> n_sha) </a:t>
-            </a:r>
-            <a:r>
-              <a:rPr>
-                <a:solidFill>
-                  <a:srgbClr val="5E5E5E"/>
-                </a:solidFill>
-                <a:latin typeface="Courier"/>
-              </a:rPr>
-              <a:t>+</a:t>
-            </a:r>
-            <a:r>
-              <a:rPr>
-                <a:solidFill>
-                  <a:srgbClr val="003B4F"/>
-                </a:solidFill>
-                <a:latin typeface="Courier"/>
-              </a:rPr>
-              <a:t> (s_sun</a:t>
-            </a:r>
-            <a:r>
-              <a:rPr>
-                <a:solidFill>
-                  <a:srgbClr val="5E5E5E"/>
-                </a:solidFill>
-                <a:latin typeface="Courier"/>
-              </a:rPr>
-              <a:t>^</a:t>
-            </a:r>
-            <a:r>
-              <a:rPr>
-                <a:solidFill>
-                  <a:srgbClr val="AD0000"/>
-                </a:solidFill>
-                <a:latin typeface="Courier"/>
-              </a:rPr>
-              <a:t>2</a:t>
-            </a:r>
-            <a:r>
-              <a:rPr>
-                <a:solidFill>
-                  <a:srgbClr val="003B4F"/>
-                </a:solidFill>
-                <a:latin typeface="Courier"/>
-              </a:rPr>
-              <a:t> </a:t>
-            </a:r>
-            <a:r>
-              <a:rPr>
-                <a:solidFill>
-                  <a:srgbClr val="5E5E5E"/>
-                </a:solidFill>
-                <a:latin typeface="Courier"/>
-              </a:rPr>
-              <a:t>/</a:t>
-            </a:r>
-            <a:r>
-              <a:rPr>
-                <a:solidFill>
-                  <a:srgbClr val="003B4F"/>
-                </a:solidFill>
-                <a:latin typeface="Courier"/>
-              </a:rPr>
-              <a:t> n_sun))</a:t>
-            </a:r>
-            <a:br/>
-            <a:r>
-              <a:rPr>
-                <a:solidFill>
-                  <a:srgbClr val="003B4F"/>
-                </a:solidFill>
-                <a:latin typeface="Courier"/>
-              </a:rPr>
-              <a:t>t_manual &lt;- (m_sha </a:t>
-            </a:r>
-            <a:r>
-              <a:rPr>
-                <a:solidFill>
-                  <a:srgbClr val="5E5E5E"/>
-                </a:solidFill>
-                <a:latin typeface="Courier"/>
-              </a:rPr>
-              <a:t>-</a:t>
-            </a:r>
-            <a:r>
-              <a:rPr>
-                <a:solidFill>
-                  <a:srgbClr val="003B4F"/>
-                </a:solidFill>
-                <a:latin typeface="Courier"/>
-              </a:rPr>
-              <a:t> m_sun) </a:t>
-            </a:r>
-            <a:r>
-              <a:rPr>
-                <a:solidFill>
-                  <a:srgbClr val="5E5E5E"/>
-                </a:solidFill>
-                <a:latin typeface="Courier"/>
-              </a:rPr>
-              <a:t>/</a:t>
-            </a:r>
-            <a:r>
-              <a:rPr>
-                <a:solidFill>
-                  <a:srgbClr val="003B4F"/>
-                </a:solidFill>
-                <a:latin typeface="Courier"/>
-              </a:rPr>
-              <a:t> se_diff</a:t>
-            </a:r>
-            <a:br/>
-            <a:br/>
-            <a:r>
-              <a:rPr>
-                <a:solidFill>
-                  <a:srgbClr val="4758AB"/>
-                </a:solidFill>
-                <a:latin typeface="Courier"/>
-              </a:rPr>
-              <a:t>cat</a:t>
-            </a:r>
-            <a:r>
-              <a:rPr>
-                <a:solidFill>
-                  <a:srgbClr val="003B4F"/>
-                </a:solidFill>
-                <a:latin typeface="Courier"/>
-              </a:rPr>
-              <a:t>(</a:t>
-            </a:r>
-            <a:r>
-              <a:rPr>
-                <a:solidFill>
-                  <a:srgbClr val="20794D"/>
-                </a:solidFill>
-                <a:latin typeface="Courier"/>
-              </a:rPr>
-              <a:t>"Difference in means:"</a:t>
-            </a:r>
-            <a:r>
-              <a:rPr>
-                <a:solidFill>
-                  <a:srgbClr val="003B4F"/>
-                </a:solidFill>
-                <a:latin typeface="Courier"/>
-              </a:rPr>
-              <a:t>, </a:t>
-            </a:r>
-            <a:r>
-              <a:rPr>
-                <a:solidFill>
-                  <a:srgbClr val="4758AB"/>
-                </a:solidFill>
-                <a:latin typeface="Courier"/>
-              </a:rPr>
-              <a:t>round</a:t>
-            </a:r>
-            <a:r>
-              <a:rPr>
-                <a:solidFill>
-                  <a:srgbClr val="003B4F"/>
-                </a:solidFill>
-                <a:latin typeface="Courier"/>
-              </a:rPr>
-              <a:t>(m_sha </a:t>
-            </a:r>
-            <a:r>
-              <a:rPr>
-                <a:solidFill>
-                  <a:srgbClr val="5E5E5E"/>
-                </a:solidFill>
-                <a:latin typeface="Courier"/>
-              </a:rPr>
-              <a:t>-</a:t>
-            </a:r>
-            <a:r>
-              <a:rPr>
-                <a:solidFill>
-                  <a:srgbClr val="003B4F"/>
-                </a:solidFill>
-                <a:latin typeface="Courier"/>
-              </a:rPr>
-              <a:t> m_sun, </a:t>
-            </a:r>
-            <a:r>
-              <a:rPr>
-                <a:solidFill>
-                  <a:srgbClr val="AD0000"/>
-                </a:solidFill>
-                <a:latin typeface="Courier"/>
-              </a:rPr>
-              <a:t>3</a:t>
-            </a:r>
-            <a:r>
-              <a:rPr>
-                <a:solidFill>
-                  <a:srgbClr val="003B4F"/>
-                </a:solidFill>
-                <a:latin typeface="Courier"/>
-              </a:rPr>
-              <a:t>), </a:t>
-            </a:r>
-            <a:r>
-              <a:rPr>
-                <a:solidFill>
-                  <a:srgbClr val="20794D"/>
-                </a:solidFill>
-                <a:latin typeface="Courier"/>
-              </a:rPr>
-              <a:t>"g</a:t>
-            </a:r>
-            <a:r>
-              <a:rPr>
-                <a:solidFill>
-                  <a:srgbClr val="5E5E5E"/>
-                </a:solidFill>
-                <a:latin typeface="Courier"/>
-              </a:rPr>
-              <a:t>\n</a:t>
-            </a:r>
-            <a:r>
-              <a:rPr>
-                <a:solidFill>
-                  <a:srgbClr val="20794D"/>
-                </a:solidFill>
-                <a:latin typeface="Courier"/>
-              </a:rPr>
-              <a:t>"</a:t>
-            </a:r>
-            <a:r>
-              <a:rPr>
-                <a:solidFill>
-                  <a:srgbClr val="003B4F"/>
-                </a:solidFill>
-                <a:latin typeface="Courier"/>
-              </a:rPr>
-              <a:t>)</a:t>
-            </a:r>
-          </a:p>
-          <a:p>
-            <a:pPr lvl="0" indent="0">
-              <a:buNone/>
-            </a:pPr>
-            <a:r>
-              <a:rPr>
-                <a:latin typeface="Courier"/>
-              </a:rPr>
-              <a:t>Difference in means: 0.018 g</a:t>
-            </a:r>
-          </a:p>
-          <a:p>
-            <a:pPr lvl="0" indent="0">
-              <a:buNone/>
-            </a:pPr>
-            <a:r>
-              <a:rPr>
-                <a:solidFill>
-                  <a:srgbClr val="4758AB"/>
-                </a:solidFill>
-                <a:latin typeface="Courier"/>
-              </a:rPr>
-              <a:t>cat</a:t>
-            </a:r>
-            <a:r>
-              <a:rPr>
-                <a:solidFill>
-                  <a:srgbClr val="003B4F"/>
-                </a:solidFill>
-                <a:latin typeface="Courier"/>
-              </a:rPr>
-              <a:t>(</a:t>
-            </a:r>
-            <a:r>
-              <a:rPr>
-                <a:solidFill>
-                  <a:srgbClr val="20794D"/>
-                </a:solidFill>
-                <a:latin typeface="Courier"/>
-              </a:rPr>
-              <a:t>"SE of difference:   "</a:t>
-            </a:r>
-            <a:r>
-              <a:rPr>
-                <a:solidFill>
-                  <a:srgbClr val="003B4F"/>
-                </a:solidFill>
-                <a:latin typeface="Courier"/>
-              </a:rPr>
-              <a:t>, </a:t>
-            </a:r>
-            <a:r>
-              <a:rPr>
-                <a:solidFill>
-                  <a:srgbClr val="4758AB"/>
-                </a:solidFill>
-                <a:latin typeface="Courier"/>
-              </a:rPr>
-              <a:t>round</a:t>
-            </a:r>
-            <a:r>
-              <a:rPr>
-                <a:solidFill>
-                  <a:srgbClr val="003B4F"/>
-                </a:solidFill>
-                <a:latin typeface="Courier"/>
-              </a:rPr>
-              <a:t>(se_diff, </a:t>
-            </a:r>
-            <a:r>
-              <a:rPr>
-                <a:solidFill>
-                  <a:srgbClr val="AD0000"/>
-                </a:solidFill>
-                <a:latin typeface="Courier"/>
-              </a:rPr>
-              <a:t>4</a:t>
-            </a:r>
-            <a:r>
-              <a:rPr>
-                <a:solidFill>
-                  <a:srgbClr val="003B4F"/>
-                </a:solidFill>
-                <a:latin typeface="Courier"/>
-              </a:rPr>
-              <a:t>), </a:t>
-            </a:r>
-            <a:r>
-              <a:rPr>
-                <a:solidFill>
-                  <a:srgbClr val="20794D"/>
-                </a:solidFill>
-                <a:latin typeface="Courier"/>
-              </a:rPr>
-              <a:t>"</a:t>
-            </a:r>
-            <a:r>
-              <a:rPr>
-                <a:solidFill>
-                  <a:srgbClr val="5E5E5E"/>
-                </a:solidFill>
-                <a:latin typeface="Courier"/>
-              </a:rPr>
-              <a:t>\n</a:t>
-            </a:r>
-            <a:r>
-              <a:rPr>
-                <a:solidFill>
-                  <a:srgbClr val="20794D"/>
-                </a:solidFill>
-                <a:latin typeface="Courier"/>
-              </a:rPr>
-              <a:t>"</a:t>
-            </a:r>
-            <a:r>
-              <a:rPr>
-                <a:solidFill>
-                  <a:srgbClr val="003B4F"/>
-                </a:solidFill>
-                <a:latin typeface="Courier"/>
-              </a:rPr>
-              <a:t>)</a:t>
-            </a:r>
-          </a:p>
-          <a:p>
-            <a:pPr lvl="0" indent="0">
-              <a:buNone/>
-            </a:pPr>
-            <a:r>
-              <a:rPr>
-                <a:latin typeface="Courier"/>
-              </a:rPr>
-              <a:t>SE of difference:    0.0505 </a:t>
-            </a:r>
-          </a:p>
-          <a:p>
-            <a:pPr lvl="0" indent="0">
-              <a:buNone/>
-            </a:pPr>
-            <a:r>
-              <a:rPr>
-                <a:solidFill>
-                  <a:srgbClr val="4758AB"/>
-                </a:solidFill>
-                <a:latin typeface="Courier"/>
-              </a:rPr>
-              <a:t>cat</a:t>
-            </a:r>
-            <a:r>
-              <a:rPr>
-                <a:solidFill>
-                  <a:srgbClr val="003B4F"/>
-                </a:solidFill>
-                <a:latin typeface="Courier"/>
-              </a:rPr>
-              <a:t>(</a:t>
-            </a:r>
-            <a:r>
-              <a:rPr>
-                <a:solidFill>
-                  <a:srgbClr val="20794D"/>
-                </a:solidFill>
-                <a:latin typeface="Courier"/>
-              </a:rPr>
-              <a:t>"t-statistic:        "</a:t>
-            </a:r>
-            <a:r>
-              <a:rPr>
-                <a:solidFill>
-                  <a:srgbClr val="003B4F"/>
-                </a:solidFill>
-                <a:latin typeface="Courier"/>
-              </a:rPr>
-              <a:t>, </a:t>
-            </a:r>
-            <a:r>
-              <a:rPr>
-                <a:solidFill>
-                  <a:srgbClr val="4758AB"/>
-                </a:solidFill>
-                <a:latin typeface="Courier"/>
-              </a:rPr>
-              <a:t>round</a:t>
-            </a:r>
-            <a:r>
-              <a:rPr>
-                <a:solidFill>
-                  <a:srgbClr val="003B4F"/>
-                </a:solidFill>
-                <a:latin typeface="Courier"/>
-              </a:rPr>
-              <a:t>(t_manual, </a:t>
-            </a:r>
-            <a:r>
-              <a:rPr>
-                <a:solidFill>
-                  <a:srgbClr val="AD0000"/>
-                </a:solidFill>
-                <a:latin typeface="Courier"/>
-              </a:rPr>
-              <a:t>3</a:t>
-            </a:r>
-            <a:r>
-              <a:rPr>
-                <a:solidFill>
-                  <a:srgbClr val="003B4F"/>
-                </a:solidFill>
-                <a:latin typeface="Courier"/>
-              </a:rPr>
-              <a:t>), </a:t>
-            </a:r>
-            <a:r>
-              <a:rPr>
-                <a:solidFill>
-                  <a:srgbClr val="20794D"/>
-                </a:solidFill>
-                <a:latin typeface="Courier"/>
-              </a:rPr>
-              <a:t>"</a:t>
-            </a:r>
-            <a:r>
-              <a:rPr>
-                <a:solidFill>
-                  <a:srgbClr val="5E5E5E"/>
-                </a:solidFill>
-                <a:latin typeface="Courier"/>
-              </a:rPr>
-              <a:t>\n</a:t>
-            </a:r>
-            <a:r>
-              <a:rPr>
-                <a:solidFill>
-                  <a:srgbClr val="20794D"/>
-                </a:solidFill>
-                <a:latin typeface="Courier"/>
-              </a:rPr>
-              <a:t>"</a:t>
-            </a:r>
-            <a:r>
-              <a:rPr>
-                <a:solidFill>
-                  <a:srgbClr val="003B4F"/>
-                </a:solidFill>
-                <a:latin typeface="Courier"/>
-              </a:rPr>
-              <a:t>)</a:t>
-            </a:r>
-          </a:p>
-          <a:p>
-            <a:pPr lvl="0" indent="0">
-              <a:buNone/>
-            </a:pPr>
-            <a:r>
-              <a:rPr>
-                <a:latin typeface="Courier"/>
-              </a:rPr>
-              <a:t>t-statistic:         0.356 </a:t>
-            </a:r>
-          </a:p>
-        </p:txBody>
-      </p:sp>
-      <mc:AlternateContent xmlns:mc="http://schemas.openxmlformats.org/markup-compatibility/2006">
-        <mc:Choice xmlns:a14="http://schemas.microsoft.com/office/drawing/2010/main" Requires="a14">
-          <p:sp>
-            <p:nvSpPr>
-              <p:cNvPr id="4" name="Content Placeholder 3"/>
-              <p:cNvSpPr>
-                <a:spLocks noGrp="1"/>
-              </p:cNvSpPr>
-              <p:nvPr>
-                <p:ph idx="2" sz="half"/>
-              </p:nvPr>
-            </p:nvSpPr>
-            <p:spPr/>
-            <p:txBody>
-              <a:bodyPr/>
-              <a:lstStyle/>
-              <a:p>
-                <a:pPr lvl="0" indent="0" marL="0">
-                  <a:buNone/>
-                </a:pPr>
-                <a:r>
-                  <a:rPr b="1"/>
-                  <a:t>Step by step:</a:t>
-                </a:r>
-              </a:p>
-              <a:p>
-                <a:pPr lvl="0" indent="-342900" marL="342900">
-                  <a:buAutoNum type="arabicPeriod"/>
-                </a:pPr>
-                <a:r>
-                  <a:rPr/>
-                  <a:t>Difference in means: shady − sunny ≈ </a:t>
-                </a:r>
-                <a:r>
-                  <a:rPr b="1"/>
-                  <a:t>0.02 g</a:t>
-                </a:r>
-              </a:p>
-              <a:p>
-                <a:pPr lvl="0" indent="-342900" marL="342900">
-                  <a:buAutoNum type="arabicPeriod"/>
-                </a:pPr>
-                <a:r>
-                  <a:rPr/>
-                  <a:t>SE of the difference: </a:t>
-                </a:r>
-                <a14:m>
-                  <m:oMath xmlns:m="http://schemas.openxmlformats.org/officeDocument/2006/math">
-                    <m:rad>
-                      <m:radPr>
-                        <m:degHide m:val="on"/>
-                      </m:radPr>
-                      <m:deg/>
-                      <m:e>
-                        <m:f>
-                          <m:fPr>
-                            <m:type m:val="bar"/>
-                          </m:fPr>
-                          <m:num>
-                            <m:sSubSup>
-                              <m:e>
-                                <m:r>
-                                  <m:t>s</m:t>
-                                </m:r>
-                              </m:e>
-                              <m:sub>
-                                <m:r>
-                                  <m:t>s</m:t>
-                                </m:r>
-                                <m:r>
-                                  <m:t>h</m:t>
-                                </m:r>
-                                <m:r>
-                                  <m:t>a</m:t>
-                                </m:r>
-                                <m:r>
-                                  <m:t>d</m:t>
-                                </m:r>
-                                <m:r>
-                                  <m:t>y</m:t>
-                                </m:r>
-                              </m:sub>
-                              <m:sup>
-                                <m:r>
-                                  <m:t>2</m:t>
-                                </m:r>
-                              </m:sup>
-                            </m:sSubSup>
-                          </m:num>
-                          <m:den>
-                            <m:sSub>
-                              <m:e>
-                                <m:r>
-                                  <m:t>n</m:t>
-                                </m:r>
-                              </m:e>
-                              <m:sub>
-                                <m:r>
-                                  <m:t>s</m:t>
-                                </m:r>
-                                <m:r>
-                                  <m:t>h</m:t>
-                                </m:r>
-                                <m:r>
-                                  <m:t>a</m:t>
-                                </m:r>
-                                <m:r>
-                                  <m:t>d</m:t>
-                                </m:r>
-                                <m:r>
-                                  <m:t>y</m:t>
-                                </m:r>
-                              </m:sub>
-                            </m:sSub>
-                          </m:den>
-                        </m:f>
-                        <m:r>
-                          <m:rPr>
-                            <m:sty m:val="p"/>
-                          </m:rPr>
-                          <m:t>+</m:t>
-                        </m:r>
-                        <m:f>
-                          <m:fPr>
-                            <m:type m:val="bar"/>
-                          </m:fPr>
-                          <m:num>
-                            <m:sSubSup>
-                              <m:e>
-                                <m:r>
-                                  <m:t>s</m:t>
-                                </m:r>
-                              </m:e>
-                              <m:sub>
-                                <m:r>
-                                  <m:t>s</m:t>
-                                </m:r>
-                                <m:r>
-                                  <m:t>u</m:t>
-                                </m:r>
-                                <m:r>
-                                  <m:t>n</m:t>
-                                </m:r>
-                                <m:r>
-                                  <m:t>n</m:t>
-                                </m:r>
-                                <m:r>
-                                  <m:t>y</m:t>
-                                </m:r>
-                              </m:sub>
-                              <m:sup>
-                                <m:r>
-                                  <m:t>2</m:t>
-                                </m:r>
-                              </m:sup>
-                            </m:sSubSup>
-                          </m:num>
-                          <m:den>
-                            <m:sSub>
-                              <m:e>
-                                <m:r>
-                                  <m:t>n</m:t>
-                                </m:r>
-                              </m:e>
-                              <m:sub>
-                                <m:r>
-                                  <m:t>s</m:t>
-                                </m:r>
-                                <m:r>
-                                  <m:t>u</m:t>
-                                </m:r>
-                                <m:r>
-                                  <m:t>n</m:t>
-                                </m:r>
-                                <m:r>
-                                  <m:t>n</m:t>
-                                </m:r>
-                                <m:r>
-                                  <m:t>y</m:t>
-                                </m:r>
-                              </m:sub>
-                            </m:sSub>
-                          </m:den>
-                        </m:f>
-                      </m:e>
-                    </m:rad>
-                  </m:oMath>
-                </a14:m>
-              </a:p>
-              <a:p>
-                <a:pPr lvl="0" indent="-342900" marL="342900">
-                  <a:buAutoNum type="arabicPeriod"/>
-                </a:pPr>
-                <a:r>
-                  <a:rPr/>
-                  <a:t>t = difference / SE</a:t>
-                </a:r>
-              </a:p>
-              <a:p>
-                <a:pPr lvl="0" indent="0" marL="0">
-                  <a:buNone/>
-                </a:pPr>
-                <a:r>
-                  <a:rPr/>
-                  <a:t>The observed difference is </a:t>
-                </a:r>
-                <a:r>
-                  <a:rPr b="1"/>
-                  <a:t>well under one standard error</a:t>
-                </a:r>
-                <a:r>
-                  <a:rPr/>
-                  <a:t> from zero — right in the range you’d expect if H₀ were true. You’ll try this yourself with a calculator in the activity’s optional section — today the goal is just to see where the number comes from.</a:t>
-                </a:r>
-              </a:p>
-            </p:txBody>
-          </p:sp>
-        </mc:Choice>
-      </mc:AlternateContent>
+              <a:t>hist_norm_plot</a:t>
+            </a:r>
+          </a:p>
+        </p:txBody>
+      </p:sp>
+      <p:pic>
+        <p:nvPicPr>
+          <p:cNvPr descr="t_tests_lecture_files/figure-pptx/histogram-norm-1.png" id="0" name="Picture 1"/>
+          <p:cNvPicPr>
+            <a:picLocks noGrp="1" noChangeAspect="1"/>
+          </p:cNvPicPr>
+          <p:nvPr/>
+        </p:nvPicPr>
+        <p:blipFill>
+          <a:blip r:embed="rId2"/>
+          <a:stretch>
+            <a:fillRect/>
+          </a:stretch>
+        </p:blipFill>
+        <p:spPr bwMode="auto">
+          <a:xfrm>
+            <a:off x="127000" y="1485900"/>
+            <a:ext cx="4432300" cy="2870200"/>
+          </a:xfrm>
+          <a:prstGeom prst="rect">
+            <a:avLst/>
+          </a:prstGeom>
+          <a:noFill/>
+          <a:ln w="9525">
+            <a:noFill/>
+            <a:headEnd/>
+            <a:tailEnd/>
+          </a:ln>
+        </p:spPr>
+      </p:pic>
+      <p:sp>
+        <p:nvSpPr>
+          <p:cNvPr id="5" name="Text Placeholder 4"/>
+          <p:cNvSpPr>
+            <a:spLocks noGrp="1"/>
+          </p:cNvSpPr>
+          <p:nvPr>
+            <p:ph idx="3" sz="quarter" type="body"/>
+          </p:nvPr>
+        </p:nvSpPr>
+        <p:spPr/>
+        <p:txBody>
+          <a:bodyPr/>
+          <a:lstStyle/>
+          <a:p>
+            <a:pPr lvl="0" indent="0" marL="0">
+              <a:buNone/>
+            </a:pPr>
+            <a:r>
+              <a:rPr b="1">
+                <a:latin typeface="Courier"/>
+              </a:rPr>
+              <a:t>ncol = 1</a:t>
+            </a:r>
+            <a:r>
+              <a:rPr b="1"/>
+              <a:t> stacks the panels.</a:t>
+            </a:r>
+            <a:r>
+              <a:rPr/>
+              <a:t> Both share one x-axis, so you can see at a glance:</a:t>
+            </a:r>
+          </a:p>
+          <a:p>
+            <a:pPr lvl="0"/>
+            <a:r>
+              <a:rPr/>
+              <a:t>where each group is </a:t>
+            </a:r>
+            <a:r>
+              <a:rPr b="1"/>
+              <a:t>centered</a:t>
+            </a:r>
+          </a:p>
+          <a:p>
+            <a:pPr lvl="0"/>
+            <a:r>
+              <a:rPr/>
+              <a:t>how </a:t>
+            </a:r>
+            <a:r>
+              <a:rPr b="1"/>
+              <a:t>wide</a:t>
+            </a:r>
+            <a:r>
+              <a:rPr/>
+              <a:t> each group spreads</a:t>
+            </a:r>
+          </a:p>
+          <a:p>
+            <a:pPr lvl="0"/>
+            <a:r>
+              <a:rPr/>
+              <a:t>which group has the </a:t>
+            </a:r>
+            <a:r>
+              <a:rPr b="1"/>
+              <a:t>long tail</a:t>
+            </a:r>
+          </a:p>
+          <a:p>
+            <a:pPr lvl="0" indent="0" marL="0">
+              <a:buNone/>
+            </a:pPr>
+            <a:r>
+              <a:rPr b="1"/>
+              <a:t>What to look for:</a:t>
+            </a:r>
+          </a:p>
+          <a:p>
+            <a:pPr lvl="0"/>
+            <a:r>
+              <a:rPr/>
+              <a:t>Roughly </a:t>
+            </a:r>
+            <a:r>
+              <a:rPr b="1"/>
+              <a:t>bell-shaped</a:t>
+            </a:r>
+            <a:r>
+              <a:rPr/>
+              <a:t> — one hump, not badly lopsided</a:t>
+            </a:r>
+          </a:p>
+          <a:p>
+            <a:pPr lvl="0"/>
+            <a:r>
+              <a:rPr/>
+              <a:t>No big </a:t>
+            </a:r>
+            <a:r>
+              <a:rPr b="1"/>
+              <a:t>outliers</a:t>
+            </a:r>
+            <a:r>
+              <a:rPr/>
+              <a:t> far from the rest</a:t>
+            </a:r>
+          </a:p>
+          <a:p>
+            <a:pPr lvl="0" indent="0" marL="0">
+              <a:buNone/>
+            </a:pPr>
+            <a:r>
+              <a:rPr/>
+              <a:t>With ~25 leaves the bars are lumpy — that’s normal for real data. It’s hard to judge “bell-shaped” by eye, which is why we add a </a:t>
+            </a:r>
+            <a:r>
+              <a:rPr b="1"/>
+              <a:t>QQ plot</a:t>
+            </a:r>
+            <a:r>
+              <a:rPr/>
+              <a:t>.</a:t>
+            </a:r>
+          </a:p>
+        </p:txBody>
+      </p:sp>
     </p:spTree>
   </p:cSld>
 </p:sld>
@@ -5584,8 +4331,11 @@
         <p:spPr>
           <a:xfrm>
             <a:off x="0" y="0"/>
-            <a:ext cx="9144000" cy="582780"/>
+            <a:ext cx="9144000" cy="602780"/>
           </a:xfrm>
+          <a:solidFill>
+            <a:srgbClr val="1A1A2E"/>
+          </a:solidFill>
         </p:spPr>
         <p:txBody>
           <a:bodyPr/>
@@ -5596,19 +4346,49 @@
             </a:pPr>
             <a:r>
               <a:rPr/>
-              <a:t>→ ACTIVITY 9 Parts 1–2 now</a:t>
-            </a:r>
-          </a:p>
-        </p:txBody>
-      </p:sp>
-      <p:sp>
-        <p:nvSpPr>
-          <p:cNvPr id="3" name="Content Placeholder 2"/>
-          <p:cNvSpPr>
-            <a:spLocks noGrp="1"/>
-          </p:cNvSpPr>
-          <p:nvPr>
-            <p:ph idx="1"/>
+              <a:t>First: What Is a Quantile? (you already know one)</a:t>
+            </a:r>
+          </a:p>
+        </p:txBody>
+      </p:sp>
+      <p:pic>
+        <p:nvPicPr>
+          <p:cNvPr descr="t_tests_lecture_files/figure-pptx/quantile-boxplot-1.png" id="0" name="Picture 1"/>
+          <p:cNvPicPr>
+            <a:picLocks noGrp="1" noChangeAspect="1"/>
+          </p:cNvPicPr>
+          <p:nvPr/>
+        </p:nvPicPr>
+        <p:blipFill>
+          <a:blip r:embed="rId2"/>
+          <a:stretch>
+            <a:fillRect/>
+          </a:stretch>
+        </p:blipFill>
+        <p:spPr bwMode="auto">
+          <a:xfrm>
+            <a:off x="0" y="1270000"/>
+            <a:ext cx="4191000" cy="2578100"/>
+          </a:xfrm>
+          <a:prstGeom prst="rect">
+            <a:avLst/>
+          </a:prstGeom>
+          <a:noFill/>
+          <a:ln w="9525">
+            <a:noFill/>
+            <a:headEnd/>
+            <a:tailEnd/>
+          </a:ln>
+        </p:spPr>
+      </p:pic>
+      <p:sp>
+        <p:nvSpPr>
+          <p:cNvPr id="4" name="Content Placeholder 3"/>
+          <p:cNvSpPr>
+            <a:spLocks noGrp="1"/>
+          </p:cNvSpPr>
+          <p:nvPr>
+            <p:ph idx="2" sz="half"/>
           </p:nvPr>
         </p:nvSpPr>
         <p:spPr/>
@@ -5620,8 +4400,16 @@
               <a:buNone/>
             </a:pPr>
             <a:r>
+              <a:rPr/>
+              <a:t>A </a:t>
+            </a:r>
+            <a:r>
               <a:rPr b="1"/>
-              <a:t>🛑 Do Activity Parts 1–2 now</a:t>
+              <a:t>quantile</a:t>
+            </a:r>
+            <a:r>
+              <a:rPr/>
+              <a:t> is a value that a certain percent of the data falls below.</a:t>
             </a:r>
           </a:p>
           <a:p>
@@ -5630,7 +4418,65 @@
             </a:pPr>
             <a:r>
               <a:rPr/>
-              <a:t>Load the data and recompute the group means, SD, and SE. Predict each output, type it, run it.</a:t>
+              <a:t>The box plot already shows three of them:</a:t>
+            </a:r>
+          </a:p>
+          <a:p>
+            <a:pPr lvl="0"/>
+            <a:r>
+              <a:rPr b="1"/>
+              <a:t>Q1</a:t>
+            </a:r>
+            <a:r>
+              <a:rPr/>
+              <a:t> (25th percentile) — bottom of the box</a:t>
+            </a:r>
+          </a:p>
+          <a:p>
+            <a:pPr lvl="0"/>
+            <a:r>
+              <a:rPr b="1"/>
+              <a:t>Median</a:t>
+            </a:r>
+            <a:r>
+              <a:rPr/>
+              <a:t> (50th) — the line in the middle</a:t>
+            </a:r>
+          </a:p>
+          <a:p>
+            <a:pPr lvl="0"/>
+            <a:r>
+              <a:rPr b="1"/>
+              <a:t>Q3</a:t>
+            </a:r>
+            <a:r>
+              <a:rPr/>
+              <a:t> (75th) — top of the box</a:t>
+            </a:r>
+          </a:p>
+          <a:p>
+            <a:pPr lvl="0" indent="0" marL="0">
+              <a:buNone/>
+            </a:pPr>
+            <a:r>
+              <a:rPr/>
+              <a:t>A QQ plot uses </a:t>
+            </a:r>
+            <a:r>
+              <a:rPr b="1"/>
+              <a:t>every</a:t>
+            </a:r>
+            <a:r>
+              <a:rPr/>
+              <a:t> leaf as a quantile, not just three — and asks whether they are spaced the way a </a:t>
+            </a:r>
+            <a:r>
+              <a:rPr b="1"/>
+              <a:t>normal</a:t>
+            </a:r>
+            <a:r>
+              <a:rPr/>
+              <a:t> (bell-curve) distribution would space them.</a:t>
             </a:r>
           </a:p>
         </p:txBody>
@@ -5670,8 +4516,11 @@
         <p:spPr>
           <a:xfrm>
             <a:off x="0" y="0"/>
-            <a:ext cx="9144000" cy="582780"/>
+            <a:ext cx="9144000" cy="602780"/>
           </a:xfrm>
+          <a:solidFill>
+            <a:srgbClr val="1A1A2E"/>
+          </a:solidFill>
         </p:spPr>
         <p:txBody>
           <a:bodyPr/>
@@ -5682,19 +4531,49 @@
             </a:pPr>
             <a:r>
               <a:rPr/>
-              <a:t>🧩 Chunk 2 of 2 · Steps 1–3: Hypotheses &amp; Assumptions</a:t>
-            </a:r>
-          </a:p>
-        </p:txBody>
-      </p:sp>
-      <p:sp>
-        <p:nvSpPr>
-          <p:cNvPr id="3" name="Content Placeholder 2"/>
-          <p:cNvSpPr>
-            <a:spLocks noGrp="1"/>
-          </p:cNvSpPr>
-          <p:nvPr>
-            <p:ph idx="1"/>
+              <a:t>How a QQ Plot Works</a:t>
+            </a:r>
+          </a:p>
+        </p:txBody>
+      </p:sp>
+      <p:pic>
+        <p:nvPicPr>
+          <p:cNvPr descr="t_tests_lecture_files/figure-pptx/qq-explain-1.png" id="0" name="Picture 1"/>
+          <p:cNvPicPr>
+            <a:picLocks noGrp="1" noChangeAspect="1"/>
+          </p:cNvPicPr>
+          <p:nvPr/>
+        </p:nvPicPr>
+        <p:blipFill>
+          <a:blip r:embed="rId2"/>
+          <a:stretch>
+            <a:fillRect/>
+          </a:stretch>
+        </p:blipFill>
+        <p:spPr bwMode="auto">
+          <a:xfrm>
+            <a:off x="0" y="1206500"/>
+            <a:ext cx="4191000" cy="2705100"/>
+          </a:xfrm>
+          <a:prstGeom prst="rect">
+            <a:avLst/>
+          </a:prstGeom>
+          <a:noFill/>
+          <a:ln w="9525">
+            <a:noFill/>
+            <a:headEnd/>
+            <a:tailEnd/>
+          </a:ln>
+        </p:spPr>
+      </p:pic>
+      <p:sp>
+        <p:nvSpPr>
+          <p:cNvPr id="4" name="Content Placeholder 3"/>
+          <p:cNvSpPr>
+            <a:spLocks noGrp="1"/>
+          </p:cNvSpPr>
+          <p:nvPr>
+            <p:ph idx="2" sz="half"/>
           </p:nvPr>
         </p:nvSpPr>
         <p:spPr/>
@@ -5707,11 +4586,62 @@
             </a:pPr>
             <a:r>
               <a:rPr b="1"/>
-              <a:t>We will cover:</a:t>
-            </a:r>
-            <a:r>
-              <a:rPr/>
-              <a:t> stating H₀ / Hₐ formally, checking normality (histogram + Shapiro-Wilk), and checking equal variance (Levene’s).</a:t>
+              <a:t>What R does for you:</a:t>
+            </a:r>
+          </a:p>
+          <a:p>
+            <a:pPr lvl="0" indent="-342900" marL="342900">
+              <a:buAutoNum type="arabicPeriod"/>
+            </a:pPr>
+            <a:r>
+              <a:rPr b="1"/>
+              <a:t>Sorts</a:t>
+            </a:r>
+            <a:r>
+              <a:rPr/>
+              <a:t> the leaves from lightest to heaviest (the y-axis)</a:t>
+            </a:r>
+          </a:p>
+          <a:p>
+            <a:pPr lvl="0" indent="-342900" marL="342900">
+              <a:buAutoNum type="arabicPeriod"/>
+            </a:pPr>
+            <a:r>
+              <a:rPr/>
+              <a:t>Works out where each leaf </a:t>
+            </a:r>
+            <a:r>
+              <a:rPr b="1"/>
+              <a:t>would</a:t>
+            </a:r>
+            <a:r>
+              <a:rPr/>
+              <a:t> sit if the data were perfectly </a:t>
+            </a:r>
+            <a:r>
+              <a:rPr b="1"/>
+              <a:t>normal</a:t>
+            </a:r>
+            <a:r>
+              <a:rPr/>
+              <a:t> (the x-axis, in SD units: −2 … 0 … +2)</a:t>
+            </a:r>
+          </a:p>
+          <a:p>
+            <a:pPr lvl="0" indent="-342900" marL="342900">
+              <a:buAutoNum type="arabicPeriod"/>
+            </a:pPr>
+            <a:r>
+              <a:rPr/>
+              <a:t>Plots </a:t>
+            </a:r>
+            <a:r>
+              <a:rPr b="1"/>
+              <a:t>actual vs. expected</a:t>
+            </a:r>
+            <a:r>
+              <a:rPr/>
+              <a:t> — one dot per leaf</a:t>
             </a:r>
           </a:p>
           <a:p>
@@ -5720,11 +4650,49 @@
             </a:pPr>
             <a:r>
               <a:rPr b="1"/>
-              <a:t>🛑 After this chunk: Activity Parts 3–6</a:t>
-            </a:r>
-            <a:r>
-              <a:rPr/>
-              <a:t> (hypotheses, histogram, Shapiro-Wilk, Levene’s).</a:t>
+              <a:t>Straight line = normal.</a:t>
+            </a:r>
+          </a:p>
+          <a:p>
+            <a:pPr lvl="0" indent="0" marL="0">
+              <a:buNone/>
+            </a:pPr>
+            <a:r>
+              <a:rPr/>
+              <a:t>The dashed lines connect the </a:t>
+            </a:r>
+            <a:r>
+              <a:rPr b="1"/>
+              <a:t>box plot’s</a:t>
+            </a:r>
+            <a:r>
+              <a:rPr/>
+              <a:t> Q1, median, and Q3 to the same leaves on the QQ plot. The middle half of the dots is the box.</a:t>
+            </a:r>
+          </a:p>
+          <a:p>
+            <a:pPr lvl="0" indent="0" marL="0">
+              <a:buNone/>
+            </a:pPr>
+            <a:r>
+              <a:rPr/>
+              <a:t>Here the heaviest few shady leaves </a:t>
+            </a:r>
+            <a:r>
+              <a:rPr b="1"/>
+              <a:t>bend up</a:t>
+            </a:r>
+            <a:r>
+              <a:rPr/>
+              <a:t> above the line — a </a:t>
+            </a:r>
+            <a:r>
+              <a:rPr b="1"/>
+              <a:t>long right tail</a:t>
+            </a:r>
+            <a:r>
+              <a:rPr/>
+              <a:t>.</a:t>
             </a:r>
           </a:p>
         </p:txBody>
@@ -5779,285 +4747,41 @@
             </a:pPr>
             <a:r>
               <a:rPr/>
-              <a:t>Step 1 — Hypotheses (Formal)</a:t>
-            </a:r>
-          </a:p>
-        </p:txBody>
-      </p:sp>
-      <mc:AlternateContent xmlns:mc="http://schemas.openxmlformats.org/markup-compatibility/2006">
-        <mc:Choice xmlns:a14="http://schemas.microsoft.com/office/drawing/2010/main" Requires="a14">
-          <p:sp>
-            <p:nvSpPr>
-              <p:cNvPr id="3" name="Content Placeholder 2"/>
-              <p:cNvSpPr>
-                <a:spLocks noGrp="1"/>
-              </p:cNvSpPr>
-              <p:nvPr>
-                <p:ph idx="1" sz="half"/>
-              </p:nvPr>
-            </p:nvSpPr>
-            <p:spPr/>
-            <p:txBody>
-              <a:bodyPr/>
-              <a:lstStyle/>
-              <a:p>
-                <a:pPr lvl="0" indent="0" marL="0">
-                  <a:buNone/>
-                </a:pPr>
-                <a:r>
-                  <a:rPr b="1"/>
-                  <a:t>Null hypothesis:</a:t>
-                </a:r>
-              </a:p>
-              <a:p>
-                <a:pPr lvl="0" indent="0" marL="0">
-                  <a:buNone/>
-                </a:pPr>
-                <a14:m>
-                  <m:oMathPara xmlns:m="http://schemas.openxmlformats.org/officeDocument/2006/math">
-                    <m:oMathParaPr>
-                      <m:jc m:val="center"/>
-                    </m:oMathParaPr>
-                    <m:oMath>
-                      <m:sSub>
-                        <m:e>
-                          <m:r>
-                            <m:t>H</m:t>
-                          </m:r>
-                        </m:e>
-                        <m:sub>
-                          <m:r>
-                            <m:t>0</m:t>
-                          </m:r>
-                        </m:sub>
-                      </m:sSub>
-                      <m:r>
-                        <m:rPr>
-                          <m:sty m:val="p"/>
-                        </m:rPr>
-                        <m:t>:</m:t>
-                      </m:r>
-                      <m:sSub>
-                        <m:e>
-                          <m:r>
-                            <m:t>μ</m:t>
-                          </m:r>
-                        </m:e>
-                        <m:sub>
-                          <m:r>
-                            <m:t>s</m:t>
-                          </m:r>
-                          <m:r>
-                            <m:t>h</m:t>
-                          </m:r>
-                          <m:r>
-                            <m:t>a</m:t>
-                          </m:r>
-                          <m:r>
-                            <m:t>d</m:t>
-                          </m:r>
-                          <m:r>
-                            <m:t>y</m:t>
-                          </m:r>
-                        </m:sub>
-                      </m:sSub>
-                      <m:r>
-                        <m:rPr>
-                          <m:sty m:val="p"/>
-                        </m:rPr>
-                        <m:t>=</m:t>
-                      </m:r>
-                      <m:sSub>
-                        <m:e>
-                          <m:r>
-                            <m:t>μ</m:t>
-                          </m:r>
-                        </m:e>
-                        <m:sub>
-                          <m:r>
-                            <m:t>s</m:t>
-                          </m:r>
-                          <m:r>
-                            <m:t>u</m:t>
-                          </m:r>
-                          <m:r>
-                            <m:t>n</m:t>
-                          </m:r>
-                          <m:r>
-                            <m:t>n</m:t>
-                          </m:r>
-                          <m:r>
-                            <m:t>y</m:t>
-                          </m:r>
-                        </m:sub>
-                      </m:sSub>
-                    </m:oMath>
-                  </m:oMathPara>
-                </a14:m>
-              </a:p>
-              <a:p>
-                <a:pPr lvl="0" indent="0" marL="0">
-                  <a:buNone/>
-                </a:pPr>
-                <a:r>
-                  <a:rPr/>
-                  <a:t>Shady and sunny leaves have the </a:t>
-                </a:r>
-                <a:r>
-                  <a:rPr b="1"/>
-                  <a:t>same mean mass</a:t>
-                </a:r>
-                <a:r>
-                  <a:rPr/>
-                  <a:t> in the population.</a:t>
-                </a:r>
-              </a:p>
-              <a:p>
-                <a:pPr lvl="0" indent="0" marL="0">
-                  <a:buNone/>
-                </a:pPr>
-                <a:r>
-                  <a:rPr b="1"/>
-                  <a:t>Alternate hypothesis (two-tailed):</a:t>
-                </a:r>
-              </a:p>
-              <a:p>
-                <a:pPr lvl="0" indent="0" marL="0">
-                  <a:buNone/>
-                </a:pPr>
-                <a14:m>
-                  <m:oMathPara xmlns:m="http://schemas.openxmlformats.org/officeDocument/2006/math">
-                    <m:oMathParaPr>
-                      <m:jc m:val="center"/>
-                    </m:oMathParaPr>
-                    <m:oMath>
-                      <m:sSub>
-                        <m:e>
-                          <m:r>
-                            <m:t>H</m:t>
-                          </m:r>
-                        </m:e>
-                        <m:sub>
-                          <m:r>
-                            <m:t>A</m:t>
-                          </m:r>
-                        </m:sub>
-                      </m:sSub>
-                      <m:r>
-                        <m:rPr>
-                          <m:sty m:val="p"/>
-                        </m:rPr>
-                        <m:t>:</m:t>
-                      </m:r>
-                      <m:sSub>
-                        <m:e>
-                          <m:r>
-                            <m:t>μ</m:t>
-                          </m:r>
-                        </m:e>
-                        <m:sub>
-                          <m:r>
-                            <m:t>s</m:t>
-                          </m:r>
-                          <m:r>
-                            <m:t>h</m:t>
-                          </m:r>
-                          <m:r>
-                            <m:t>a</m:t>
-                          </m:r>
-                          <m:r>
-                            <m:t>d</m:t>
-                          </m:r>
-                          <m:r>
-                            <m:t>y</m:t>
-                          </m:r>
-                        </m:sub>
-                      </m:sSub>
-                      <m:r>
-                        <m:rPr>
-                          <m:sty m:val="p"/>
-                        </m:rPr>
-                        <m:t>≠</m:t>
-                      </m:r>
-                      <m:sSub>
-                        <m:e>
-                          <m:r>
-                            <m:t>μ</m:t>
-                          </m:r>
-                        </m:e>
-                        <m:sub>
-                          <m:r>
-                            <m:t>s</m:t>
-                          </m:r>
-                          <m:r>
-                            <m:t>u</m:t>
-                          </m:r>
-                          <m:r>
-                            <m:t>n</m:t>
-                          </m:r>
-                          <m:r>
-                            <m:t>n</m:t>
-                          </m:r>
-                          <m:r>
-                            <m:t>y</m:t>
-                          </m:r>
-                        </m:sub>
-                      </m:sSub>
-                    </m:oMath>
-                  </m:oMathPara>
-                </a14:m>
-              </a:p>
-              <a:p>
-                <a:pPr lvl="0" indent="0" marL="0">
-                  <a:buNone/>
-                </a:pPr>
-                <a:r>
-                  <a:rPr/>
-                  <a:t>The mean leaf masses </a:t>
-                </a:r>
-                <a:r>
-                  <a:rPr b="1"/>
-                  <a:t>differ</a:t>
-                </a:r>
-                <a:r>
-                  <a:rPr/>
-                  <a:t> between sides — in either direction.</a:t>
-                </a:r>
-              </a:p>
-              <a:p>
-                <a:pPr lvl="0" indent="0" marL="0">
-                  <a:buNone/>
-                </a:pPr>
-                <a:r>
-                  <a:rPr b="1"/>
-                  <a:t>Significance level:</a:t>
-                </a:r>
-                <a:r>
-                  <a:rPr/>
-                  <a:t> α = 0.05</a:t>
-                </a:r>
-              </a:p>
-              <a:p>
-                <a:pPr lvl="0" indent="0" marL="0">
-                  <a:buNone/>
-                </a:pPr>
-                <a:r>
-                  <a:rPr/>
-                  <a:t>We will reject H₀ if </a:t>
-                </a:r>
-                <a:r>
-                  <a:rPr i="1"/>
-                  <a:t>p</a:t>
-                </a:r>
-                <a:r>
-                  <a:rPr/>
-                  <a:t> &lt; 0.05.</a:t>
-                </a:r>
-              </a:p>
-            </p:txBody>
-          </p:sp>
-        </mc:Choice>
-      </mc:AlternateContent>
+              <a:t>What Good and Bad QQ Plots Look Like</a:t>
+            </a:r>
+          </a:p>
+        </p:txBody>
+      </p:sp>
+      <p:pic>
+        <p:nvPicPr>
+          <p:cNvPr descr="t_tests_lecture_files/figure-pptx/qq-examples-1.png" id="0" name="Picture 1"/>
+          <p:cNvPicPr>
+            <a:picLocks noGrp="1" noChangeAspect="1"/>
+          </p:cNvPicPr>
+          <p:nvPr/>
+        </p:nvPicPr>
+        <p:blipFill>
+          <a:blip r:embed="rId2"/>
+          <a:stretch>
+            <a:fillRect/>
+          </a:stretch>
+        </p:blipFill>
+        <p:spPr bwMode="auto">
+          <a:xfrm>
+            <a:off x="0" y="1257300"/>
+            <a:ext cx="4191000" cy="2616200"/>
+          </a:xfrm>
+          <a:prstGeom prst="rect">
+            <a:avLst/>
+          </a:prstGeom>
+          <a:noFill/>
+          <a:ln w="9525">
+            <a:noFill/>
+            <a:headEnd/>
+            <a:tailEnd/>
+          </a:ln>
+        </p:spPr>
+      </p:pic>
       <p:sp>
         <p:nvSpPr>
           <p:cNvPr id="4" name="Content Placeholder 3"/>
@@ -6077,29 +4801,57 @@
               <a:buNone/>
             </a:pPr>
             <a:r>
+              <a:rPr/>
+              <a:t>Made-up data, 30 values each. </a:t>
+            </a:r>
+            <a:r>
               <a:rPr b="1"/>
-              <a:t>Why state hypotheses first?</a:t>
+              <a:t>Top:</a:t>
+            </a:r>
+            <a:r>
+              <a:rPr/>
+              <a:t> histogram. </a:t>
+            </a:r>
+            <a:r>
+              <a:rPr b="1"/>
+              <a:t>Bottom:</a:t>
+            </a:r>
+            <a:r>
+              <a:rPr/>
+              <a:t> QQ plot of the same values.</a:t>
             </a:r>
           </a:p>
           <a:p>
             <a:pPr lvl="0"/>
             <a:r>
-              <a:rPr/>
-              <a:t>Keeps the analysis honest</a:t>
+              <a:rPr b="1"/>
+              <a:t>Normal:</a:t>
+            </a:r>
+            <a:r>
+              <a:rPr/>
+              <a:t> dots hug the line</a:t>
             </a:r>
           </a:p>
           <a:p>
             <a:pPr lvl="0"/>
             <a:r>
-              <a:rPr/>
-              <a:t>Prevents “HARKing” (Hypothesizing After Results are Known)</a:t>
+              <a:rPr b="1"/>
+              <a:t>Skewed:</a:t>
+            </a:r>
+            <a:r>
+              <a:rPr/>
+              <a:t> dots curve away at one end (a banana shape)</a:t>
             </a:r>
           </a:p>
           <a:p>
             <a:pPr lvl="0"/>
             <a:r>
-              <a:rPr/>
-              <a:t>Forces you to commit to a direction (one-tailed) or not (two-tailed) before seeing the data</a:t>
+              <a:rPr b="1"/>
+              <a:t>Outliers:</a:t>
+            </a:r>
+            <a:r>
+              <a:rPr/>
+              <a:t> a few dots jump off the line at an end</a:t>
             </a:r>
           </a:p>
           <a:p>
@@ -6107,12 +4859,16 @@
               <a:buNone/>
             </a:pPr>
             <a:r>
+              <a:rPr/>
+              <a:t>A little wiggle at the very ends is fine — look for a </a:t>
+            </a:r>
+            <a:r>
               <a:rPr b="1"/>
-              <a:t>Our commitment:</a:t>
-            </a:r>
-            <a:r>
-              <a:rPr/>
-              <a:t> two-tailed, α = 0.05, before running any test.</a:t>
+              <a:t>clear bend</a:t>
+            </a:r>
+            <a:r>
+              <a:rPr/>
+              <a:t>.</a:t>
             </a:r>
           </a:p>
         </p:txBody>
@@ -6164,7 +4920,7 @@
             </a:pPr>
             <a:r>
               <a:rPr/>
-              <a:t>Step 2 — Check Normality: Histogram</a:t>
+              <a:t>Step 2 — Normality: Our QQ Plots</a:t>
             </a:r>
           </a:p>
         </p:txBody>
@@ -6194,7 +4950,7 @@
                 </a:solidFill>
                 <a:latin typeface="Courier"/>
               </a:rPr>
-              <a:t># Histogram per group to visually check normality -------</a:t>
+              <a:t># QQ plot per group — dots should follow the line -------</a:t>
             </a:r>
             <a:br/>
             <a:r>
@@ -6204,7 +4960,7 @@
                 </a:solidFill>
                 <a:latin typeface="Courier"/>
               </a:rPr>
-              <a:t>hist_norm_plot &lt;- leaf_df </a:t>
+              <a:t>qq_plot &lt;- leaf_df </a:t>
             </a:r>
             <a:r>
               <a:rPr>
@@ -6268,6 +5024,244 @@
                 </a:solidFill>
                 <a:latin typeface="Courier"/>
               </a:rPr>
+              <a:t>sample =</a:t>
+            </a:r>
+            <a:r>
+              <a:rPr>
+                <a:solidFill>
+                  <a:srgbClr val="003B4F"/>
+                </a:solidFill>
+                <a:latin typeface="Courier"/>
+              </a:rPr>
+              <a:t> mass_g, </a:t>
+            </a:r>
+            <a:r>
+              <a:rPr>
+                <a:solidFill>
+                  <a:srgbClr val="657422"/>
+                </a:solidFill>
+                <a:latin typeface="Courier"/>
+              </a:rPr>
+              <a:t>color =</a:t>
+            </a:r>
+            <a:r>
+              <a:rPr>
+                <a:solidFill>
+                  <a:srgbClr val="003B4F"/>
+                </a:solidFill>
+                <a:latin typeface="Courier"/>
+              </a:rPr>
+              <a:t> shade)) </a:t>
+            </a:r>
+            <a:r>
+              <a:rPr>
+                <a:solidFill>
+                  <a:srgbClr val="5E5E5E"/>
+                </a:solidFill>
+                <a:latin typeface="Courier"/>
+              </a:rPr>
+              <a:t>+</a:t>
+            </a:r>
+            <a:br/>
+            <a:r>
+              <a:rPr>
+                <a:solidFill>
+                  <a:srgbClr val="003B4F"/>
+                </a:solidFill>
+                <a:latin typeface="Courier"/>
+              </a:rPr>
+              <a:t>  </a:t>
+            </a:r>
+            <a:r>
+              <a:rPr>
+                <a:solidFill>
+                  <a:srgbClr val="4758AB"/>
+                </a:solidFill>
+                <a:latin typeface="Courier"/>
+              </a:rPr>
+              <a:t>stat_qq</a:t>
+            </a:r>
+            <a:r>
+              <a:rPr>
+                <a:solidFill>
+                  <a:srgbClr val="003B4F"/>
+                </a:solidFill>
+                <a:latin typeface="Courier"/>
+              </a:rPr>
+              <a:t>() </a:t>
+            </a:r>
+            <a:r>
+              <a:rPr>
+                <a:solidFill>
+                  <a:srgbClr val="5E5E5E"/>
+                </a:solidFill>
+                <a:latin typeface="Courier"/>
+              </a:rPr>
+              <a:t>+</a:t>
+            </a:r>
+            <a:br/>
+            <a:r>
+              <a:rPr>
+                <a:solidFill>
+                  <a:srgbClr val="003B4F"/>
+                </a:solidFill>
+                <a:latin typeface="Courier"/>
+              </a:rPr>
+              <a:t>  </a:t>
+            </a:r>
+            <a:r>
+              <a:rPr>
+                <a:solidFill>
+                  <a:srgbClr val="4758AB"/>
+                </a:solidFill>
+                <a:latin typeface="Courier"/>
+              </a:rPr>
+              <a:t>stat_qq_line</a:t>
+            </a:r>
+            <a:r>
+              <a:rPr>
+                <a:solidFill>
+                  <a:srgbClr val="003B4F"/>
+                </a:solidFill>
+                <a:latin typeface="Courier"/>
+              </a:rPr>
+              <a:t>(</a:t>
+            </a:r>
+            <a:r>
+              <a:rPr>
+                <a:solidFill>
+                  <a:srgbClr val="657422"/>
+                </a:solidFill>
+                <a:latin typeface="Courier"/>
+              </a:rPr>
+              <a:t>color =</a:t>
+            </a:r>
+            <a:r>
+              <a:rPr>
+                <a:solidFill>
+                  <a:srgbClr val="003B4F"/>
+                </a:solidFill>
+                <a:latin typeface="Courier"/>
+              </a:rPr>
+              <a:t> </a:t>
+            </a:r>
+            <a:r>
+              <a:rPr>
+                <a:solidFill>
+                  <a:srgbClr val="20794D"/>
+                </a:solidFill>
+                <a:latin typeface="Courier"/>
+              </a:rPr>
+              <a:t>"black"</a:t>
+            </a:r>
+            <a:r>
+              <a:rPr>
+                <a:solidFill>
+                  <a:srgbClr val="003B4F"/>
+                </a:solidFill>
+                <a:latin typeface="Courier"/>
+              </a:rPr>
+              <a:t>) </a:t>
+            </a:r>
+            <a:r>
+              <a:rPr>
+                <a:solidFill>
+                  <a:srgbClr val="5E5E5E"/>
+                </a:solidFill>
+                <a:latin typeface="Courier"/>
+              </a:rPr>
+              <a:t>+</a:t>
+            </a:r>
+            <a:br/>
+            <a:r>
+              <a:rPr>
+                <a:solidFill>
+                  <a:srgbClr val="003B4F"/>
+                </a:solidFill>
+                <a:latin typeface="Courier"/>
+              </a:rPr>
+              <a:t>  </a:t>
+            </a:r>
+            <a:r>
+              <a:rPr>
+                <a:solidFill>
+                  <a:srgbClr val="4758AB"/>
+                </a:solidFill>
+                <a:latin typeface="Courier"/>
+              </a:rPr>
+              <a:t>facet_wrap</a:t>
+            </a:r>
+            <a:r>
+              <a:rPr>
+                <a:solidFill>
+                  <a:srgbClr val="003B4F"/>
+                </a:solidFill>
+                <a:latin typeface="Courier"/>
+              </a:rPr>
+              <a:t>(</a:t>
+            </a:r>
+            <a:r>
+              <a:rPr>
+                <a:solidFill>
+                  <a:srgbClr val="5E5E5E"/>
+                </a:solidFill>
+                <a:latin typeface="Courier"/>
+              </a:rPr>
+              <a:t>~</a:t>
+            </a:r>
+            <a:r>
+              <a:rPr>
+                <a:solidFill>
+                  <a:srgbClr val="003B4F"/>
+                </a:solidFill>
+                <a:latin typeface="Courier"/>
+              </a:rPr>
+              <a:t>shade) </a:t>
+            </a:r>
+            <a:r>
+              <a:rPr>
+                <a:solidFill>
+                  <a:srgbClr val="5E5E5E"/>
+                </a:solidFill>
+                <a:latin typeface="Courier"/>
+              </a:rPr>
+              <a:t>+</a:t>
+            </a:r>
+            <a:br/>
+            <a:r>
+              <a:rPr>
+                <a:solidFill>
+                  <a:srgbClr val="003B4F"/>
+                </a:solidFill>
+                <a:latin typeface="Courier"/>
+              </a:rPr>
+              <a:t>  </a:t>
+            </a:r>
+            <a:r>
+              <a:rPr>
+                <a:solidFill>
+                  <a:srgbClr val="4758AB"/>
+                </a:solidFill>
+                <a:latin typeface="Courier"/>
+              </a:rPr>
+              <a:t>labs</a:t>
+            </a:r>
+            <a:r>
+              <a:rPr>
+                <a:solidFill>
+                  <a:srgbClr val="003B4F"/>
+                </a:solidFill>
+                <a:latin typeface="Courier"/>
+              </a:rPr>
+              <a:t>(</a:t>
+            </a:r>
+            <a:r>
+              <a:rPr>
+                <a:solidFill>
+                  <a:srgbClr val="657422"/>
+                </a:solidFill>
+                <a:latin typeface="Courier"/>
+              </a:rPr>
               <a:t>x =</a:t>
             </a:r>
             <a:r>
@@ -6277,7 +5271,35 @@
                 </a:solidFill>
                 <a:latin typeface="Courier"/>
               </a:rPr>
-              <a:t> mass_g, </a:t>
+              <a:t> </a:t>
+            </a:r>
+            <a:r>
+              <a:rPr>
+                <a:solidFill>
+                  <a:srgbClr val="20794D"/>
+                </a:solidFill>
+                <a:latin typeface="Courier"/>
+              </a:rPr>
+              <a:t>"Theoretical Quantiles"</a:t>
+            </a:r>
+            <a:r>
+              <a:rPr>
+                <a:solidFill>
+                  <a:srgbClr val="003B4F"/>
+                </a:solidFill>
+                <a:latin typeface="Courier"/>
+              </a:rPr>
+              <a:t>,</a:t>
+            </a:r>
+            <a:br/>
+            <a:r>
+              <a:rPr>
+                <a:solidFill>
+                  <a:srgbClr val="003B4F"/>
+                </a:solidFill>
+                <a:latin typeface="Courier"/>
+              </a:rPr>
+              <a:t>       </a:t>
             </a:r>
             <a:r>
               <a:rPr>
@@ -6286,16 +5308,34 @@
                 </a:solidFill>
                 <a:latin typeface="Courier"/>
               </a:rPr>
-              <a:t>fill =</a:t>
-            </a:r>
-            <a:r>
-              <a:rPr>
-                <a:solidFill>
-                  <a:srgbClr val="003B4F"/>
-                </a:solidFill>
-                <a:latin typeface="Courier"/>
-              </a:rPr>
-              <a:t> shade)) </a:t>
+              <a:t>y =</a:t>
+            </a:r>
+            <a:r>
+              <a:rPr>
+                <a:solidFill>
+                  <a:srgbClr val="003B4F"/>
+                </a:solidFill>
+                <a:latin typeface="Courier"/>
+              </a:rPr>
+              <a:t> </a:t>
+            </a:r>
+            <a:r>
+              <a:rPr>
+                <a:solidFill>
+                  <a:srgbClr val="20794D"/>
+                </a:solidFill>
+                <a:latin typeface="Courier"/>
+              </a:rPr>
+              <a:t>"Leaf Mass (g)"</a:t>
+            </a:r>
+            <a:r>
+              <a:rPr>
+                <a:solidFill>
+                  <a:srgbClr val="003B4F"/>
+                </a:solidFill>
+                <a:latin typeface="Courier"/>
+              </a:rPr>
+              <a:t>) </a:t>
             </a:r>
             <a:r>
               <a:rPr>
@@ -6323,7 +5363,44 @@
                 </a:solidFill>
                 <a:latin typeface="Courier"/>
               </a:rPr>
-              <a:t>geom_histogram</a:t>
+              <a:t>theme_minimal</a:t>
+            </a:r>
+            <a:r>
+              <a:rPr>
+                <a:solidFill>
+                  <a:srgbClr val="003B4F"/>
+                </a:solidFill>
+                <a:latin typeface="Courier"/>
+              </a:rPr>
+              <a:t>() </a:t>
+            </a:r>
+            <a:r>
+              <a:rPr>
+                <a:solidFill>
+                  <a:srgbClr val="5E5E5E"/>
+                </a:solidFill>
+                <a:latin typeface="Courier"/>
+              </a:rPr>
+              <a:t>+</a:t>
+            </a:r>
+            <a:br/>
+            <a:r>
+              <a:rPr>
+                <a:solidFill>
+                  <a:srgbClr val="003B4F"/>
+                </a:solidFill>
+                <a:latin typeface="Courier"/>
+              </a:rPr>
+              <a:t>  </a:t>
+            </a:r>
+            <a:r>
+              <a:rPr>
+                <a:solidFill>
+                  <a:srgbClr val="4758AB"/>
+                </a:solidFill>
+                <a:latin typeface="Courier"/>
+              </a:rPr>
+              <a:t>theme</a:t>
             </a:r>
             <a:r>
               <a:rPr>
@@ -6341,7 +5418,7 @@
                 </a:solidFill>
                 <a:latin typeface="Courier"/>
               </a:rPr>
-              <a:t>binwidth =</a:t>
+              <a:t>legend.position =</a:t>
             </a:r>
             <a:r>
               <a:rPr>
@@ -6355,101 +5432,20 @@
             <a:r>
               <a:rPr>
                 <a:solidFill>
-                  <a:srgbClr val="AD0000"/>
-                </a:solidFill>
-                <a:latin typeface="Courier"/>
-              </a:rPr>
-              <a:t>0.05</a:t>
-            </a:r>
-            <a:r>
-              <a:rPr>
-                <a:solidFill>
-                  <a:srgbClr val="003B4F"/>
-                </a:solidFill>
-                <a:latin typeface="Courier"/>
-              </a:rPr>
-              <a:t>, </a:t>
-            </a:r>
-            <a:r>
-              <a:rPr>
-                <a:solidFill>
-                  <a:srgbClr val="657422"/>
-                </a:solidFill>
-                <a:latin typeface="Courier"/>
-              </a:rPr>
-              <a:t>color =</a:t>
-            </a:r>
-            <a:r>
-              <a:rPr>
-                <a:solidFill>
-                  <a:srgbClr val="003B4F"/>
-                </a:solidFill>
-                <a:latin typeface="Courier"/>
-              </a:rPr>
-              <a:t> </a:t>
-            </a:r>
-            <a:r>
-              <a:rPr>
-                <a:solidFill>
                   <a:srgbClr val="20794D"/>
                 </a:solidFill>
                 <a:latin typeface="Courier"/>
               </a:rPr>
-              <a:t>"white"</a:t>
-            </a:r>
-            <a:r>
-              <a:rPr>
-                <a:solidFill>
-                  <a:srgbClr val="003B4F"/>
-                </a:solidFill>
-                <a:latin typeface="Courier"/>
-              </a:rPr>
-              <a:t>, </a:t>
-            </a:r>
-            <a:r>
-              <a:rPr>
-                <a:solidFill>
-                  <a:srgbClr val="657422"/>
-                </a:solidFill>
-                <a:latin typeface="Courier"/>
-              </a:rPr>
-              <a:t>alpha =</a:t>
-            </a:r>
-            <a:r>
-              <a:rPr>
-                <a:solidFill>
-                  <a:srgbClr val="003B4F"/>
-                </a:solidFill>
-                <a:latin typeface="Courier"/>
-              </a:rPr>
-              <a:t> </a:t>
-            </a:r>
-            <a:r>
-              <a:rPr>
-                <a:solidFill>
-                  <a:srgbClr val="AD0000"/>
-                </a:solidFill>
-                <a:latin typeface="Courier"/>
-              </a:rPr>
-              <a:t>0.8</a:t>
-            </a:r>
-            <a:r>
-              <a:rPr>
-                <a:solidFill>
-                  <a:srgbClr val="003B4F"/>
-                </a:solidFill>
-                <a:latin typeface="Courier"/>
-              </a:rPr>
-              <a:t>) </a:t>
-            </a:r>
-            <a:r>
-              <a:rPr>
-                <a:solidFill>
-                  <a:srgbClr val="5E5E5E"/>
-                </a:solidFill>
-                <a:latin typeface="Courier"/>
-              </a:rPr>
-              <a:t>+</a:t>
+              <a:t>"none"</a:t>
+            </a:r>
+            <a:r>
+              <a:rPr>
+                <a:solidFill>
+                  <a:srgbClr val="003B4F"/>
+                </a:solidFill>
+                <a:latin typeface="Courier"/>
+              </a:rPr>
+              <a:t>)</a:t>
             </a:r>
             <a:br/>
             <a:r>
@@ -6459,382 +5455,14 @@
                 </a:solidFill>
                 <a:latin typeface="Courier"/>
               </a:rPr>
-              <a:t>  </a:t>
-            </a:r>
-            <a:r>
-              <a:rPr>
-                <a:solidFill>
-                  <a:srgbClr val="4758AB"/>
-                </a:solidFill>
-                <a:latin typeface="Courier"/>
-              </a:rPr>
-              <a:t>facet_wrap</a:t>
-            </a:r>
-            <a:r>
-              <a:rPr>
-                <a:solidFill>
-                  <a:srgbClr val="003B4F"/>
-                </a:solidFill>
-                <a:latin typeface="Courier"/>
-              </a:rPr>
-              <a:t>(</a:t>
-            </a:r>
-            <a:r>
-              <a:rPr>
-                <a:solidFill>
-                  <a:srgbClr val="5E5E5E"/>
-                </a:solidFill>
-                <a:latin typeface="Courier"/>
-              </a:rPr>
-              <a:t>~</a:t>
-            </a:r>
-            <a:r>
-              <a:rPr>
-                <a:solidFill>
-                  <a:srgbClr val="003B4F"/>
-                </a:solidFill>
-                <a:latin typeface="Courier"/>
-              </a:rPr>
-              <a:t>shade, </a:t>
-            </a:r>
-            <a:r>
-              <a:rPr>
-                <a:solidFill>
-                  <a:srgbClr val="657422"/>
-                </a:solidFill>
-                <a:latin typeface="Courier"/>
-              </a:rPr>
-              <a:t>ncol =</a:t>
-            </a:r>
-            <a:r>
-              <a:rPr>
-                <a:solidFill>
-                  <a:srgbClr val="003B4F"/>
-                </a:solidFill>
-                <a:latin typeface="Courier"/>
-              </a:rPr>
-              <a:t> </a:t>
-            </a:r>
-            <a:r>
-              <a:rPr>
-                <a:solidFill>
-                  <a:srgbClr val="AD0000"/>
-                </a:solidFill>
-                <a:latin typeface="Courier"/>
-              </a:rPr>
-              <a:t>2</a:t>
-            </a:r>
-            <a:r>
-              <a:rPr>
-                <a:solidFill>
-                  <a:srgbClr val="003B4F"/>
-                </a:solidFill>
-                <a:latin typeface="Courier"/>
-              </a:rPr>
-              <a:t>) </a:t>
-            </a:r>
-            <a:r>
-              <a:rPr>
-                <a:solidFill>
-                  <a:srgbClr val="5E5E5E"/>
-                </a:solidFill>
-                <a:latin typeface="Courier"/>
-              </a:rPr>
-              <a:t>+</a:t>
-            </a:r>
-            <a:br/>
-            <a:r>
-              <a:rPr>
-                <a:solidFill>
-                  <a:srgbClr val="003B4F"/>
-                </a:solidFill>
-                <a:latin typeface="Courier"/>
-              </a:rPr>
-              <a:t>  </a:t>
-            </a:r>
-            <a:r>
-              <a:rPr>
-                <a:solidFill>
-                  <a:srgbClr val="4758AB"/>
-                </a:solidFill>
-                <a:latin typeface="Courier"/>
-              </a:rPr>
-              <a:t>labs</a:t>
-            </a:r>
-            <a:r>
-              <a:rPr>
-                <a:solidFill>
-                  <a:srgbClr val="003B4F"/>
-                </a:solidFill>
-                <a:latin typeface="Courier"/>
-              </a:rPr>
-              <a:t>(</a:t>
-            </a:r>
-            <a:br/>
-            <a:r>
-              <a:rPr>
-                <a:solidFill>
-                  <a:srgbClr val="003B4F"/>
-                </a:solidFill>
-                <a:latin typeface="Courier"/>
-              </a:rPr>
-              <a:t>    </a:t>
-            </a:r>
-            <a:r>
-              <a:rPr>
-                <a:solidFill>
-                  <a:srgbClr val="657422"/>
-                </a:solidFill>
-                <a:latin typeface="Courier"/>
-              </a:rPr>
-              <a:t>title =</a:t>
-            </a:r>
-            <a:r>
-              <a:rPr>
-                <a:solidFill>
-                  <a:srgbClr val="003B4F"/>
-                </a:solidFill>
-                <a:latin typeface="Courier"/>
-              </a:rPr>
-              <a:t> </a:t>
-            </a:r>
-            <a:r>
-              <a:rPr>
-                <a:solidFill>
-                  <a:srgbClr val="20794D"/>
-                </a:solidFill>
-                <a:latin typeface="Courier"/>
-              </a:rPr>
-              <a:t>"Leaf Mass Distribution by Shade"</a:t>
-            </a:r>
-            <a:r>
-              <a:rPr>
-                <a:solidFill>
-                  <a:srgbClr val="003B4F"/>
-                </a:solidFill>
-                <a:latin typeface="Courier"/>
-              </a:rPr>
-              <a:t>,</a:t>
-            </a:r>
-            <a:br/>
-            <a:r>
-              <a:rPr>
-                <a:solidFill>
-                  <a:srgbClr val="003B4F"/>
-                </a:solidFill>
-                <a:latin typeface="Courier"/>
-              </a:rPr>
-              <a:t>    </a:t>
-            </a:r>
-            <a:r>
-              <a:rPr>
-                <a:solidFill>
-                  <a:srgbClr val="657422"/>
-                </a:solidFill>
-                <a:latin typeface="Courier"/>
-              </a:rPr>
-              <a:t>x =</a:t>
-            </a:r>
-            <a:r>
-              <a:rPr>
-                <a:solidFill>
-                  <a:srgbClr val="003B4F"/>
-                </a:solidFill>
-                <a:latin typeface="Courier"/>
-              </a:rPr>
-              <a:t> </a:t>
-            </a:r>
-            <a:r>
-              <a:rPr>
-                <a:solidFill>
-                  <a:srgbClr val="20794D"/>
-                </a:solidFill>
-                <a:latin typeface="Courier"/>
-              </a:rPr>
-              <a:t>"Leaf Mass (g)"</a:t>
-            </a:r>
-            <a:r>
-              <a:rPr>
-                <a:solidFill>
-                  <a:srgbClr val="003B4F"/>
-                </a:solidFill>
-                <a:latin typeface="Courier"/>
-              </a:rPr>
-              <a:t>,</a:t>
-            </a:r>
-            <a:br/>
-            <a:r>
-              <a:rPr>
-                <a:solidFill>
-                  <a:srgbClr val="003B4F"/>
-                </a:solidFill>
-                <a:latin typeface="Courier"/>
-              </a:rPr>
-              <a:t>    </a:t>
-            </a:r>
-            <a:r>
-              <a:rPr>
-                <a:solidFill>
-                  <a:srgbClr val="657422"/>
-                </a:solidFill>
-                <a:latin typeface="Courier"/>
-              </a:rPr>
-              <a:t>y =</a:t>
-            </a:r>
-            <a:r>
-              <a:rPr>
-                <a:solidFill>
-                  <a:srgbClr val="003B4F"/>
-                </a:solidFill>
-                <a:latin typeface="Courier"/>
-              </a:rPr>
-              <a:t> </a:t>
-            </a:r>
-            <a:r>
-              <a:rPr>
-                <a:solidFill>
-                  <a:srgbClr val="20794D"/>
-                </a:solidFill>
-                <a:latin typeface="Courier"/>
-              </a:rPr>
-              <a:t>"Count"</a:t>
-            </a:r>
-            <a:br/>
-            <a:r>
-              <a:rPr>
-                <a:solidFill>
-                  <a:srgbClr val="003B4F"/>
-                </a:solidFill>
-                <a:latin typeface="Courier"/>
-              </a:rPr>
-              <a:t>  ) </a:t>
-            </a:r>
-            <a:r>
-              <a:rPr>
-                <a:solidFill>
-                  <a:srgbClr val="5E5E5E"/>
-                </a:solidFill>
-                <a:latin typeface="Courier"/>
-              </a:rPr>
-              <a:t>+</a:t>
-            </a:r>
-            <a:br/>
-            <a:r>
-              <a:rPr>
-                <a:solidFill>
-                  <a:srgbClr val="003B4F"/>
-                </a:solidFill>
-                <a:latin typeface="Courier"/>
-              </a:rPr>
-              <a:t>  </a:t>
-            </a:r>
-            <a:r>
-              <a:rPr>
-                <a:solidFill>
-                  <a:srgbClr val="4758AB"/>
-                </a:solidFill>
-                <a:latin typeface="Courier"/>
-              </a:rPr>
-              <a:t>theme_minimal</a:t>
-            </a:r>
-            <a:r>
-              <a:rPr>
-                <a:solidFill>
-                  <a:srgbClr val="003B4F"/>
-                </a:solidFill>
-                <a:latin typeface="Courier"/>
-              </a:rPr>
-              <a:t>() </a:t>
-            </a:r>
-            <a:r>
-              <a:rPr>
-                <a:solidFill>
-                  <a:srgbClr val="5E5E5E"/>
-                </a:solidFill>
-                <a:latin typeface="Courier"/>
-              </a:rPr>
-              <a:t>+</a:t>
-            </a:r>
-            <a:br/>
-            <a:r>
-              <a:rPr>
-                <a:solidFill>
-                  <a:srgbClr val="003B4F"/>
-                </a:solidFill>
-                <a:latin typeface="Courier"/>
-              </a:rPr>
-              <a:t>  </a:t>
-            </a:r>
-            <a:r>
-              <a:rPr>
-                <a:solidFill>
-                  <a:srgbClr val="4758AB"/>
-                </a:solidFill>
-                <a:latin typeface="Courier"/>
-              </a:rPr>
-              <a:t>theme</a:t>
-            </a:r>
-            <a:r>
-              <a:rPr>
-                <a:solidFill>
-                  <a:srgbClr val="003B4F"/>
-                </a:solidFill>
-                <a:latin typeface="Courier"/>
-              </a:rPr>
-              <a:t>(</a:t>
-            </a:r>
-            <a:r>
-              <a:rPr>
-                <a:solidFill>
-                  <a:srgbClr val="657422"/>
-                </a:solidFill>
-                <a:latin typeface="Courier"/>
-              </a:rPr>
-              <a:t>legend.position =</a:t>
-            </a:r>
-            <a:r>
-              <a:rPr>
-                <a:solidFill>
-                  <a:srgbClr val="003B4F"/>
-                </a:solidFill>
-                <a:latin typeface="Courier"/>
-              </a:rPr>
-              <a:t> </a:t>
-            </a:r>
-            <a:r>
-              <a:rPr>
-                <a:solidFill>
-                  <a:srgbClr val="20794D"/>
-                </a:solidFill>
-                <a:latin typeface="Courier"/>
-              </a:rPr>
-              <a:t>"none"</a:t>
-            </a:r>
-            <a:r>
-              <a:rPr>
-                <a:solidFill>
-                  <a:srgbClr val="003B4F"/>
-                </a:solidFill>
-                <a:latin typeface="Courier"/>
-              </a:rPr>
-              <a:t>)</a:t>
-            </a:r>
-            <a:br/>
-            <a:r>
-              <a:rPr>
-                <a:solidFill>
-                  <a:srgbClr val="003B4F"/>
-                </a:solidFill>
-                <a:latin typeface="Courier"/>
-              </a:rPr>
-              <a:t>hist_norm_plot</a:t>
+              <a:t>qq_plot</a:t>
             </a:r>
           </a:p>
         </p:txBody>
       </p:sp>
       <p:pic>
         <p:nvPicPr>
-          <p:cNvPr descr="t_tests_lecture_files/figure-pptx/histogram-norm-1.png" id="0" name="Picture 1"/>
+          <p:cNvPr descr="t_tests_lecture_files/figure-pptx/qq-norm-1.png" id="0" name="Picture 1"/>
           <p:cNvPicPr>
             <a:picLocks noGrp="1" noChangeAspect="1"/>
           </p:cNvPicPr>
@@ -6882,83 +5510,111 @@
             </a:pPr>
             <a:r>
               <a:rPr b="1"/>
-              <a:t>What to look for:</a:t>
+              <a:t>New pieces:</a:t>
             </a:r>
           </a:p>
           <a:p>
             <a:pPr lvl="0"/>
             <a:r>
-              <a:rPr/>
-              <a:t>Roughly </a:t>
-            </a:r>
+              <a:rPr>
+                <a:latin typeface="Courier"/>
+              </a:rPr>
+              <a:t>aes(sample = mass_g)</a:t>
+            </a:r>
+            <a:r>
+              <a:rPr/>
+              <a:t> — a QQ plot takes </a:t>
+            </a:r>
+            <a:r>
+              <a:rPr b="1">
+                <a:latin typeface="Courier"/>
+              </a:rPr>
+              <a:t>sample =</a:t>
+            </a:r>
+            <a:r>
+              <a:rPr/>
+              <a:t>, not </a:t>
+            </a:r>
+            <a:r>
+              <a:rPr>
+                <a:latin typeface="Courier"/>
+              </a:rPr>
+              <a:t>x =</a:t>
+            </a:r>
+            <a:r>
+              <a:rPr/>
+              <a:t> / </a:t>
+            </a:r>
+            <a:r>
+              <a:rPr>
+                <a:latin typeface="Courier"/>
+              </a:rPr>
+              <a:t>y =</a:t>
+            </a:r>
+          </a:p>
+          <a:p>
+            <a:pPr lvl="0"/>
+            <a:r>
+              <a:rPr>
+                <a:latin typeface="Courier"/>
+              </a:rPr>
+              <a:t>stat_qq()</a:t>
+            </a:r>
+            <a:r>
+              <a:rPr/>
+              <a:t> — draws one dot per leaf</a:t>
+            </a:r>
+          </a:p>
+          <a:p>
+            <a:pPr lvl="0"/>
+            <a:r>
+              <a:rPr>
+                <a:latin typeface="Courier"/>
+              </a:rPr>
+              <a:t>stat_qq_line()</a:t>
+            </a:r>
+            <a:r>
+              <a:rPr/>
+              <a:t> — draws the “perfectly normal” line</a:t>
+            </a:r>
+          </a:p>
+          <a:p>
+            <a:pPr lvl="0" indent="0" marL="0">
+              <a:buNone/>
+            </a:pPr>
             <a:r>
               <a:rPr b="1"/>
-              <a:t>bell-shaped</a:t>
-            </a:r>
-            <a:r>
-              <a:rPr/>
-              <a:t> — not heavily skewed</a:t>
+              <a:t>What do you see?</a:t>
             </a:r>
           </a:p>
           <a:p>
             <a:pPr lvl="0"/>
             <a:r>
-              <a:rPr/>
-              <a:t>No obvious </a:t>
-            </a:r>
-            <a:r>
               <a:rPr b="1"/>
-              <a:t>bimodal</a:t>
-            </a:r>
-            <a:r>
-              <a:rPr/>
-              <a:t> peaks</a:t>
+              <a:t>Sunny:</a:t>
+            </a:r>
+            <a:r>
+              <a:rPr/>
+              <a:t> dots follow the line well</a:t>
             </a:r>
           </a:p>
           <a:p>
             <a:pPr lvl="0"/>
             <a:r>
-              <a:rPr/>
-              <a:t>No extreme </a:t>
-            </a:r>
-            <a:r>
               <a:rPr b="1"/>
-              <a:t>outliers</a:t>
-            </a:r>
-          </a:p>
-          <a:p>
-            <a:pPr lvl="0" indent="0" marL="0">
-              <a:buNone/>
-            </a:pPr>
-            <a:r>
-              <a:rPr/>
-              <a:t>With ~25 per group these are readable, but still lumpy — that is normal for real ecological data.</a:t>
-            </a:r>
-          </a:p>
-          <a:p>
-            <a:pPr lvl="0" indent="0" marL="1270000">
-              <a:buNone/>
-            </a:pPr>
-            <a:r>
-              <a:rPr sz="2000" b="1"/>
-              <a:t>Note</a:t>
-            </a:r>
-          </a:p>
-          <a:p>
-            <a:pPr lvl="0" indent="0" marL="1270000">
-              <a:buNone/>
-            </a:pPr>
-            <a:r>
-              <a:rPr sz="2000"/>
-              <a:t>A </a:t>
-            </a:r>
-            <a:r>
-              <a:rPr sz="2000" b="1"/>
-              <a:t>QQ plot</a:t>
-            </a:r>
-            <a:r>
-              <a:rPr sz="2000"/>
-              <a:t> is another common visual check — same idea, different picture. You’ll find one in the activity’s optional section if you want to compare.</a:t>
+              <a:t>Shady:</a:t>
+            </a:r>
+            <a:r>
+              <a:rPr/>
+              <a:t> mostly on the line, but the heaviest leaves bend </a:t>
+            </a:r>
+            <a:r>
+              <a:rPr b="1"/>
+              <a:t>up</a:t>
+            </a:r>
+            <a:r>
+              <a:rPr/>
+              <a:t> — the same right tail you saw in the histogram</a:t>
             </a:r>
           </a:p>
         </p:txBody>
@@ -7010,7 +5666,7 @@
             </a:pPr>
             <a:r>
               <a:rPr/>
-              <a:t>Step 2 — Check Normality: Shapiro-Wilk Test</a:t>
+              <a:t>Step 2 — Normality: Shapiro-Wilk Test</a:t>
             </a:r>
           </a:p>
         </p:txBody>
@@ -7048,7 +5704,7 @@
             </a:r>
             <a:r>
               <a:rPr sz="2000"/>
-              <a:t> Shapiro-Wilk’s H₀ is “the data are normal.” From the histogram you just saw, predict for each side: will </a:t>
+              <a:t> Shapiro-Wilk’s H₀ is “the data are normal.” From the QQ plots, predict for each side: will </a:t>
             </a:r>
             <a:r>
               <a:rPr sz="2000" i="1"/>
@@ -7124,7 +5780,7 @@
                 </a:solidFill>
                 <a:latin typeface="Courier"/>
               </a:rPr>
-              <a:t># Shapiro-Wilk test for the sunny side -----------------</a:t>
+              <a:t># Shapiro-Wilk p-value for each side -------------------</a:t>
             </a:r>
             <a:br/>
             <a:r>
@@ -7162,16 +5818,16 @@
                 </a:solidFill>
                 <a:latin typeface="Courier"/>
               </a:rPr>
-              <a:t>filter</a:t>
-            </a:r>
-            <a:r>
-              <a:rPr>
-                <a:solidFill>
-                  <a:srgbClr val="003B4F"/>
-                </a:solidFill>
-                <a:latin typeface="Courier"/>
-              </a:rPr>
-              <a:t>(shade </a:t>
+              <a:t>group_by</a:t>
+            </a:r>
+            <a:r>
+              <a:rPr>
+                <a:solidFill>
+                  <a:srgbClr val="003B4F"/>
+                </a:solidFill>
+                <a:latin typeface="Courier"/>
+              </a:rPr>
+              <a:t>(shade) </a:t>
             </a:r>
             <a:r>
               <a:rPr>
@@ -7180,7 +5836,44 @@
                 </a:solidFill>
                 <a:latin typeface="Courier"/>
               </a:rPr>
-              <a:t>==</a:t>
+              <a:t>%&gt;%</a:t>
+            </a:r>
+            <a:br/>
+            <a:r>
+              <a:rPr>
+                <a:solidFill>
+                  <a:srgbClr val="003B4F"/>
+                </a:solidFill>
+                <a:latin typeface="Courier"/>
+              </a:rPr>
+              <a:t>  </a:t>
+            </a:r>
+            <a:r>
+              <a:rPr>
+                <a:solidFill>
+                  <a:srgbClr val="4758AB"/>
+                </a:solidFill>
+                <a:latin typeface="Courier"/>
+              </a:rPr>
+              <a:t>summarize</a:t>
+            </a:r>
+            <a:r>
+              <a:rPr>
+                <a:solidFill>
+                  <a:srgbClr val="003B4F"/>
+                </a:solidFill>
+                <a:latin typeface="Courier"/>
+              </a:rPr>
+              <a:t>(</a:t>
+            </a:r>
+            <a:r>
+              <a:rPr>
+                <a:solidFill>
+                  <a:srgbClr val="657422"/>
+                </a:solidFill>
+                <a:latin typeface="Courier"/>
+              </a:rPr>
+              <a:t>shapiro_p =</a:t>
             </a:r>
             <a:r>
               <a:rPr>
@@ -7194,20 +5887,20 @@
             <a:r>
               <a:rPr>
                 <a:solidFill>
-                  <a:srgbClr val="20794D"/>
-                </a:solidFill>
-                <a:latin typeface="Courier"/>
-              </a:rPr>
-              <a:t>"sunny"</a:t>
-            </a:r>
-            <a:r>
-              <a:rPr>
-                <a:solidFill>
-                  <a:srgbClr val="003B4F"/>
-                </a:solidFill>
-                <a:latin typeface="Courier"/>
-              </a:rPr>
-              <a:t>) </a:t>
+                  <a:srgbClr val="4758AB"/>
+                </a:solidFill>
+                <a:latin typeface="Courier"/>
+              </a:rPr>
+              <a:t>shapiro.test</a:t>
+            </a:r>
+            <a:r>
+              <a:rPr>
+                <a:solidFill>
+                  <a:srgbClr val="003B4F"/>
+                </a:solidFill>
+                <a:latin typeface="Courier"/>
+              </a:rPr>
+              <a:t>(mass_g)</a:t>
             </a:r>
             <a:r>
               <a:rPr>
@@ -7216,72 +5909,16 @@
                 </a:solidFill>
                 <a:latin typeface="Courier"/>
               </a:rPr>
-              <a:t>%&gt;%</a:t>
-            </a:r>
-            <a:br/>
-            <a:r>
-              <a:rPr>
-                <a:solidFill>
-                  <a:srgbClr val="003B4F"/>
-                </a:solidFill>
-                <a:latin typeface="Courier"/>
-              </a:rPr>
-              <a:t>  </a:t>
-            </a:r>
-            <a:r>
-              <a:rPr>
-                <a:solidFill>
-                  <a:srgbClr val="4758AB"/>
-                </a:solidFill>
-                <a:latin typeface="Courier"/>
-              </a:rPr>
-              <a:t>pull</a:t>
-            </a:r>
-            <a:r>
-              <a:rPr>
-                <a:solidFill>
-                  <a:srgbClr val="003B4F"/>
-                </a:solidFill>
-                <a:latin typeface="Courier"/>
-              </a:rPr>
-              <a:t>(mass_g) </a:t>
-            </a:r>
-            <a:r>
-              <a:rPr>
-                <a:solidFill>
-                  <a:srgbClr val="5E5E5E"/>
-                </a:solidFill>
-                <a:latin typeface="Courier"/>
-              </a:rPr>
-              <a:t>%&gt;%</a:t>
-            </a:r>
-            <a:br/>
-            <a:r>
-              <a:rPr>
-                <a:solidFill>
-                  <a:srgbClr val="003B4F"/>
-                </a:solidFill>
-                <a:latin typeface="Courier"/>
-              </a:rPr>
-              <a:t>  </a:t>
-            </a:r>
-            <a:r>
-              <a:rPr>
-                <a:solidFill>
-                  <a:srgbClr val="4758AB"/>
-                </a:solidFill>
-                <a:latin typeface="Courier"/>
-              </a:rPr>
-              <a:t>shapiro.test</a:t>
-            </a:r>
-            <a:r>
-              <a:rPr>
-                <a:solidFill>
-                  <a:srgbClr val="003B4F"/>
-                </a:solidFill>
-                <a:latin typeface="Courier"/>
-              </a:rPr>
-              <a:t>()</a:t>
+              <a:t>$</a:t>
+            </a:r>
+            <a:r>
+              <a:rPr>
+                <a:solidFill>
+                  <a:srgbClr val="003B4F"/>
+                </a:solidFill>
+                <a:latin typeface="Courier"/>
+              </a:rPr>
+              <a:t>p.value)</a:t>
             </a:r>
           </a:p>
           <a:p>
@@ -7292,195 +5929,58 @@
               <a:rPr>
                 <a:latin typeface="Courier"/>
               </a:rPr>
-              <a:t>
-    Shapiro-Wilk normality test
-data:  .
-W = 0.95266, p-value = 0.2876</a:t>
-            </a:r>
-          </a:p>
-          <a:p>
-            <a:pPr lvl="0" indent="0">
-              <a:buNone/>
-            </a:pPr>
-            <a:r>
-              <a:rPr>
-                <a:solidFill>
-                  <a:srgbClr val="5E5E5E"/>
-                </a:solidFill>
-                <a:latin typeface="Courier"/>
-              </a:rPr>
-              <a:t># Shapiro-Wilk test for the shady side -----------------</a:t>
-            </a:r>
-            <a:br/>
-            <a:r>
-              <a:rPr>
-                <a:solidFill>
-                  <a:srgbClr val="003B4F"/>
-                </a:solidFill>
-                <a:latin typeface="Courier"/>
-              </a:rPr>
-              <a:t>leaf_df </a:t>
-            </a:r>
-            <a:r>
-              <a:rPr>
-                <a:solidFill>
-                  <a:srgbClr val="5E5E5E"/>
-                </a:solidFill>
-                <a:latin typeface="Courier"/>
-              </a:rPr>
-              <a:t>%&gt;%</a:t>
-            </a:r>
-            <a:br/>
-            <a:r>
-              <a:rPr>
-                <a:solidFill>
-                  <a:srgbClr val="003B4F"/>
-                </a:solidFill>
-                <a:latin typeface="Courier"/>
-              </a:rPr>
-              <a:t>  </a:t>
-            </a:r>
-            <a:r>
-              <a:rPr>
-                <a:solidFill>
-                  <a:srgbClr val="4758AB"/>
-                </a:solidFill>
-                <a:latin typeface="Courier"/>
-              </a:rPr>
-              <a:t>filter</a:t>
-            </a:r>
-            <a:r>
-              <a:rPr>
-                <a:solidFill>
-                  <a:srgbClr val="003B4F"/>
-                </a:solidFill>
-                <a:latin typeface="Courier"/>
-              </a:rPr>
-              <a:t>(shade </a:t>
-            </a:r>
-            <a:r>
-              <a:rPr>
-                <a:solidFill>
-                  <a:srgbClr val="5E5E5E"/>
-                </a:solidFill>
-                <a:latin typeface="Courier"/>
-              </a:rPr>
-              <a:t>==</a:t>
-            </a:r>
-            <a:r>
-              <a:rPr>
-                <a:solidFill>
-                  <a:srgbClr val="003B4F"/>
-                </a:solidFill>
-                <a:latin typeface="Courier"/>
-              </a:rPr>
-              <a:t> </a:t>
-            </a:r>
-            <a:r>
-              <a:rPr>
-                <a:solidFill>
-                  <a:srgbClr val="20794D"/>
-                </a:solidFill>
-                <a:latin typeface="Courier"/>
-              </a:rPr>
-              <a:t>"shady"</a:t>
-            </a:r>
-            <a:r>
-              <a:rPr>
-                <a:solidFill>
-                  <a:srgbClr val="003B4F"/>
-                </a:solidFill>
-                <a:latin typeface="Courier"/>
-              </a:rPr>
-              <a:t>) </a:t>
-            </a:r>
-            <a:r>
-              <a:rPr>
-                <a:solidFill>
-                  <a:srgbClr val="5E5E5E"/>
-                </a:solidFill>
-                <a:latin typeface="Courier"/>
-              </a:rPr>
-              <a:t>%&gt;%</a:t>
-            </a:r>
-            <a:br/>
-            <a:r>
-              <a:rPr>
-                <a:solidFill>
-                  <a:srgbClr val="003B4F"/>
-                </a:solidFill>
-                <a:latin typeface="Courier"/>
-              </a:rPr>
-              <a:t>  </a:t>
-            </a:r>
-            <a:r>
-              <a:rPr>
-                <a:solidFill>
-                  <a:srgbClr val="4758AB"/>
-                </a:solidFill>
-                <a:latin typeface="Courier"/>
-              </a:rPr>
-              <a:t>pull</a:t>
-            </a:r>
-            <a:r>
-              <a:rPr>
-                <a:solidFill>
-                  <a:srgbClr val="003B4F"/>
-                </a:solidFill>
-                <a:latin typeface="Courier"/>
-              </a:rPr>
-              <a:t>(mass_g) </a:t>
-            </a:r>
-            <a:r>
-              <a:rPr>
-                <a:solidFill>
-                  <a:srgbClr val="5E5E5E"/>
-                </a:solidFill>
-                <a:latin typeface="Courier"/>
-              </a:rPr>
-              <a:t>%&gt;%</a:t>
-            </a:r>
-            <a:br/>
-            <a:r>
-              <a:rPr>
-                <a:solidFill>
-                  <a:srgbClr val="003B4F"/>
-                </a:solidFill>
-                <a:latin typeface="Courier"/>
-              </a:rPr>
-              <a:t>  </a:t>
-            </a:r>
-            <a:r>
-              <a:rPr>
-                <a:solidFill>
-                  <a:srgbClr val="4758AB"/>
-                </a:solidFill>
-                <a:latin typeface="Courier"/>
-              </a:rPr>
-              <a:t>shapiro.test</a:t>
-            </a:r>
-            <a:r>
-              <a:rPr>
-                <a:solidFill>
-                  <a:srgbClr val="003B4F"/>
-                </a:solidFill>
-                <a:latin typeface="Courier"/>
-              </a:rPr>
-              <a:t>()</a:t>
-            </a:r>
-          </a:p>
-          <a:p>
-            <a:pPr lvl="0" indent="0">
-              <a:buNone/>
-            </a:pPr>
-            <a:r>
-              <a:rPr>
-                <a:latin typeface="Courier"/>
-              </a:rPr>
-              <a:t>
-    Shapiro-Wilk normality test
-data:  .
-W = 0.92364, p-value = 0.0427</a:t>
+              <a:t># A tibble: 2 × 2
+  shade shapiro_p
+  &lt;chr&gt;     &lt;dbl&gt;
+1 shady    0.0427
+2 sunny    0.288 </a:t>
+            </a:r>
+          </a:p>
+          <a:p>
+            <a:pPr lvl="0" indent="0" marL="0">
+              <a:buNone/>
+            </a:pPr>
+            <a:r>
+              <a:rPr/>
+              <a:t>Same </a:t>
+            </a:r>
+            <a:r>
+              <a:rPr>
+                <a:latin typeface="Courier"/>
+              </a:rPr>
+              <a:t>group_by()</a:t>
+            </a:r>
+            <a:r>
+              <a:rPr/>
+              <a:t> + </a:t>
+            </a:r>
+            <a:r>
+              <a:rPr>
+                <a:latin typeface="Courier"/>
+              </a:rPr>
+              <a:t>summarize()</a:t>
+            </a:r>
+            <a:r>
+              <a:rPr/>
+              <a:t> as for means — it runs the test once per side. </a:t>
+            </a:r>
+            <a:r>
+              <a:rPr>
+                <a:latin typeface="Courier"/>
+              </a:rPr>
+              <a:t>$p.value</a:t>
+            </a:r>
+            <a:r>
+              <a:rPr/>
+              <a:t> pulls out just the </a:t>
+            </a:r>
+            <a:r>
+              <a:rPr i="1"/>
+              <a:t>p</a:t>
+            </a:r>
+            <a:r>
+              <a:rPr/>
+              <a:t>-value.</a:t>
             </a:r>
           </a:p>
         </p:txBody>
@@ -7509,7 +6009,7 @@
             </a:r>
             <a:r>
               <a:rPr/>
-              <a:t> the data are normally distributed.</a:t>
+              <a:t> the data are normal.</a:t>
             </a:r>
           </a:p>
           <a:p>
@@ -7520,15 +6020,7 @@
             </a:r>
             <a:r>
               <a:rPr/>
-              <a:t> &gt; 0.05 → </a:t>
-            </a:r>
-            <a:r>
-              <a:rPr b="1"/>
-              <a:t>fail to reject</a:t>
-            </a:r>
-            <a:r>
-              <a:rPr/>
-              <a:t> normality → proceed with t-test</a:t>
+              <a:t> &gt; 0.05 → no evidence against normality → go ahead</a:t>
             </a:r>
           </a:p>
           <a:p>
@@ -7539,7 +6031,7 @@
             </a:r>
             <a:r>
               <a:rPr/>
-              <a:t> &lt; 0.05 → evidence of non-normality → consider a non-parametric alternative</a:t>
+              <a:t> &lt; 0.05 → evidence of non-normality → look hard at the plots</a:t>
             </a:r>
           </a:p>
           <a:p>
@@ -7557,7 +6049,7 @@
             </a:pPr>
             <a:r>
               <a:rPr sz="2000" b="1"/>
-              <a:t>One side may fail, the other pass.</a:t>
+              <a:t>The plot comes first; the test backs it up.</a:t>
             </a:r>
           </a:p>
           <a:p>
@@ -7566,15 +6058,7 @@
             </a:pPr>
             <a:r>
               <a:rPr sz="2000"/>
-              <a:t>A borderline Shapiro result (</a:t>
-            </a:r>
-            <a:r>
-              <a:rPr sz="2000" i="1"/>
-              <a:t>p</a:t>
-            </a:r>
-            <a:r>
-              <a:rPr sz="2000"/>
-              <a:t> just under 0.05) with a roughly bell-shaped histogram is not a reason to abandon the t-test — it is robust to mild non-normality. Read the histogram and the test together.</a:t>
+              <a:t>Shady is just under 0.05 — matching the bend we saw in the QQ plot. A mild tail like this is not a reason to abandon the t-test; it is robust to small departures.</a:t>
             </a:r>
           </a:p>
         </p:txBody>
@@ -7626,7 +6110,7 @@
             </a:pPr>
             <a:r>
               <a:rPr/>
-              <a:t>Where we left off (Lectures 05–06)</a:t>
+              <a:t>Where we left off (Lectures 05–07)</a:t>
             </a:r>
           </a:p>
         </p:txBody>
@@ -7704,7 +6188,7 @@
             </a:r>
             <a:r>
               <a:rPr/>
-              <a:t> — mean, median, SD, SE with </a:t>
+              <a:t> — mean, SD, SE with </a:t>
             </a:r>
             <a:r>
               <a:rPr>
@@ -7727,32 +6211,7 @@
             <a:pPr lvl="0"/>
             <a:r>
               <a:rPr b="1"/>
-              <a:t>NA handling</a:t>
-            </a:r>
-            <a:r>
-              <a:rPr/>
-              <a:t> — </a:t>
-            </a:r>
-            <a:r>
-              <a:rPr>
-                <a:latin typeface="Courier"/>
-              </a:rPr>
-              <a:t>sum(!is.na())</a:t>
-            </a:r>
-            <a:r>
-              <a:rPr/>
-              <a:t> is the safe way to count </a:t>
-            </a:r>
-            <a:r>
-              <a:rPr i="1"/>
-              <a:t>n</a:t>
-            </a:r>
-          </a:p>
-          <a:p>
-            <a:pPr lvl="0"/>
-            <a:r>
-              <a:rPr b="1"/>
-              <a:t>Boxplot</a:t>
+              <a:t>Box plot</a:t>
             </a:r>
             <a:r>
               <a:rPr/>
@@ -7772,9 +6231,16 @@
               </a:rPr>
               <a:t>stat_summary()</a:t>
             </a:r>
-            <a:r>
-              <a:rPr/>
-              <a:t> (Lecture 03, GGPlot I)</a:t>
+          </a:p>
+          <a:p>
+            <a:pPr lvl="0"/>
+            <a:r>
+              <a:rPr b="1"/>
+              <a:t>Quarto report</a:t>
+            </a:r>
+            <a:r>
+              <a:rPr/>
+              <a:t> — you already ran a Welch’s t-test once, at the end</a:t>
             </a:r>
           </a:p>
           <a:p>
@@ -7803,7 +6269,7 @@
             </a:pPr>
             <a:r>
               <a:rPr sz="2000" b="1"/>
-              <a:t>✅ Key idea from Lecture 06</a:t>
+              <a:t>✅ Key idea for today</a:t>
             </a:r>
           </a:p>
           <a:p>
@@ -7812,7 +6278,23 @@
             </a:pPr>
             <a:r>
               <a:rPr sz="2000"/>
-              <a:t>We described the pattern in our data. Over the next two lectures we formally test whether the sides really differ — today we set the test up, next time we run it.</a:t>
+              <a:t>Last time we </a:t>
+            </a:r>
+            <a:r>
+              <a:rPr sz="2000" i="1"/>
+              <a:t>ran</a:t>
+            </a:r>
+            <a:r>
+              <a:rPr sz="2000"/>
+              <a:t> a t-test. Today we slow down and do it properly: state the hypotheses, </a:t>
+            </a:r>
+            <a:r>
+              <a:rPr sz="2000" b="1"/>
+              <a:t>check the assumptions</a:t>
+            </a:r>
+            <a:r>
+              <a:rPr sz="2000"/>
+              <a:t>, and only then run the test.</a:t>
             </a:r>
           </a:p>
         </p:txBody>
@@ -7897,7 +6379,7 @@
                 </a:solidFill>
                 <a:latin typeface="Courier"/>
               </a:rPr>
-              <a:t># Levene's test — are the variances similar? -----------</a:t>
+              <a:t># Levene's test — are the spreads similar? --------------</a:t>
             </a:r>
             <a:br/>
             <a:r>
@@ -7971,6 +6453,23 @@
 Signif. codes:  0 '***' 0.001 '**' 0.01 '*' 0.05 '.' 0.1 ' ' 1</a:t>
             </a:r>
           </a:p>
+          <a:p>
+            <a:pPr lvl="0" indent="0" marL="0">
+              <a:buNone/>
+            </a:pPr>
+            <a:r>
+              <a:rPr/>
+              <a:t>Look back at the stacked histograms: which group was </a:t>
+            </a:r>
+            <a:r>
+              <a:rPr b="1"/>
+              <a:t>wider</a:t>
+            </a:r>
+            <a:r>
+              <a:rPr/>
+              <a:t>?</a:t>
+            </a:r>
+          </a:p>
         </p:txBody>
       </p:sp>
       <p:sp>
@@ -7993,7 +6492,7 @@
             </a:pPr>
             <a:r>
               <a:rPr b="1"/>
-              <a:t>Levene’s test H₀:</a:t>
+              <a:t>Levene’s H₀:</a:t>
             </a:r>
             <a:r>
               <a:rPr/>
@@ -8005,7 +6504,7 @@
             </a:r>
             <a:r>
               <a:rPr/>
-              <a:t>.</a:t>
+              <a:t> (spread).</a:t>
             </a:r>
           </a:p>
           <a:p>
@@ -8016,7 +6515,7 @@
             </a:r>
             <a:r>
               <a:rPr/>
-              <a:t> &gt; 0.05 → variances are not significantly different</a:t>
+              <a:t> &gt; 0.05 → spreads are not significantly different</a:t>
             </a:r>
           </a:p>
           <a:p>
@@ -8027,7 +6526,7 @@
             </a:r>
             <a:r>
               <a:rPr/>
-              <a:t> &lt; 0.05 → variances are significantly different</a:t>
+              <a:t> &lt; 0.05 → spreads are different</a:t>
             </a:r>
           </a:p>
           <a:p>
@@ -8036,16 +6535,11 @@
             </a:pPr>
             <a:r>
               <a:rPr b="1"/>
-              <a:t>Our response regardless of the result:</a:t>
-            </a:r>
-          </a:p>
-          <a:p>
-            <a:pPr lvl="0" indent="0" marL="0">
-              <a:buNone/>
-            </a:pPr>
-            <a:r>
-              <a:rPr/>
-              <a:t>We will use Welch’s t-test (</a:t>
+              <a:t>Either way we use Welch’s</a:t>
+            </a:r>
+            <a:r>
+              <a:rPr/>
+              <a:t> (</a:t>
             </a:r>
             <a:r>
               <a:rPr>
@@ -8055,16 +6549,7 @@
             </a:r>
             <a:r>
               <a:rPr/>
-              <a:t>).</a:t>
-            </a:r>
-          </a:p>
-          <a:p>
-            <a:pPr lvl="0" indent="0" marL="0">
-              <a:buNone/>
-            </a:pPr>
-            <a:r>
-              <a:rPr/>
-              <a:t>Welch’s is valid whether or not the variances are equal. We run Levene’s to </a:t>
+              <a:t>). We run Levene’s to </a:t>
             </a:r>
             <a:r>
               <a:rPr i="1"/>
@@ -8072,7 +6557,7 @@
             </a:r>
             <a:r>
               <a:rPr/>
-              <a:t>, not to choose our test.</a:t>
+              <a:t>, not to pick the test.</a:t>
             </a:r>
           </a:p>
         </p:txBody>
@@ -8112,11 +6597,8 @@
         <p:spPr>
           <a:xfrm>
             <a:off x="0" y="0"/>
-            <a:ext cx="9144000" cy="602780"/>
+            <a:ext cx="9144000" cy="582780"/>
           </a:xfrm>
-          <a:solidFill>
-            <a:srgbClr val="1A1A2E"/>
-          </a:solidFill>
         </p:spPr>
         <p:txBody>
           <a:bodyPr/>
@@ -8127,7 +6609,7 @@
             </a:pPr>
             <a:r>
               <a:rPr/>
-              <a:t>Live Demo — Watch It Break (on purpose)</a:t>
+              <a:t>→ ACTIVITY 9 Parts 3–7 now</a:t>
             </a:r>
           </a:p>
         </p:txBody>
@@ -8139,7 +6621,7 @@
             <a:spLocks noGrp="1"/>
           </p:cNvSpPr>
           <p:nvPr>
-            <p:ph idx="1" sz="half"/>
+            <p:ph idx="1"/>
           </p:nvPr>
         </p:nvSpPr>
         <p:spPr/>
@@ -8151,77 +6633,8 @@
               <a:buNone/>
             </a:pPr>
             <a:r>
-              <a:rPr/>
-              <a:t>Suppose I forgot </a:t>
-            </a:r>
-            <a:r>
-              <a:rPr>
-                <a:latin typeface="Courier"/>
-              </a:rPr>
-              <a:t>library(car)</a:t>
-            </a:r>
-            <a:r>
-              <a:rPr/>
-              <a:t> and run Levene’s:</a:t>
-            </a:r>
-          </a:p>
-          <a:p>
-            <a:pPr lvl="0" indent="0">
-              <a:buNone/>
-            </a:pPr>
-            <a:r>
-              <a:rPr>
-                <a:solidFill>
-                  <a:srgbClr val="4758AB"/>
-                </a:solidFill>
-                <a:latin typeface="Courier"/>
-              </a:rPr>
-              <a:t>leveneTest</a:t>
-            </a:r>
-            <a:r>
-              <a:rPr>
-                <a:solidFill>
-                  <a:srgbClr val="003B4F"/>
-                </a:solidFill>
-                <a:latin typeface="Courier"/>
-              </a:rPr>
-              <a:t>(mass_g </a:t>
-            </a:r>
-            <a:r>
-              <a:rPr>
-                <a:solidFill>
-                  <a:srgbClr val="5E5E5E"/>
-                </a:solidFill>
-                <a:latin typeface="Courier"/>
-              </a:rPr>
-              <a:t>~</a:t>
-            </a:r>
-            <a:r>
-              <a:rPr>
-                <a:solidFill>
-                  <a:srgbClr val="003B4F"/>
-                </a:solidFill>
-                <a:latin typeface="Courier"/>
-              </a:rPr>
-              <a:t> shade, </a:t>
-            </a:r>
-            <a:r>
-              <a:rPr>
-                <a:solidFill>
-                  <a:srgbClr val="657422"/>
-                </a:solidFill>
-                <a:latin typeface="Courier"/>
-              </a:rPr>
-              <a:t>data =</a:t>
-            </a:r>
-            <a:r>
-              <a:rPr>
-                <a:solidFill>
-                  <a:srgbClr val="003B4F"/>
-                </a:solidFill>
-                <a:latin typeface="Courier"/>
-              </a:rPr>
-              <a:t> leaf_df)</a:t>
+              <a:rPr b="1"/>
+              <a:t>🛑 Go to Activity 9 — Parts 3–7</a:t>
             </a:r>
           </a:p>
           <a:p>
@@ -8230,173 +6643,15 @@
             </a:pPr>
             <a:r>
               <a:rPr/>
-              <a:t>R stops with:</a:t>
-            </a:r>
-          </a:p>
-          <a:p>
-            <a:pPr lvl="0" indent="0">
-              <a:buNone/>
-            </a:pPr>
-            <a:r>
-              <a:rPr>
-                <a:latin typeface="Courier"/>
-              </a:rPr>
-              <a:t>Error in leveneTest(mass_g ~ shade, data = leaf_df) :
-  could not find function "leveneTest"</a:t>
-            </a:r>
-          </a:p>
-          <a:p>
-            <a:pPr lvl="0" indent="0" marL="0">
-              <a:buNone/>
-            </a:pPr>
-            <a:r>
-              <a:rPr/>
-              <a:t>The fix — load the package that </a:t>
+              <a:t>State your hypotheses, then check normality (histograms, box plot + QQ plot, Shapiro-Wilk) and variance (Levene’s). Predict every </a:t>
             </a:r>
             <a:r>
               <a:rPr i="1"/>
-              <a:t>contains</a:t>
-            </a:r>
-            <a:r>
-              <a:rPr/>
-              <a:t> the function:</a:t>
-            </a:r>
-          </a:p>
-          <a:p>
-            <a:pPr lvl="0" indent="0">
-              <a:buNone/>
-            </a:pPr>
-            <a:r>
-              <a:rPr>
-                <a:solidFill>
-                  <a:srgbClr val="4758AB"/>
-                </a:solidFill>
-                <a:latin typeface="Courier"/>
-              </a:rPr>
-              <a:t>library</a:t>
-            </a:r>
-            <a:r>
-              <a:rPr>
-                <a:solidFill>
-                  <a:srgbClr val="003B4F"/>
-                </a:solidFill>
-                <a:latin typeface="Courier"/>
-              </a:rPr>
-              <a:t>(car)</a:t>
-            </a:r>
-            <a:br/>
-            <a:r>
-              <a:rPr>
-                <a:solidFill>
-                  <a:srgbClr val="4758AB"/>
-                </a:solidFill>
-                <a:latin typeface="Courier"/>
-              </a:rPr>
-              <a:t>leveneTest</a:t>
-            </a:r>
-            <a:r>
-              <a:rPr>
-                <a:solidFill>
-                  <a:srgbClr val="003B4F"/>
-                </a:solidFill>
-                <a:latin typeface="Courier"/>
-              </a:rPr>
-              <a:t>(mass_g </a:t>
-            </a:r>
-            <a:r>
-              <a:rPr>
-                <a:solidFill>
-                  <a:srgbClr val="5E5E5E"/>
-                </a:solidFill>
-                <a:latin typeface="Courier"/>
-              </a:rPr>
-              <a:t>~</a:t>
-            </a:r>
-            <a:r>
-              <a:rPr>
-                <a:solidFill>
-                  <a:srgbClr val="003B4F"/>
-                </a:solidFill>
-                <a:latin typeface="Courier"/>
-              </a:rPr>
-              <a:t> shade, </a:t>
-            </a:r>
-            <a:r>
-              <a:rPr>
-                <a:solidFill>
-                  <a:srgbClr val="657422"/>
-                </a:solidFill>
-                <a:latin typeface="Courier"/>
-              </a:rPr>
-              <a:t>data =</a:t>
-            </a:r>
-            <a:r>
-              <a:rPr>
-                <a:solidFill>
-                  <a:srgbClr val="003B4F"/>
-                </a:solidFill>
-                <a:latin typeface="Courier"/>
-              </a:rPr>
-              <a:t> leaf_df)</a:t>
-            </a:r>
-          </a:p>
-        </p:txBody>
-      </p:sp>
-      <p:sp>
-        <p:nvSpPr>
-          <p:cNvPr id="4" name="Content Placeholder 3"/>
-          <p:cNvSpPr>
-            <a:spLocks noGrp="1"/>
-          </p:cNvSpPr>
-          <p:nvPr>
-            <p:ph idx="2" sz="half"/>
-          </p:nvPr>
-        </p:nvSpPr>
-        <p:spPr/>
-        <p:txBody>
-          <a:bodyPr/>
-          <a:lstStyle/>
-          <a:p>
-            <a:pPr lvl="0" indent="0" marL="1270000">
-              <a:buNone/>
-            </a:pPr>
-            <a:r>
-              <a:rPr sz="2000" b="1"/>
-              <a:t>Tip</a:t>
-            </a:r>
-          </a:p>
-          <a:p>
-            <a:pPr lvl="0" indent="0" marL="1270000">
-              <a:buNone/>
-            </a:pPr>
-            <a:r>
-              <a:rPr sz="2000" b="1"/>
-              <a:t>✅ Why show a broken run?</a:t>
-            </a:r>
-          </a:p>
-          <a:p>
-            <a:pPr lvl="0" indent="0" marL="1270000">
-              <a:buNone/>
-            </a:pPr>
-            <a:r>
-              <a:rPr sz="2000">
-                <a:latin typeface="Courier"/>
-              </a:rPr>
-              <a:t>leveneTest()</a:t>
-            </a:r>
-            <a:r>
-              <a:rPr sz="2000"/>
-              <a:t> lives inside </a:t>
-            </a:r>
-            <a:r>
-              <a:rPr sz="2000">
-                <a:latin typeface="Courier"/>
-              </a:rPr>
-              <a:t>car</a:t>
-            </a:r>
-            <a:r>
-              <a:rPr sz="2000"/>
-              <a:t>, not base R — so R has no idea what the function is until the package is loaded. Seeing that exact error message once, on purpose, means you won’t waste ten minutes hunting for a typo the next time it happens to you.</a:t>
+              <a:t>p</a:t>
+            </a:r>
+            <a:r>
+              <a:rPr/>
+              <a:t>-value before you run it.</a:t>
             </a:r>
           </a:p>
         </p:txBody>
@@ -8448,7 +6703,7 @@
             </a:pPr>
             <a:r>
               <a:rPr/>
-              <a:t>→ ACTIVITY 9 Parts 3–6 now</a:t>
+              <a:t>🧩 Chunk 3 of 3 · Step 4: Run the Test</a:t>
             </a:r>
           </a:p>
         </p:txBody>
@@ -8473,7 +6728,11 @@
             </a:pPr>
             <a:r>
               <a:rPr b="1"/>
-              <a:t>🛑 Go to Activity 9 — Parts 3–6</a:t>
+              <a:t>We will cover:</a:t>
+            </a:r>
+            <a:r>
+              <a:rPr/>
+              <a:t> running Welch’s t-test now that every assumption is checked. Reading the output line by line is next lecture.</a:t>
             </a:r>
           </a:p>
           <a:p>
@@ -8481,8 +6740,12 @@
               <a:buNone/>
             </a:pPr>
             <a:r>
-              <a:rPr/>
-              <a:t>Close the slides. State your hypotheses, then check normality (histogram + Shapiro-Wilk) and variance (Levene’s). Predict every p-value before you run it.</a:t>
+              <a:rPr b="1"/>
+              <a:t>🛑 After this chunk: Activity Part 8</a:t>
+            </a:r>
+            <a:r>
+              <a:rPr/>
+              <a:t> (run the t-test).</a:t>
             </a:r>
           </a:p>
         </p:txBody>
@@ -8522,6 +6785,880 @@
         <p:spPr>
           <a:xfrm>
             <a:off x="0" y="0"/>
+            <a:ext cx="9144000" cy="582780"/>
+          </a:xfrm>
+        </p:spPr>
+        <p:txBody>
+          <a:bodyPr/>
+          <a:lstStyle/>
+          <a:p>
+            <a:pPr lvl="0" indent="0" marL="0">
+              <a:buNone/>
+            </a:pPr>
+            <a:r>
+              <a:rPr/>
+              <a:t>Step 4 — Run Welch’s t-Test</a:t>
+            </a:r>
+          </a:p>
+        </p:txBody>
+      </p:sp>
+      <p:sp>
+        <p:nvSpPr>
+          <p:cNvPr id="3" name="Content Placeholder 2"/>
+          <p:cNvSpPr>
+            <a:spLocks noGrp="1"/>
+          </p:cNvSpPr>
+          <p:nvPr>
+            <p:ph idx="1"/>
+          </p:nvPr>
+        </p:nvSpPr>
+        <p:spPr/>
+        <p:txBody>
+          <a:bodyPr/>
+          <a:lstStyle/>
+          <a:p>
+            <a:pPr lvl="0" indent="0" marL="1270000">
+              <a:buNone/>
+            </a:pPr>
+            <a:r>
+              <a:rPr sz="2000" b="1"/>
+              <a:t>Note</a:t>
+            </a:r>
+          </a:p>
+          <a:p>
+            <a:pPr lvl="0" indent="0" marL="1270000">
+              <a:buNone/>
+            </a:pPr>
+            <a:r>
+              <a:rPr sz="2000" b="1"/>
+              <a:t>🔮 Predict first:</a:t>
+            </a:r>
+            <a:r>
+              <a:rPr sz="2000"/>
+              <a:t> the means were close and the groups overlap heavily. Above or below 0.05?</a:t>
+            </a:r>
+          </a:p>
+        </p:txBody>
+      </p:sp>
+    </p:spTree>
+  </p:cSld>
+</p:sld>
+</file>
+
+<file path=ppt/slides/slide24.xml><?xml version="1.0" encoding="utf-8"?>
+<p:sld xmlns:a="http://schemas.openxmlformats.org/drawingml/2006/main" xmlns:r="http://schemas.openxmlformats.org/officeDocument/2006/relationships" xmlns:p="http://schemas.openxmlformats.org/presentationml/2006/main">
+  <p:cSld>
+    <p:spTree>
+      <p:nvGrpSpPr>
+        <p:cNvPr id="1" name=""/>
+        <p:cNvGrpSpPr/>
+        <p:nvPr/>
+      </p:nvGrpSpPr>
+      <p:grpSpPr>
+        <a:xfrm>
+          <a:off x="0" y="0"/>
+          <a:ext cx="0" cy="0"/>
+          <a:chOff x="0" y="0"/>
+          <a:chExt cx="0" cy="0"/>
+        </a:xfrm>
+      </p:grpSpPr>
+      <p:sp>
+        <p:nvSpPr>
+          <p:cNvPr id="3" name="Content Placeholder 2"/>
+          <p:cNvSpPr>
+            <a:spLocks noGrp="1"/>
+          </p:cNvSpPr>
+          <p:nvPr>
+            <p:ph idx="1" sz="half"/>
+          </p:nvPr>
+        </p:nvSpPr>
+        <p:spPr/>
+        <p:txBody>
+          <a:bodyPr/>
+          <a:lstStyle/>
+          <a:p>
+            <a:pPr lvl="0" indent="0">
+              <a:buNone/>
+            </a:pPr>
+            <a:r>
+              <a:rPr>
+                <a:solidFill>
+                  <a:srgbClr val="5E5E5E"/>
+                </a:solidFill>
+                <a:latin typeface="Courier"/>
+              </a:rPr>
+              <a:t># Welch's two-sample t-test -----------------------------</a:t>
+            </a:r>
+            <a:br/>
+            <a:r>
+              <a:rPr>
+                <a:solidFill>
+                  <a:srgbClr val="003B4F"/>
+                </a:solidFill>
+                <a:latin typeface="Courier"/>
+              </a:rPr>
+              <a:t>leaf_model &lt;- </a:t>
+            </a:r>
+            <a:r>
+              <a:rPr>
+                <a:solidFill>
+                  <a:srgbClr val="4758AB"/>
+                </a:solidFill>
+                <a:latin typeface="Courier"/>
+              </a:rPr>
+              <a:t>t.test</a:t>
+            </a:r>
+            <a:r>
+              <a:rPr>
+                <a:solidFill>
+                  <a:srgbClr val="003B4F"/>
+                </a:solidFill>
+                <a:latin typeface="Courier"/>
+              </a:rPr>
+              <a:t>(mass_g </a:t>
+            </a:r>
+            <a:r>
+              <a:rPr>
+                <a:solidFill>
+                  <a:srgbClr val="5E5E5E"/>
+                </a:solidFill>
+                <a:latin typeface="Courier"/>
+              </a:rPr>
+              <a:t>~</a:t>
+            </a:r>
+            <a:r>
+              <a:rPr>
+                <a:solidFill>
+                  <a:srgbClr val="003B4F"/>
+                </a:solidFill>
+                <a:latin typeface="Courier"/>
+              </a:rPr>
+              <a:t> shade, </a:t>
+            </a:r>
+            <a:r>
+              <a:rPr>
+                <a:solidFill>
+                  <a:srgbClr val="657422"/>
+                </a:solidFill>
+                <a:latin typeface="Courier"/>
+              </a:rPr>
+              <a:t>data =</a:t>
+            </a:r>
+            <a:r>
+              <a:rPr>
+                <a:solidFill>
+                  <a:srgbClr val="003B4F"/>
+                </a:solidFill>
+                <a:latin typeface="Courier"/>
+              </a:rPr>
+              <a:t> leaf_df,</a:t>
+            </a:r>
+            <a:br/>
+            <a:r>
+              <a:rPr>
+                <a:solidFill>
+                  <a:srgbClr val="003B4F"/>
+                </a:solidFill>
+                <a:latin typeface="Courier"/>
+              </a:rPr>
+              <a:t>                     </a:t>
+            </a:r>
+            <a:r>
+              <a:rPr>
+                <a:solidFill>
+                  <a:srgbClr val="657422"/>
+                </a:solidFill>
+                <a:latin typeface="Courier"/>
+              </a:rPr>
+              <a:t>var.equal =</a:t>
+            </a:r>
+            <a:r>
+              <a:rPr>
+                <a:solidFill>
+                  <a:srgbClr val="003B4F"/>
+                </a:solidFill>
+                <a:latin typeface="Courier"/>
+              </a:rPr>
+              <a:t> </a:t>
+            </a:r>
+            <a:r>
+              <a:rPr>
+                <a:solidFill>
+                  <a:srgbClr val="8F5902"/>
+                </a:solidFill>
+                <a:latin typeface="Courier"/>
+              </a:rPr>
+              <a:t>FALSE</a:t>
+            </a:r>
+            <a:r>
+              <a:rPr>
+                <a:solidFill>
+                  <a:srgbClr val="003B4F"/>
+                </a:solidFill>
+                <a:latin typeface="Courier"/>
+              </a:rPr>
+              <a:t>)</a:t>
+            </a:r>
+            <a:br/>
+            <a:r>
+              <a:rPr>
+                <a:solidFill>
+                  <a:srgbClr val="003B4F"/>
+                </a:solidFill>
+                <a:latin typeface="Courier"/>
+              </a:rPr>
+              <a:t>leaf_model</a:t>
+            </a:r>
+          </a:p>
+          <a:p>
+            <a:pPr lvl="0" indent="0">
+              <a:buNone/>
+            </a:pPr>
+            <a:r>
+              <a:rPr>
+                <a:latin typeface="Courier"/>
+              </a:rPr>
+              <a:t>
+    Welch Two Sample t-test
+data:  mass_g by shade
+t = 0.35579, df = 42.527, p-value = 0.7238
+alternative hypothesis: true difference in means between group shady and group sunny is not equal to 0
+95 percent confidence interval:
+ -0.08392774  0.11987117
+sample estimates:
+mean in group shady mean in group sunny 
+          0.5230357           0.5050640 </a:t>
+            </a:r>
+          </a:p>
+        </p:txBody>
+      </p:sp>
+      <p:sp>
+        <p:nvSpPr>
+          <p:cNvPr id="4" name="Content Placeholder 3"/>
+          <p:cNvSpPr>
+            <a:spLocks noGrp="1"/>
+          </p:cNvSpPr>
+          <p:nvPr>
+            <p:ph idx="2" sz="half"/>
+          </p:nvPr>
+        </p:nvSpPr>
+        <p:spPr/>
+        <p:txBody>
+          <a:bodyPr/>
+          <a:lstStyle/>
+          <a:p>
+            <a:pPr lvl="0" indent="0" marL="0">
+              <a:buNone/>
+            </a:pPr>
+            <a:r>
+              <a:rPr b="1"/>
+              <a:t>Reading the formula</a:t>
+            </a:r>
+            <a:r>
+              <a:rPr/>
+              <a:t> </a:t>
+            </a:r>
+            <a:r>
+              <a:rPr>
+                <a:latin typeface="Courier"/>
+              </a:rPr>
+              <a:t>mass_g ~ shade</a:t>
+            </a:r>
+            <a:r>
+              <a:rPr/>
+              <a:t>:</a:t>
+            </a:r>
+          </a:p>
+          <a:p>
+            <a:pPr lvl="0" indent="0" marL="0">
+              <a:buNone/>
+            </a:pPr>
+            <a:r>
+              <a:rPr/>
+              <a:t>“mass </a:t>
+            </a:r>
+            <a:r>
+              <a:rPr b="1"/>
+              <a:t>explained by</a:t>
+            </a:r>
+            <a:r>
+              <a:rPr/>
+              <a:t> shade” — the number on the left, the groups on the right.</a:t>
+            </a:r>
+          </a:p>
+          <a:p>
+            <a:pPr lvl="0" indent="0" marL="0">
+              <a:buNone/>
+            </a:pPr>
+            <a:r>
+              <a:rPr b="1"/>
+              <a:t>For today, find three numbers:</a:t>
+            </a:r>
+          </a:p>
+          <a:p>
+            <a:pPr lvl="0"/>
+            <a:r>
+              <a:rPr b="1"/>
+              <a:t>t</a:t>
+            </a:r>
+            <a:r>
+              <a:rPr/>
+              <a:t> — the signal-to-noise ratio</a:t>
+            </a:r>
+          </a:p>
+          <a:p>
+            <a:pPr lvl="0"/>
+            <a:r>
+              <a:rPr b="1"/>
+              <a:t>df</a:t>
+            </a:r>
+            <a:r>
+              <a:rPr/>
+              <a:t> — degrees of freedom</a:t>
+            </a:r>
+          </a:p>
+          <a:p>
+            <a:pPr lvl="0"/>
+            <a:r>
+              <a:rPr b="1"/>
+              <a:t>p-value</a:t>
+            </a:r>
+            <a:r>
+              <a:rPr/>
+              <a:t> — the decision number</a:t>
+            </a:r>
+          </a:p>
+          <a:p>
+            <a:pPr lvl="0" indent="0" marL="0">
+              <a:buNone/>
+            </a:pPr>
+            <a:r>
+              <a:rPr b="1"/>
+              <a:t>Next lecture:</a:t>
+            </a:r>
+            <a:r>
+              <a:rPr/>
+              <a:t> every line of this output, writing a results sentence, and the </a:t>
+            </a:r>
+            <a:r>
+              <a:rPr b="1"/>
+              <a:t>paired</a:t>
+            </a:r>
+            <a:r>
+              <a:rPr/>
+              <a:t> t-test.</a:t>
+            </a:r>
+          </a:p>
+        </p:txBody>
+      </p:sp>
+    </p:spTree>
+  </p:cSld>
+</p:sld>
+</file>
+
+<file path=ppt/slides/slide25.xml><?xml version="1.0" encoding="utf-8"?>
+<p:sld xmlns:a="http://schemas.openxmlformats.org/drawingml/2006/main" xmlns:r="http://schemas.openxmlformats.org/officeDocument/2006/relationships" xmlns:p="http://schemas.openxmlformats.org/presentationml/2006/main">
+  <p:cSld>
+    <p:spTree>
+      <p:nvGrpSpPr>
+        <p:cNvPr id="1" name=""/>
+        <p:cNvGrpSpPr/>
+        <p:nvPr/>
+      </p:nvGrpSpPr>
+      <p:grpSpPr>
+        <a:xfrm>
+          <a:off x="0" y="0"/>
+          <a:ext cx="0" cy="0"/>
+          <a:chOff x="0" y="0"/>
+          <a:chExt cx="0" cy="0"/>
+        </a:xfrm>
+      </p:grpSpPr>
+      <p:sp>
+        <p:nvSpPr>
+          <p:cNvPr id="2" name="Title 1"/>
+          <p:cNvSpPr>
+            <a:spLocks noGrp="1"/>
+          </p:cNvSpPr>
+          <p:nvPr>
+            <p:ph type="title"/>
+          </p:nvPr>
+        </p:nvSpPr>
+        <p:spPr>
+          <a:xfrm>
+            <a:off x="0" y="0"/>
+            <a:ext cx="9144000" cy="582780"/>
+          </a:xfrm>
+        </p:spPr>
+        <p:txBody>
+          <a:bodyPr/>
+          <a:lstStyle/>
+          <a:p>
+            <a:pPr lvl="0" indent="0" marL="0">
+              <a:buNone/>
+            </a:pPr>
+            <a:r>
+              <a:rPr/>
+              <a:t>→ ACTIVITY 9 Part 8 now</a:t>
+            </a:r>
+          </a:p>
+        </p:txBody>
+      </p:sp>
+      <p:sp>
+        <p:nvSpPr>
+          <p:cNvPr id="3" name="Content Placeholder 2"/>
+          <p:cNvSpPr>
+            <a:spLocks noGrp="1"/>
+          </p:cNvSpPr>
+          <p:nvPr>
+            <p:ph idx="1"/>
+          </p:nvPr>
+        </p:nvSpPr>
+        <p:spPr/>
+        <p:txBody>
+          <a:bodyPr/>
+          <a:lstStyle/>
+          <a:p>
+            <a:pPr lvl="0" indent="0" marL="0">
+              <a:buNone/>
+            </a:pPr>
+            <a:r>
+              <a:rPr b="1"/>
+              <a:t>🛑 Go to Activity 9 — Part 8</a:t>
+            </a:r>
+          </a:p>
+          <a:p>
+            <a:pPr lvl="0" indent="0" marL="0">
+              <a:buNone/>
+            </a:pPr>
+            <a:r>
+              <a:rPr/>
+              <a:t>Run the t-test and record t, df, and </a:t>
+            </a:r>
+            <a:r>
+              <a:rPr i="1"/>
+              <a:t>p</a:t>
+            </a:r>
+            <a:r>
+              <a:rPr/>
+              <a:t>. Then start </a:t>
+            </a:r>
+            <a:r>
+              <a:rPr b="1"/>
+              <a:t>Part 9 — sugar maple</a:t>
+            </a:r>
+            <a:r>
+              <a:rPr/>
+              <a:t> (Part B of your skeleton): that is what you hand in.</a:t>
+            </a:r>
+          </a:p>
+        </p:txBody>
+      </p:sp>
+    </p:spTree>
+  </p:cSld>
+</p:sld>
+</file>
+
+<file path=ppt/slides/slide26.xml><?xml version="1.0" encoding="utf-8"?>
+<p:sld xmlns:a="http://schemas.openxmlformats.org/drawingml/2006/main" xmlns:r="http://schemas.openxmlformats.org/officeDocument/2006/relationships" xmlns:p="http://schemas.openxmlformats.org/presentationml/2006/main">
+  <p:cSld>
+    <p:spTree>
+      <p:nvGrpSpPr>
+        <p:cNvPr id="1" name=""/>
+        <p:cNvGrpSpPr/>
+        <p:nvPr/>
+      </p:nvGrpSpPr>
+      <p:grpSpPr>
+        <a:xfrm>
+          <a:off x="0" y="0"/>
+          <a:ext cx="0" cy="0"/>
+          <a:chOff x="0" y="0"/>
+          <a:chExt cx="0" cy="0"/>
+        </a:xfrm>
+      </p:grpSpPr>
+      <p:sp>
+        <p:nvSpPr>
+          <p:cNvPr id="2" name="Title 1"/>
+          <p:cNvSpPr>
+            <a:spLocks noGrp="1"/>
+          </p:cNvSpPr>
+          <p:nvPr>
+            <p:ph type="title"/>
+          </p:nvPr>
+        </p:nvSpPr>
+        <p:spPr>
+          <a:xfrm>
+            <a:off x="139485" y="78119"/>
+            <a:ext cx="8229600" cy="607682"/>
+          </a:xfrm>
+        </p:spPr>
+        <p:txBody>
+          <a:bodyPr/>
+          <a:lstStyle/>
+          <a:p>
+            <a:pPr lvl="0" indent="0" marL="0">
+              <a:buNone/>
+            </a:pPr>
+            <a:r>
+              <a:rPr/>
+              <a:t>Why the Checks Matter — Next Lecture’s Choice</a:t>
+            </a:r>
+          </a:p>
+        </p:txBody>
+      </p:sp>
+      <p:sp>
+        <p:nvSpPr>
+          <p:cNvPr id="3" name="Text Placeholder 2"/>
+          <p:cNvSpPr>
+            <a:spLocks noGrp="1"/>
+          </p:cNvSpPr>
+          <p:nvPr>
+            <p:ph idx="1" type="body"/>
+          </p:nvPr>
+        </p:nvSpPr>
+        <p:spPr/>
+        <p:txBody>
+          <a:bodyPr/>
+          <a:lstStyle/>
+          <a:p>
+            <a:pPr lvl="0" indent="0" marL="0">
+              <a:buNone/>
+            </a:pPr>
+            <a:r>
+              <a:rPr/>
+              <a:t>Next lecture you run </a:t>
+            </a:r>
+            <a:r>
+              <a:rPr b="1"/>
+              <a:t>two</a:t>
+            </a:r>
+            <a:r>
+              <a:rPr/>
+              <a:t> tests on the sugar maple leaves. The checks you do today decide which version is allowed:</a:t>
+            </a:r>
+          </a:p>
+        </p:txBody>
+      </p:sp>
+      <p:graphicFrame>
+        <p:nvGraphicFramePr>
+          <p:cNvPr id="6" name="Content Placeholder 5"/>
+          <p:cNvGraphicFramePr>
+            <a:graphicFrameLocks noGrp="1"/>
+          </p:cNvGraphicFramePr>
+          <p:nvPr>
+            <p:ph idx="1"/>
+          </p:nvPr>
+        </p:nvGraphicFramePr>
+        <p:xfrm>
+          <a:off x="127000" y="1270000"/>
+          <a:ext cx="4432300" cy="3302000"/>
+        </p:xfrm>
+        <a:graphic>
+          <a:graphicData uri="http://schemas.openxmlformats.org/drawingml/2006/table">
+            <a:tbl>
+              <a:tblPr firstRow="1" bandRow="1">
+                <a:tableStyleId>{5C22544A-7EE6-4342-B048-85BDC9FD1C3A}</a:tableStyleId>
+              </a:tblPr>
+              <a:tblGrid>
+                <a:gridCol w="1333500"/>
+                <a:gridCol w="1993900"/>
+                <a:gridCol w="1104900"/>
+              </a:tblGrid>
+              <a:tr h="0">
+                <a:tc>
+                  <a:txBody>
+                    <a:bodyPr/>
+                    <a:lstStyle/>
+                    <a:p>
+                      <a:pPr lvl="0" indent="0" marL="0">
+                        <a:buNone/>
+                      </a:pPr>
+                      <a:r>
+                        <a:rPr/>
+                        <a:t>Test</a:t>
+                      </a:r>
+                    </a:p>
+                  </a:txBody>
+                  <a:tcPr/>
+                </a:tc>
+                <a:tc>
+                  <a:txBody>
+                    <a:bodyPr/>
+                    <a:lstStyle/>
+                    <a:p>
+                      <a:pPr lvl="0" indent="0" marL="0">
+                        <a:buNone/>
+                      </a:pPr>
+                      <a:r>
+                        <a:rPr/>
+                        <a:t>Must be roughly normal</a:t>
+                      </a:r>
+                    </a:p>
+                  </a:txBody>
+                  <a:tcPr/>
+                </a:tc>
+                <a:tc>
+                  <a:txBody>
+                    <a:bodyPr/>
+                    <a:lstStyle/>
+                    <a:p>
+                      <a:pPr lvl="0" indent="0" marL="0">
+                        <a:buNone/>
+                      </a:pPr>
+                      <a:r>
+                        <a:rPr/>
+                        <a:t>Equal spread needed?</a:t>
+                      </a:r>
+                    </a:p>
+                  </a:txBody>
+                  <a:tcPr/>
+                </a:tc>
+              </a:tr>
+              <a:tr h="0">
+                <a:tc>
+                  <a:txBody>
+                    <a:bodyPr/>
+                    <a:lstStyle/>
+                    <a:p>
+                      <a:pPr lvl="0" indent="0" marL="0">
+                        <a:buNone/>
+                      </a:pPr>
+                      <a:r>
+                        <a:rPr b="1"/>
+                        <a:t>Two-sample</a:t>
+                      </a:r>
+                      <a:r>
+                        <a:rPr/>
+                        <a:t> (Welch’s)</a:t>
+                      </a:r>
+                    </a:p>
+                  </a:txBody>
+                </a:tc>
+                <a:tc>
+                  <a:txBody>
+                    <a:bodyPr/>
+                    <a:lstStyle/>
+                    <a:p>
+                      <a:pPr lvl="0" indent="0" marL="0">
+                        <a:buNone/>
+                      </a:pPr>
+                      <a:r>
+                        <a:rPr/>
+                        <a:t>each group</a:t>
+                      </a:r>
+                    </a:p>
+                  </a:txBody>
+                </a:tc>
+                <a:tc>
+                  <a:txBody>
+                    <a:bodyPr/>
+                    <a:lstStyle/>
+                    <a:p>
+                      <a:pPr lvl="0" indent="0" marL="0">
+                        <a:buNone/>
+                      </a:pPr>
+                      <a:r>
+                        <a:rPr/>
+                        <a:t>No — Welch’s handles it</a:t>
+                      </a:r>
+                    </a:p>
+                  </a:txBody>
+                </a:tc>
+              </a:tr>
+              <a:tr h="0">
+                <a:tc>
+                  <a:txBody>
+                    <a:bodyPr/>
+                    <a:lstStyle/>
+                    <a:p>
+                      <a:pPr lvl="0" indent="0" marL="0">
+                        <a:buNone/>
+                      </a:pPr>
+                      <a:r>
+                        <a:rPr b="1"/>
+                        <a:t>Paired</a:t>
+                      </a:r>
+                    </a:p>
+                  </a:txBody>
+                </a:tc>
+                <a:tc>
+                  <a:txBody>
+                    <a:bodyPr/>
+                    <a:lstStyle/>
+                    <a:p>
+                      <a:pPr lvl="0" indent="0" marL="0">
+                        <a:buNone/>
+                      </a:pPr>
+                      <a:r>
+                        <a:rPr/>
+                        <a:t>the </a:t>
+                      </a:r>
+                      <a:r>
+                        <a:rPr b="1"/>
+                        <a:t>differences</a:t>
+                      </a:r>
+                      <a:r>
+                        <a:rPr/>
+                        <a:t> within each pair</a:t>
+                      </a:r>
+                    </a:p>
+                  </a:txBody>
+                </a:tc>
+                <a:tc>
+                  <a:txBody>
+                    <a:bodyPr/>
+                    <a:lstStyle/>
+                    <a:p>
+                      <a:pPr lvl="0" indent="0" marL="0">
+                        <a:buNone/>
+                      </a:pPr>
+                      <a:r>
+                        <a:rPr/>
+                        <a:t>No — only one set of numbers</a:t>
+                      </a:r>
+                    </a:p>
+                  </a:txBody>
+                </a:tc>
+              </a:tr>
+            </a:tbl>
+          </a:graphicData>
+        </a:graphic>
+      </p:graphicFrame>
+      <p:sp>
+        <p:nvSpPr>
+          <p:cNvPr id="4" name="Content Placeholder 3"/>
+          <p:cNvSpPr>
+            <a:spLocks noGrp="1"/>
+          </p:cNvSpPr>
+          <p:nvPr>
+            <p:ph idx="2" sz="half"/>
+          </p:nvPr>
+        </p:nvSpPr>
+        <p:spPr/>
+        <p:txBody>
+          <a:bodyPr/>
+          <a:lstStyle/>
+          <a:p>
+            <a:pPr lvl="0" indent="0" marL="0">
+              <a:buNone/>
+            </a:pPr>
+            <a:r>
+              <a:rPr b="1"/>
+              <a:t>If normality clearly fails</a:t>
+            </a:r>
+            <a:r>
+              <a:rPr/>
+              <a:t> → use the rank-based partner instead (next lecture).</a:t>
+            </a:r>
+          </a:p>
+        </p:txBody>
+      </p:sp>
+      <p:sp>
+        <p:nvSpPr>
+          <p:cNvPr id="5" name="Text Placeholder 4"/>
+          <p:cNvSpPr>
+            <a:spLocks noGrp="1"/>
+          </p:cNvSpPr>
+          <p:nvPr>
+            <p:ph idx="3" sz="quarter" type="body"/>
+          </p:nvPr>
+        </p:nvSpPr>
+        <p:spPr/>
+        <p:txBody>
+          <a:bodyPr/>
+          <a:lstStyle/>
+          <a:p>
+            <a:pPr lvl="0" indent="0" marL="1270000">
+              <a:buNone/>
+            </a:pPr>
+            <a:r>
+              <a:rPr sz="2000" b="1"/>
+              <a:t>Important</a:t>
+            </a:r>
+          </a:p>
+          <a:p>
+            <a:pPr lvl="0" indent="0" marL="1270000">
+              <a:buNone/>
+            </a:pPr>
+            <a:r>
+              <a:rPr sz="2000" b="1"/>
+              <a:t>Check first, test second.</a:t>
+            </a:r>
+          </a:p>
+          <a:p>
+            <a:pPr lvl="0" indent="0" marL="1270000">
+              <a:buNone/>
+            </a:pPr>
+            <a:r>
+              <a:rPr sz="2000"/>
+              <a:t>A </a:t>
+            </a:r>
+            <a:r>
+              <a:rPr sz="2000" i="1"/>
+              <a:t>p</a:t>
+            </a:r>
+            <a:r>
+              <a:rPr sz="2000"/>
+              <a:t>-value from a test whose assumptions are broken can’t be trusted — and you can’t un-see a result. Deciding the test </a:t>
+            </a:r>
+            <a:r>
+              <a:rPr sz="2000" i="1"/>
+              <a:t>before</a:t>
+            </a:r>
+            <a:r>
+              <a:rPr sz="2000"/>
+              <a:t> you run it keeps you honest.</a:t>
+            </a:r>
+          </a:p>
+          <a:p>
+            <a:pPr lvl="0" indent="0" marL="0">
+              <a:buNone/>
+            </a:pPr>
+            <a:r>
+              <a:rPr b="1"/>
+              <a:t>Your homework (Part B)</a:t>
+            </a:r>
+            <a:r>
+              <a:rPr/>
+              <a:t> is exactly this: check the sugar maple data and decide whether a t-test is OK.</a:t>
+            </a:r>
+          </a:p>
+        </p:txBody>
+      </p:sp>
+    </p:spTree>
+  </p:cSld>
+</p:sld>
+</file>
+
+<file path=ppt/slides/slide27.xml><?xml version="1.0" encoding="utf-8"?>
+<p:sld xmlns:a="http://schemas.openxmlformats.org/drawingml/2006/main" xmlns:r="http://schemas.openxmlformats.org/officeDocument/2006/relationships" xmlns:p="http://schemas.openxmlformats.org/presentationml/2006/main">
+  <p:cSld>
+    <p:spTree>
+      <p:nvGrpSpPr>
+        <p:cNvPr id="1" name=""/>
+        <p:cNvGrpSpPr/>
+        <p:nvPr/>
+      </p:nvGrpSpPr>
+      <p:grpSpPr>
+        <a:xfrm>
+          <a:off x="0" y="0"/>
+          <a:ext cx="0" cy="0"/>
+          <a:chOff x="0" y="0"/>
+          <a:chExt cx="0" cy="0"/>
+        </a:xfrm>
+      </p:grpSpPr>
+      <p:sp>
+        <p:nvSpPr>
+          <p:cNvPr id="2" name="Title 1"/>
+          <p:cNvSpPr>
+            <a:spLocks noGrp="1"/>
+          </p:cNvSpPr>
+          <p:nvPr>
+            <p:ph type="title"/>
+          </p:nvPr>
+        </p:nvSpPr>
+        <p:spPr>
+          <a:xfrm>
+            <a:off x="0" y="0"/>
             <a:ext cx="9144000" cy="602780"/>
           </a:xfrm>
           <a:solidFill>
@@ -8571,7 +7708,7 @@
             </a:r>
             <a:r>
               <a:rPr b="1"/>
-              <a:t>five-step framework</a:t>
+              <a:t>five steps</a:t>
             </a:r>
             <a:r>
               <a:rPr/>
@@ -8586,7 +7723,7 @@
             </a:r>
             <a:r>
               <a:rPr/>
-              <a:t> — use </a:t>
+              <a:t> — </a:t>
             </a:r>
             <a:r>
               <a:rPr>
@@ -8596,18 +7733,7 @@
             </a:r>
             <a:r>
               <a:rPr/>
-              <a:t> as the safe default</a:t>
-            </a:r>
-          </a:p>
-          <a:p>
-            <a:pPr lvl="0"/>
-            <a:r>
-              <a:rPr b="1"/>
-              <a:t>Two-tailed</a:t>
-            </a:r>
-            <a:r>
-              <a:rPr/>
-              <a:t> test — detects differences in either direction</a:t>
+              <a:t> is the safe default</a:t>
             </a:r>
           </a:p>
           <a:p>
@@ -8622,7 +7748,50 @@
             </a:r>
             <a:r>
               <a:rPr/>
-              <a:t> testing: normality (histogram + Shapiro-Wilk), variance (Levene’s)</a:t>
+              <a:t> testing:</a:t>
+            </a:r>
+          </a:p>
+          <a:p>
+            <a:pPr lvl="1"/>
+            <a:r>
+              <a:rPr/>
+              <a:t>normality — histograms (</a:t>
+            </a:r>
+            <a:r>
+              <a:rPr>
+                <a:latin typeface="Courier"/>
+              </a:rPr>
+              <a:t>ncol = 1</a:t>
+            </a:r>
+            <a:r>
+              <a:rPr/>
+              <a:t>), </a:t>
+            </a:r>
+            <a:r>
+              <a:rPr b="1"/>
+              <a:t>QQ plot</a:t>
+            </a:r>
+            <a:r>
+              <a:rPr/>
+              <a:t>, Shapiro-Wilk</a:t>
+            </a:r>
+          </a:p>
+          <a:p>
+            <a:pPr lvl="1"/>
+            <a:r>
+              <a:rPr/>
+              <a:t>variance — Levene’s</a:t>
+            </a:r>
+          </a:p>
+          <a:p>
+            <a:pPr lvl="0"/>
+            <a:r>
+              <a:rPr/>
+              <a:t>The QQ plot: </a:t>
+            </a:r>
+            <a:r>
+              <a:rPr b="1"/>
+              <a:t>dots on the line = normal</a:t>
             </a:r>
           </a:p>
         </p:txBody>
@@ -8647,31 +7816,19 @@
             </a:pPr>
             <a:r>
               <a:rPr b="1"/>
-              <a:t>References:</a:t>
-            </a:r>
-          </a:p>
-          <a:p>
-            <a:pPr lvl="0"/>
-            <a:r>
-              <a:rPr/>
-              <a:t>📖 Whitlock &amp; Schluter, Ch. 4 — </a:t>
-            </a:r>
-            <a:r>
-              <a:rPr i="1"/>
-              <a:t>Estimating with Uncertainty</a:t>
-            </a:r>
-          </a:p>
-          <a:p>
-            <a:pPr lvl="0"/>
-            <a:r>
-              <a:rPr/>
-              <a:t>📖 </a:t>
-            </a:r>
-            <a:r>
-              <a:rPr>
-                <a:hlinkClick r:id="rId2"/>
-              </a:rPr>
-              <a:t>R4DS §3</a:t>
+              <a:t>Hand in:</a:t>
+            </a:r>
+            <a:r>
+              <a:rPr/>
+              <a:t> Part B of your skeleton — check the assumptions for the </a:t>
+            </a:r>
+            <a:r>
+              <a:rPr b="1"/>
+              <a:t>sugar maple</a:t>
+            </a:r>
+            <a:r>
+              <a:rPr/>
+              <a:t> leaves, written by you.</a:t>
             </a:r>
           </a:p>
           <a:p>
@@ -8687,7 +7844,7 @@
             <a:pPr lvl="0"/>
             <a:r>
               <a:rPr/>
-              <a:t>Run Welch’s </a:t>
+              <a:t>Decode the </a:t>
             </a:r>
             <a:r>
               <a:rPr>
@@ -8695,19 +7852,31 @@
               </a:rPr>
               <a:t>t.test()</a:t>
             </a:r>
+            <a:r>
+              <a:rPr/>
+              <a:t> output line by line</a:t>
+            </a:r>
           </a:p>
           <a:p>
             <a:pPr lvl="0"/>
             <a:r>
               <a:rPr/>
-              <a:t>Decode the output line by line</a:t>
+              <a:t>Make a decision and write a results sentence</a:t>
             </a:r>
           </a:p>
           <a:p>
             <a:pPr lvl="0"/>
             <a:r>
               <a:rPr/>
-              <a:t>Make a formal decision and write a results sentence</a:t>
+              <a:t>Two-sample vs. </a:t>
+            </a:r>
+            <a:r>
+              <a:rPr b="1"/>
+              <a:t>paired</a:t>
+            </a:r>
+            <a:r>
+              <a:rPr/>
+              <a:t> t-tests</a:t>
             </a:r>
           </a:p>
         </p:txBody>
@@ -8815,7 +7984,7 @@
             </a:r>
             <a:r>
               <a:rPr/>
-              <a:t> null and alternate hypotheses formally</a:t>
+              <a:t> null and alternate hypotheses</a:t>
             </a:r>
           </a:p>
           <a:p>
@@ -8833,7 +8002,15 @@
             <a:pPr lvl="1"/>
             <a:r>
               <a:rPr/>
-              <a:t>normality: histogram + Shapiro-Wilk</a:t>
+              <a:t>normality: histogram, </a:t>
+            </a:r>
+            <a:r>
+              <a:rPr b="1"/>
+              <a:t>QQ plot</a:t>
+            </a:r>
+            <a:r>
+              <a:rPr/>
+              <a:t>, Shapiro-Wilk</a:t>
             </a:r>
           </a:p>
           <a:p>
@@ -8844,30 +8021,14 @@
             </a:r>
           </a:p>
           <a:p>
-            <a:pPr lvl="0" indent="0" marL="1270000">
-              <a:buNone/>
-            </a:pPr>
-            <a:r>
-              <a:rPr sz="2000" b="1"/>
-              <a:t>Tip</a:t>
-            </a:r>
-          </a:p>
-          <a:p>
-            <a:pPr lvl="0" indent="0" marL="1270000">
-              <a:buNone/>
-            </a:pPr>
-            <a:r>
-              <a:rPr sz="2000" b="1"/>
-              <a:t>🖐 Try it yourself</a:t>
-            </a:r>
-          </a:p>
-          <a:p>
-            <a:pPr lvl="0" indent="0" marL="1270000">
-              <a:buNone/>
-            </a:pPr>
-            <a:r>
-              <a:rPr sz="2000"/>
-              <a:t>By the end of today your data will be fully checked and ready to test. Next lecture, we run it.</a:t>
+            <a:pPr lvl="0"/>
+            <a:r>
+              <a:rPr b="1"/>
+              <a:t>Run</a:t>
+            </a:r>
+            <a:r>
+              <a:rPr/>
+              <a:t> the t-test (we decode it next lecture)</a:t>
             </a:r>
           </a:p>
         </p:txBody>
@@ -8901,11 +8062,47 @@
               <a:rPr>
                 <a:latin typeface="Courier"/>
               </a:rPr>
-              <a:t>car</a:t>
-            </a:r>
-            <a:r>
-              <a:rPr/>
-              <a:t> — Levene’s variance test</a:t>
+              <a:t>stat_qq()</a:t>
+            </a:r>
+            <a:r>
+              <a:rPr/>
+              <a:t> + </a:t>
+            </a:r>
+            <a:r>
+              <a:rPr>
+                <a:latin typeface="Courier"/>
+              </a:rPr>
+              <a:t>stat_qq_line()</a:t>
+            </a:r>
+            <a:r>
+              <a:rPr/>
+              <a:t> — QQ plots</a:t>
+            </a:r>
+          </a:p>
+          <a:p>
+            <a:pPr lvl="0"/>
+            <a:r>
+              <a:rPr>
+                <a:latin typeface="Courier"/>
+              </a:rPr>
+              <a:t>shapiro.test()</a:t>
+            </a:r>
+            <a:r>
+              <a:rPr/>
+              <a:t> — normality test</a:t>
+            </a:r>
+          </a:p>
+          <a:p>
+            <a:pPr lvl="0"/>
+            <a:r>
+              <a:rPr>
+                <a:latin typeface="Courier"/>
+              </a:rPr>
+              <a:t>car::leveneTest()</a:t>
+            </a:r>
+            <a:r>
+              <a:rPr/>
+              <a:t> — variance test</a:t>
             </a:r>
           </a:p>
           <a:p>
@@ -8914,50 +8111,29 @@
             </a:pPr>
             <a:r>
               <a:rPr b="1"/>
-              <a:t>References:</a:t>
+              <a:t>Reading:</a:t>
             </a:r>
           </a:p>
           <a:p>
             <a:pPr lvl="0"/>
             <a:r>
               <a:rPr/>
-              <a:t>📖 Whitlock &amp; Schluter, Ch. 4 — </a:t>
+              <a:t>📖 Whitlock &amp; Schluter, Ch. 12 — </a:t>
             </a:r>
             <a:r>
               <a:rPr i="1"/>
-              <a:t>Estimating with Uncertainty</a:t>
+              <a:t>Comparing two means</a:t>
             </a:r>
           </a:p>
           <a:p>
             <a:pPr lvl="0"/>
             <a:r>
               <a:rPr/>
-              <a:t>📖 </a:t>
-            </a:r>
-            <a:r>
-              <a:rPr>
-                <a:hlinkClick r:id="rId2"/>
-              </a:rPr>
-              <a:t>R4DS §3</a:t>
-            </a:r>
-          </a:p>
-          <a:p>
-            <a:pPr lvl="0" indent="0" marL="0">
-              <a:buNone/>
-            </a:pPr>
-            <a:r>
-              <a:rPr/>
-              <a:t>Both are in the course </a:t>
-            </a:r>
-            <a:r>
-              <a:rPr>
-                <a:latin typeface="Courier"/>
-              </a:rPr>
-              <a:t>readings/</a:t>
-            </a:r>
-            <a:r>
-              <a:rPr/>
-              <a:t> folder.</a:t>
+              <a:t>📖 Whitlock &amp; Schluter, Ch. 13 — </a:t>
+            </a:r>
+            <a:r>
+              <a:rPr i="1"/>
+              <a:t>Handling violations of assumptions</a:t>
             </a:r>
           </a:p>
           <a:p>
@@ -8973,26 +8149,26 @@
             <a:pPr lvl="0"/>
             <a:r>
               <a:rPr/>
-              <a:t>test objects → </a:t>
+              <a:t>plots → </a:t>
+            </a:r>
+            <a:r>
+              <a:rPr>
+                <a:latin typeface="Courier"/>
+              </a:rPr>
+              <a:t>_plot</a:t>
+            </a:r>
+          </a:p>
+          <a:p>
+            <a:pPr lvl="0"/>
+            <a:r>
+              <a:rPr/>
+              <a:t>test results → </a:t>
             </a:r>
             <a:r>
               <a:rPr>
                 <a:latin typeface="Courier"/>
               </a:rPr>
               <a:t>_model</a:t>
-            </a:r>
-          </a:p>
-          <a:p>
-            <a:pPr lvl="0"/>
-            <a:r>
-              <a:rPr/>
-              <a:t>plots → </a:t>
-            </a:r>
-            <a:r>
-              <a:rPr>
-                <a:latin typeface="Courier"/>
-              </a:rPr>
-              <a:t>_plot</a:t>
             </a:r>
           </a:p>
         </p:txBody>
@@ -9002,7 +8178,378 @@
 </p:sld>
 </file>
 
-<file path=ppt/slides/slide4.xml><?xml version="1.0" encoding="UTF-8"?><p:sld xmlns:a="http://schemas.openxmlformats.org/drawingml/2006/main" xmlns:r="http://schemas.openxmlformats.org/officeDocument/2006/relationships" xmlns:p="http://schemas.openxmlformats.org/presentationml/2006/main"><p:cSld><p:spTree><p:nvGrpSpPr><p:cNvPr id="1" name="" /><p:cNvGrpSpPr /><p:nvPr /></p:nvGrpSpPr><p:grpSpPr><a:xfrm><a:off x="0" y="0" /><a:ext cx="0" cy="0" /><a:chOff x="0" y="0" /><a:chExt cx="0" cy="0" /></a:xfrm></p:grpSpPr><p:sp><p:nvSpPr><p:cNvPr id="2" name="Title 1" /><p:cNvSpPr><a:spLocks noGrp="1" /></p:cNvSpPr><p:nvPr><p:ph type="title" /></p:nvPr></p:nvSpPr><p:spPr><a:xfrm><a:off x="139485" y="78119" /><a:ext cx="8229600" cy="607682" /></a:xfrm></p:spPr><p:txBody><a:bodyPr /><a:lstStyle /><a:p><a:pPr lvl="0" indent="0" marL="0"><a:buNone /></a:pPr><a:r><a:rPr /><a:t>Our Hypotheses — A Reminder</a:t></a:r></a:p></p:txBody></p:sp><p:sp><p:nvSpPr><p:cNvPr id="3" name="Text Placeholder 2" /><p:cNvSpPr><a:spLocks noGrp="1" /></p:cNvSpPr><p:nvPr><p:ph idx="1" type="body" /></p:nvPr></p:nvSpPr><p:spPr /><p:txBody><a:bodyPr /><a:lstStyle /><a:p><a:pPr lvl="0" indent="0" marL="0"><a:buNone /></a:pPr><a:r><a:rPr b="1" /><a:t>Biological prediction:</a:t></a:r></a:p><a:p><a:pPr lvl="0" indent="0" marL="0"><a:buNone /></a:pPr><a:r><a:rPr /><a:t>Shady-side leaves will be </a:t></a:r><a:r><a:rPr b="1" /><a:t>larger and heavier</a:t></a:r><a:r><a:rPr /><a:t> — they need more surface area to capture the limited light filtering through the canopy.</a:t></a:r></a:p></p:txBody></p:sp><p:graphicFrame><p:nvGraphicFramePr><p:cNvPr id="6" name="Content Placeholder 5" /><p:cNvGraphicFramePr><a:graphicFrameLocks noGrp="1" /></p:cNvGraphicFramePr><p:nvPr><p:ph idx="1" /></p:nvPr></p:nvGraphicFramePr><p:xfrm><a:off x="127000" y="1270000" /><a:ext cx="4432300" cy="3302000" /></p:xfrm><a:graphic><a:graphicData uri="http://schemas.openxmlformats.org/drawingml/2006/table"><a:tbl><a:tblPr firstRow="1" bandRow="1"><a:tableStyleId>{5C22544A-7EE6-4342-B048-85BDC9FD1C3A}</a:tableStyleId></a:tblPr><a:tblGrid><a:gridCol w="2209800" /><a:gridCol w="2209800" /></a:tblGrid><a:tr h="0"><a:tc><a:txBody><a:bodyPr /><a:lstStyle /><a:p><a:endParaRPr /></a:p></a:txBody><a:tcPr /></a:tc><a:tc><a:txBody><a:bodyPr /><a:lstStyle /><a:p><a:pPr lvl="0" indent="0" marL="0"><a:buNone /></a:pPr><a:r><a:rPr /><a:t>Formal statement</a:t></a:r></a:p></a:txBody><a:tcPr /></a:tc></a:tr><a:tr h="0"><a:tc><a:txBody><a:bodyPr /><a:lstStyle /><a:p><a:pPr lvl="0" indent="0" marL="0"><a:buNone /></a:pPr><a:r><a:rPr b="1" /><a:t>H₀ — null</a:t></a:r></a:p></a:txBody></a:tc><a:tc><a:txBody><a:bodyPr /><a:lstStyle /><a:p><a:pPr lvl="0" indent="0" marL="0"><a:buNone /></a:pPr><a14:m><m:oMath xmlns:m="http://schemas.openxmlformats.org/officeDocument/2006/math"><m:sSub><m:e><m:r><m:t>μ</m:t></m:r></m:e><m:sub><m:r><m:t>s</m:t></m:r><m:r><m:t>h</m:t></m:r><m:r><m:t>a</m:t></m:r><m:r><m:t>d</m:t></m:r><m:r><m:t>y</m:t></m:r></m:sub></m:sSub><m:r><m:rPr><m:sty m:val="p" /></m:rPr><m:t>=</m:t></m:r><m:sSub><m:e><m:r><m:t>μ</m:t></m:r></m:e><m:sub><m:r><m:t>s</m:t></m:r><m:r><m:t>u</m:t></m:r><m:r><m:t>n</m:t></m:r><m:r><m:t>n</m:t></m:r><m:r><m:t>y</m:t></m:r></m:sub></m:sSub></m:oMath></a14:m><a:r><a:rPr /><a:t> — no difference in mean leaf mass</a:t></a:r></a:p></a:txBody></a:tc></a:tr><a:tr h="0"><a:tc><a:txBody><a:bodyPr /><a:lstStyle /><a:p><a:pPr lvl="0" indent="0" marL="0"><a:buNone /></a:pPr><a:r><a:rPr b="1" /><a:t>Hₐ — alternate</a:t></a:r></a:p></a:txBody></a:tc><a:tc><a:txBody><a:bodyPr /><a:lstStyle /><a:p><a:pPr lvl="0" indent="0" marL="0"><a:buNone /></a:pPr><a14:m><m:oMath xmlns:m="http://schemas.openxmlformats.org/officeDocument/2006/math"><m:sSub><m:e><m:r><m:t>μ</m:t></m:r></m:e><m:sub><m:r><m:t>s</m:t></m:r><m:r><m:t>h</m:t></m:r><m:r><m:t>a</m:t></m:r><m:r><m:t>d</m:t></m:r><m:r><m:t>y</m:t></m:r></m:sub></m:sSub><m:r><m:rPr><m:sty m:val="p" /></m:rPr><m:t>≠</m:t></m:r><m:sSub><m:e><m:r><m:t>μ</m:t></m:r></m:e><m:sub><m:r><m:t>s</m:t></m:r><m:r><m:t>u</m:t></m:r><m:r><m:t>n</m:t></m:r><m:r><m:t>n</m:t></m:r><m:r><m:t>y</m:t></m:r></m:sub></m:sSub></m:oMath></a14:m><a:r><a:rPr /><a:t> — mean leaf mass differs by side</a:t></a:r></a:p></a:txBody></a:tc></a:tr></a:tbl></a:graphicData></a:graphic></p:graphicFrame><p:sp><p:nvSpPr><p:cNvPr id="4" name="Content Placeholder 3" /><p:cNvSpPr><a:spLocks noGrp="1" /></p:cNvSpPr><p:nvPr><p:ph idx="2" sz="half" /></p:nvPr></p:nvSpPr><p:spPr /><p:txBody><a:bodyPr /><a:lstStyle /><a:p><a:pPr lvl="0" indent="0" marL="0"><a:buNone /></a:pPr><a:r><a:rPr /><a:t>We use a </a:t></a:r><a:r><a:rPr b="1" /><a:t>two-tailed</a:t></a:r><a:r><a:rPr /><a:t> test — we will detect a difference in </a:t></a:r><a:r><a:rPr i="1" /><a:t>either</a:t></a:r><a:r><a:rPr /><a:t> direction.</a:t></a:r></a:p></p:txBody></p:sp><p:sp><p:nvSpPr><p:cNvPr id="5" name="Text Placeholder 4" /><p:cNvSpPr><a:spLocks noGrp="1" /></p:cNvSpPr><p:nvPr><p:ph idx="3" sz="quarter" type="body" /></p:nvPr></p:nvSpPr><p:spPr /><p:txBody><a:bodyPr /><a:lstStyle /><a:p><a:pPr lvl="0" indent="0" marL="0"><a:buNone /></a:pPr><a:r><a:rPr b="1" /><a:t>Why two-tailed?</a:t></a:r></a:p><a:p><a:pPr lvl="0" /><a:r><a:rPr /><a:t>We predicted shady &gt; sunny</a:t></a:r></a:p><a:p><a:pPr lvl="0" /><a:r><a:rPr /><a:t>A one-tailed test would only reject H₀ in that direction</a:t></a:r></a:p><a:p><a:pPr lvl="0" /><a:r><a:rPr /><a:t>Two-tailed is </a:t></a:r><a:r><a:rPr b="1" /><a:t>more conservative</a:t></a:r><a:r><a:rPr /><a:t> and more broadly accepted</a:t></a:r></a:p><a:p><a:pPr lvl="0" /><a:r><a:rPr /><a:t>If the result is significant two-tailed, it is also significant one-tailed</a:t></a:r></a:p><a:p><a:pPr lvl="0" indent="0" marL="0"><a:buNone /></a:pPr><a:r><a:rPr b="1" /><a:t>α = 0.05</a:t></a:r><a:r><a:rPr /><a:t> — our threshold for rejecting H₀</a:t></a:r></a:p></p:txBody></p:sp></p:spTree></p:cSld></p:sld>
+<file path=ppt/slides/slide4.xml><?xml version="1.0" encoding="utf-8"?>
+<p:sld xmlns:a="http://schemas.openxmlformats.org/drawingml/2006/main" xmlns:r="http://schemas.openxmlformats.org/officeDocument/2006/relationships" xmlns:p="http://schemas.openxmlformats.org/presentationml/2006/main">
+  <p:cSld>
+    <p:spTree>
+      <p:nvGrpSpPr>
+        <p:cNvPr id="1" name=""/>
+        <p:cNvGrpSpPr/>
+        <p:nvPr/>
+      </p:nvGrpSpPr>
+      <p:grpSpPr>
+        <a:xfrm>
+          <a:off x="0" y="0"/>
+          <a:ext cx="0" cy="0"/>
+          <a:chOff x="0" y="0"/>
+          <a:chExt cx="0" cy="0"/>
+        </a:xfrm>
+      </p:grpSpPr>
+      <p:sp>
+        <p:nvSpPr>
+          <p:cNvPr id="2" name="Title 1"/>
+          <p:cNvSpPr>
+            <a:spLocks noGrp="1"/>
+          </p:cNvSpPr>
+          <p:nvPr>
+            <p:ph type="title"/>
+          </p:nvPr>
+        </p:nvSpPr>
+        <p:spPr>
+          <a:xfrm>
+            <a:off x="0" y="0"/>
+            <a:ext cx="9144000" cy="582780"/>
+          </a:xfrm>
+        </p:spPr>
+        <p:txBody>
+          <a:bodyPr/>
+          <a:lstStyle/>
+          <a:p>
+            <a:pPr lvl="0" indent="0" marL="0">
+              <a:buNone/>
+            </a:pPr>
+            <a:r>
+              <a:rPr/>
+              <a:t>Load Libraries and Data</a:t>
+            </a:r>
+          </a:p>
+        </p:txBody>
+      </p:sp>
+      <p:sp>
+        <p:nvSpPr>
+          <p:cNvPr id="3" name="Content Placeholder 2"/>
+          <p:cNvSpPr>
+            <a:spLocks noGrp="1"/>
+          </p:cNvSpPr>
+          <p:nvPr>
+            <p:ph idx="1"/>
+          </p:nvPr>
+        </p:nvSpPr>
+        <p:spPr/>
+        <p:txBody>
+          <a:bodyPr/>
+          <a:lstStyle/>
+          <a:p>
+            <a:pPr lvl="0" indent="0">
+              <a:buNone/>
+            </a:pPr>
+            <a:r>
+              <a:rPr>
+                <a:solidFill>
+                  <a:srgbClr val="5E5E5E"/>
+                </a:solidFill>
+                <a:latin typeface="Courier"/>
+              </a:rPr>
+              <a:t># Load all packages at the top ----------------------------</a:t>
+            </a:r>
+            <a:br/>
+            <a:r>
+              <a:rPr>
+                <a:solidFill>
+                  <a:srgbClr val="4758AB"/>
+                </a:solidFill>
+                <a:latin typeface="Courier"/>
+              </a:rPr>
+              <a:t>library</a:t>
+            </a:r>
+            <a:r>
+              <a:rPr>
+                <a:solidFill>
+                  <a:srgbClr val="003B4F"/>
+                </a:solidFill>
+                <a:latin typeface="Courier"/>
+              </a:rPr>
+              <a:t>(readxl)    </a:t>
+            </a:r>
+            <a:r>
+              <a:rPr>
+                <a:solidFill>
+                  <a:srgbClr val="5E5E5E"/>
+                </a:solidFill>
+                <a:latin typeface="Courier"/>
+              </a:rPr>
+              <a:t># reading Excel files</a:t>
+            </a:r>
+            <a:br/>
+            <a:r>
+              <a:rPr>
+                <a:solidFill>
+                  <a:srgbClr val="4758AB"/>
+                </a:solidFill>
+                <a:latin typeface="Courier"/>
+              </a:rPr>
+              <a:t>library</a:t>
+            </a:r>
+            <a:r>
+              <a:rPr>
+                <a:solidFill>
+                  <a:srgbClr val="003B4F"/>
+                </a:solidFill>
+                <a:latin typeface="Courier"/>
+              </a:rPr>
+              <a:t>(tidyverse) </a:t>
+            </a:r>
+            <a:r>
+              <a:rPr>
+                <a:solidFill>
+                  <a:srgbClr val="5E5E5E"/>
+                </a:solidFill>
+                <a:latin typeface="Courier"/>
+              </a:rPr>
+              <a:t># data manipulation + ggplot2</a:t>
+            </a:r>
+            <a:br/>
+            <a:r>
+              <a:rPr>
+                <a:solidFill>
+                  <a:srgbClr val="4758AB"/>
+                </a:solidFill>
+                <a:latin typeface="Courier"/>
+              </a:rPr>
+              <a:t>library</a:t>
+            </a:r>
+            <a:r>
+              <a:rPr>
+                <a:solidFill>
+                  <a:srgbClr val="003B4F"/>
+                </a:solidFill>
+                <a:latin typeface="Courier"/>
+              </a:rPr>
+              <a:t>(janitor)   </a:t>
+            </a:r>
+            <a:r>
+              <a:rPr>
+                <a:solidFill>
+                  <a:srgbClr val="5E5E5E"/>
+                </a:solidFill>
+                <a:latin typeface="Courier"/>
+              </a:rPr>
+              <a:t># clean_names()</a:t>
+            </a:r>
+            <a:br/>
+            <a:r>
+              <a:rPr>
+                <a:solidFill>
+                  <a:srgbClr val="4758AB"/>
+                </a:solidFill>
+                <a:latin typeface="Courier"/>
+              </a:rPr>
+              <a:t>library</a:t>
+            </a:r>
+            <a:r>
+              <a:rPr>
+                <a:solidFill>
+                  <a:srgbClr val="003B4F"/>
+                </a:solidFill>
+                <a:latin typeface="Courier"/>
+              </a:rPr>
+              <a:t>(car)       </a:t>
+            </a:r>
+            <a:r>
+              <a:rPr>
+                <a:solidFill>
+                  <a:srgbClr val="5E5E5E"/>
+                </a:solidFill>
+                <a:latin typeface="Courier"/>
+              </a:rPr>
+              <a:t># Levene's test for equal variance</a:t>
+            </a:r>
+          </a:p>
+          <a:p>
+            <a:pPr lvl="0" indent="0">
+              <a:buNone/>
+            </a:pPr>
+            <a:r>
+              <a:rPr>
+                <a:solidFill>
+                  <a:srgbClr val="5E5E5E"/>
+                </a:solidFill>
+                <a:latin typeface="Courier"/>
+              </a:rPr>
+              <a:t># Load the leaf data from the data folder -----------------</a:t>
+            </a:r>
+            <a:br/>
+            <a:r>
+              <a:rPr>
+                <a:solidFill>
+                  <a:srgbClr val="003B4F"/>
+                </a:solidFill>
+                <a:latin typeface="Courier"/>
+              </a:rPr>
+              <a:t>leaf_df &lt;-</a:t>
+            </a:r>
+            <a:br/>
+            <a:r>
+              <a:rPr>
+                <a:solidFill>
+                  <a:srgbClr val="003B4F"/>
+                </a:solidFill>
+                <a:latin typeface="Courier"/>
+              </a:rPr>
+              <a:t>  </a:t>
+            </a:r>
+            <a:r>
+              <a:rPr>
+                <a:solidFill>
+                  <a:srgbClr val="4758AB"/>
+                </a:solidFill>
+                <a:latin typeface="Courier"/>
+              </a:rPr>
+              <a:t>read_excel</a:t>
+            </a:r>
+            <a:r>
+              <a:rPr>
+                <a:solidFill>
+                  <a:srgbClr val="003B4F"/>
+                </a:solidFill>
+                <a:latin typeface="Courier"/>
+              </a:rPr>
+              <a:t>(</a:t>
+            </a:r>
+            <a:r>
+              <a:rPr>
+                <a:solidFill>
+                  <a:srgbClr val="20794D"/>
+                </a:solidFill>
+                <a:latin typeface="Courier"/>
+              </a:rPr>
+              <a:t>"data/2026_09_03_data_sci_leaf_area.xlsx"</a:t>
+            </a:r>
+            <a:r>
+              <a:rPr>
+                <a:solidFill>
+                  <a:srgbClr val="003B4F"/>
+                </a:solidFill>
+                <a:latin typeface="Courier"/>
+              </a:rPr>
+              <a:t>) </a:t>
+            </a:r>
+            <a:r>
+              <a:rPr>
+                <a:solidFill>
+                  <a:srgbClr val="5E5E5E"/>
+                </a:solidFill>
+                <a:latin typeface="Courier"/>
+              </a:rPr>
+              <a:t>%&gt;%</a:t>
+            </a:r>
+            <a:br/>
+            <a:r>
+              <a:rPr>
+                <a:solidFill>
+                  <a:srgbClr val="003B4F"/>
+                </a:solidFill>
+                <a:latin typeface="Courier"/>
+              </a:rPr>
+              <a:t>  </a:t>
+            </a:r>
+            <a:r>
+              <a:rPr>
+                <a:solidFill>
+                  <a:srgbClr val="4758AB"/>
+                </a:solidFill>
+                <a:latin typeface="Courier"/>
+              </a:rPr>
+              <a:t>clean_names</a:t>
+            </a:r>
+            <a:r>
+              <a:rPr>
+                <a:solidFill>
+                  <a:srgbClr val="003B4F"/>
+                </a:solidFill>
+                <a:latin typeface="Courier"/>
+              </a:rPr>
+              <a:t>()</a:t>
+            </a:r>
+          </a:p>
+          <a:p>
+            <a:pPr lvl="0" indent="0" marL="1270000">
+              <a:buNone/>
+            </a:pPr>
+            <a:r>
+              <a:rPr sz="2000" b="1"/>
+              <a:t>Note</a:t>
+            </a:r>
+          </a:p>
+          <a:p>
+            <a:pPr lvl="0" indent="0" marL="1270000">
+              <a:buNone/>
+            </a:pPr>
+            <a:r>
+              <a:rPr sz="2000">
+                <a:latin typeface="Courier"/>
+              </a:rPr>
+              <a:t>car</a:t>
+            </a:r>
+            <a:r>
+              <a:rPr sz="2000"/>
+              <a:t> is the </a:t>
+            </a:r>
+            <a:r>
+              <a:rPr sz="2000" b="1"/>
+              <a:t>C</a:t>
+            </a:r>
+            <a:r>
+              <a:rPr sz="2000"/>
+              <a:t>ompanion to </a:t>
+            </a:r>
+            <a:r>
+              <a:rPr sz="2000" b="1"/>
+              <a:t>A</a:t>
+            </a:r>
+            <a:r>
+              <a:rPr sz="2000"/>
+              <a:t>pplied </a:t>
+            </a:r>
+            <a:r>
+              <a:rPr sz="2000" b="1"/>
+              <a:t>R</a:t>
+            </a:r>
+            <a:r>
+              <a:rPr sz="2000"/>
+              <a:t>egression package. It contains </a:t>
+            </a:r>
+            <a:r>
+              <a:rPr sz="2000">
+                <a:latin typeface="Courier"/>
+              </a:rPr>
+              <a:t>leveneTest()</a:t>
+            </a:r>
+            <a:r>
+              <a:rPr sz="2000"/>
+              <a:t>, which checks whether two groups have similar spread.</a:t>
+            </a:r>
+          </a:p>
+          <a:p>
+            <a:pPr lvl="0" indent="0" marL="1270000">
+              <a:buNone/>
+            </a:pPr>
+            <a:r>
+              <a:rPr sz="2000"/>
+              <a:t>Install once: </a:t>
+            </a:r>
+            <a:r>
+              <a:rPr sz="2000">
+                <a:latin typeface="Courier"/>
+              </a:rPr>
+              <a:t>install.packages("car")</a:t>
+            </a:r>
+          </a:p>
+        </p:txBody>
+      </p:sp>
+    </p:spTree>
+  </p:cSld>
+</p:sld>
 </file>
 
 <file path=ppt/slides/slide5.xml><?xml version="1.0" encoding="utf-8"?>
@@ -9035,11 +8582,8 @@
         <p:spPr>
           <a:xfrm>
             <a:off x="0" y="0"/>
-            <a:ext cx="9144000" cy="602780"/>
+            <a:ext cx="9144000" cy="582780"/>
           </a:xfrm>
-          <a:solidFill>
-            <a:srgbClr val="1A1A2E"/>
-          </a:solidFill>
         </p:spPr>
         <p:txBody>
           <a:bodyPr/>
@@ -9050,7 +8594,7 @@
             </a:pPr>
             <a:r>
               <a:rPr/>
-              <a:t>How to Use These Slides — Predict · Type · Run</a:t>
+              <a:t>🧩 Chunk 1 of 3 · Why We Test</a:t>
             </a:r>
           </a:p>
         </p:txBody>
@@ -9062,7 +8606,7 @@
             <a:spLocks noGrp="1"/>
           </p:cNvSpPr>
           <p:nvPr>
-            <p:ph idx="1" sz="half"/>
+            <p:ph idx="1"/>
           </p:nvPr>
         </p:nvSpPr>
         <p:spPr/>
@@ -9074,146 +8618,25 @@
               <a:buNone/>
             </a:pPr>
             <a:r>
-              <a:rPr/>
-              <a:t>This lecture runs in </a:t>
-            </a:r>
-            <a:r>
               <a:rPr b="1"/>
-              <a:t>two short chunks</a:t>
-            </a:r>
-            <a:r>
-              <a:rPr/>
-              <a:t>. After each chunk you switch to the </a:t>
-            </a:r>
+              <a:t>We will cover:</a:t>
+            </a:r>
+            <a:r>
+              <a:rPr/>
+              <a:t> why comparing means isn’t enough, the five steps we’ll use for every test this semester, what a two-sample t-test does, and why we default to Welch’s.</a:t>
+            </a:r>
+          </a:p>
+          <a:p>
+            <a:pPr lvl="0" indent="0" marL="0">
+              <a:buNone/>
+            </a:pPr>
             <a:r>
               <a:rPr b="1"/>
-              <a:t>activity</a:t>
-            </a:r>
-            <a:r>
-              <a:rPr/>
-              <a:t> and type the code yourself into your R script.</a:t>
-            </a:r>
-          </a:p>
-          <a:p>
-            <a:pPr lvl="0" indent="0" marL="0">
-              <a:buNone/>
-            </a:pPr>
-            <a:r>
-              <a:rPr b="1"/>
-              <a:t>For every code block, do three things:</a:t>
-            </a:r>
-          </a:p>
-          <a:p>
-            <a:pPr lvl="0" indent="-342900" marL="342900">
-              <a:buAutoNum type="arabicPeriod"/>
-            </a:pPr>
-            <a:r>
-              <a:rPr b="1"/>
-              <a:t>Predict</a:t>
-            </a:r>
-            <a:r>
-              <a:rPr/>
-              <a:t> — before it runs, say what you think the output will be</a:t>
-            </a:r>
-          </a:p>
-          <a:p>
-            <a:pPr lvl="0" indent="-342900" marL="342900">
-              <a:buAutoNum type="arabicPeriod"/>
-            </a:pPr>
-            <a:r>
-              <a:rPr b="1"/>
-              <a:t>Type</a:t>
-            </a:r>
-            <a:r>
-              <a:rPr/>
-              <a:t> it out by hand — do not copy-paste</a:t>
-            </a:r>
-          </a:p>
-          <a:p>
-            <a:pPr lvl="0" indent="-342900" marL="342900">
-              <a:buAutoNum type="arabicPeriod"/>
-            </a:pPr>
-            <a:r>
-              <a:rPr b="1"/>
-              <a:t>Run</a:t>
-            </a:r>
-            <a:r>
-              <a:rPr/>
-              <a:t> it and compare to your prediction</a:t>
-            </a:r>
-          </a:p>
-        </p:txBody>
-      </p:sp>
-      <p:sp>
-        <p:nvSpPr>
-          <p:cNvPr id="4" name="Content Placeholder 3"/>
-          <p:cNvSpPr>
-            <a:spLocks noGrp="1"/>
-          </p:cNvSpPr>
-          <p:nvPr>
-            <p:ph idx="2" sz="half"/>
-          </p:nvPr>
-        </p:nvSpPr>
-        <p:spPr/>
-        <p:txBody>
-          <a:bodyPr/>
-          <a:lstStyle/>
-          <a:p>
-            <a:pPr lvl="0" indent="0" marL="1270000">
-              <a:buNone/>
-            </a:pPr>
-            <a:r>
-              <a:rPr sz="2000" b="1"/>
-              <a:t>Note</a:t>
-            </a:r>
-          </a:p>
-          <a:p>
-            <a:pPr lvl="0" indent="0" marL="1270000">
-              <a:buNone/>
-            </a:pPr>
-            <a:r>
-              <a:rPr sz="2000" b="1"/>
-              <a:t>✅ Why bother? (the evidence)</a:t>
-            </a:r>
-          </a:p>
-          <a:p>
-            <a:pPr lvl="0"/>
-            <a:r>
-              <a:rPr sz="2000"/>
-              <a:t>A </a:t>
-            </a:r>
-            <a:r>
-              <a:rPr sz="2000" i="1"/>
-              <a:t>p</a:t>
-            </a:r>
-            <a:r>
-              <a:rPr sz="2000"/>
-              <a:t>-value is easy to memorize and hard to actually understand. Guessing “above or below 0.05” </a:t>
-            </a:r>
-            <a:r>
-              <a:rPr sz="2000" i="1"/>
-              <a:t>before</a:t>
-            </a:r>
-            <a:r>
-              <a:rPr sz="2000"/>
-              <a:t> you see a test result forces you to reason about the test instead of reading a number off the screen.</a:t>
-            </a:r>
-          </a:p>
-          <a:p>
-            <a:pPr lvl="0"/>
-            <a:r>
-              <a:rPr sz="2000"/>
-              <a:t>Typing </a:t>
-            </a:r>
-            <a:r>
-              <a:rPr sz="2000">
-                <a:latin typeface="Courier"/>
-              </a:rPr>
-              <a:t>var.equal = FALSE</a:t>
-            </a:r>
-            <a:r>
-              <a:rPr sz="2000"/>
-              <a:t> yourself — rather than pasting it — is what makes you notice it’s there at all, instead of skating past the one argument that separates Welch’s from the standard t-test.</a:t>
+              <a:t>🛑 After this chunk: Activity Parts 1–2</a:t>
+            </a:r>
+            <a:r>
+              <a:rPr/>
+              <a:t> (load data, recap the descriptive stats).</a:t>
             </a:r>
           </a:p>
         </p:txBody>
@@ -9252,474 +8675,6 @@
         </p:nvSpPr>
         <p:spPr>
           <a:xfrm>
-            <a:off x="0" y="0"/>
-            <a:ext cx="9144000" cy="582780"/>
-          </a:xfrm>
-        </p:spPr>
-        <p:txBody>
-          <a:bodyPr/>
-          <a:lstStyle/>
-          <a:p>
-            <a:pPr lvl="0" indent="0" marL="0">
-              <a:buNone/>
-            </a:pPr>
-            <a:r>
-              <a:rPr/>
-              <a:t>Load Libraries and Data</a:t>
-            </a:r>
-          </a:p>
-        </p:txBody>
-      </p:sp>
-      <p:sp>
-        <p:nvSpPr>
-          <p:cNvPr id="3" name="Content Placeholder 2"/>
-          <p:cNvSpPr>
-            <a:spLocks noGrp="1"/>
-          </p:cNvSpPr>
-          <p:nvPr>
-            <p:ph idx="1"/>
-          </p:nvPr>
-        </p:nvSpPr>
-        <p:spPr/>
-        <p:txBody>
-          <a:bodyPr/>
-          <a:lstStyle/>
-          <a:p>
-            <a:pPr lvl="0" indent="0">
-              <a:buNone/>
-            </a:pPr>
-            <a:r>
-              <a:rPr>
-                <a:solidFill>
-                  <a:srgbClr val="5E5E5E"/>
-                </a:solidFill>
-                <a:latin typeface="Courier"/>
-              </a:rPr>
-              <a:t># Load all packages at the top ----------------------------</a:t>
-            </a:r>
-            <a:br/>
-            <a:r>
-              <a:rPr>
-                <a:solidFill>
-                  <a:srgbClr val="4758AB"/>
-                </a:solidFill>
-                <a:latin typeface="Courier"/>
-              </a:rPr>
-              <a:t>library</a:t>
-            </a:r>
-            <a:r>
-              <a:rPr>
-                <a:solidFill>
-                  <a:srgbClr val="003B4F"/>
-                </a:solidFill>
-                <a:latin typeface="Courier"/>
-              </a:rPr>
-              <a:t>(readxl) </a:t>
-            </a:r>
-            <a:r>
-              <a:rPr>
-                <a:solidFill>
-                  <a:srgbClr val="5E5E5E"/>
-                </a:solidFill>
-                <a:latin typeface="Courier"/>
-              </a:rPr>
-              <a:t># reading Excel files</a:t>
-            </a:r>
-            <a:br/>
-            <a:r>
-              <a:rPr>
-                <a:solidFill>
-                  <a:srgbClr val="4758AB"/>
-                </a:solidFill>
-                <a:latin typeface="Courier"/>
-              </a:rPr>
-              <a:t>library</a:t>
-            </a:r>
-            <a:r>
-              <a:rPr>
-                <a:solidFill>
-                  <a:srgbClr val="003B4F"/>
-                </a:solidFill>
-                <a:latin typeface="Courier"/>
-              </a:rPr>
-              <a:t>(tidyverse) </a:t>
-            </a:r>
-            <a:r>
-              <a:rPr>
-                <a:solidFill>
-                  <a:srgbClr val="5E5E5E"/>
-                </a:solidFill>
-                <a:latin typeface="Courier"/>
-              </a:rPr>
-              <a:t># data manipulation + ggplot2</a:t>
-            </a:r>
-            <a:br/>
-            <a:r>
-              <a:rPr>
-                <a:solidFill>
-                  <a:srgbClr val="4758AB"/>
-                </a:solidFill>
-                <a:latin typeface="Courier"/>
-              </a:rPr>
-              <a:t>library</a:t>
-            </a:r>
-            <a:r>
-              <a:rPr>
-                <a:solidFill>
-                  <a:srgbClr val="003B4F"/>
-                </a:solidFill>
-                <a:latin typeface="Courier"/>
-              </a:rPr>
-              <a:t>(janitor) </a:t>
-            </a:r>
-            <a:r>
-              <a:rPr>
-                <a:solidFill>
-                  <a:srgbClr val="5E5E5E"/>
-                </a:solidFill>
-                <a:latin typeface="Courier"/>
-              </a:rPr>
-              <a:t># clean_names()</a:t>
-            </a:r>
-            <a:br/>
-            <a:r>
-              <a:rPr>
-                <a:solidFill>
-                  <a:srgbClr val="4758AB"/>
-                </a:solidFill>
-                <a:latin typeface="Courier"/>
-              </a:rPr>
-              <a:t>library</a:t>
-            </a:r>
-            <a:r>
-              <a:rPr>
-                <a:solidFill>
-                  <a:srgbClr val="003B4F"/>
-                </a:solidFill>
-                <a:latin typeface="Courier"/>
-              </a:rPr>
-              <a:t>(car) </a:t>
-            </a:r>
-            <a:r>
-              <a:rPr>
-                <a:solidFill>
-                  <a:srgbClr val="5E5E5E"/>
-                </a:solidFill>
-                <a:latin typeface="Courier"/>
-              </a:rPr>
-              <a:t># Levene's test for variance equality</a:t>
-            </a:r>
-          </a:p>
-          <a:p>
-            <a:pPr lvl="0" indent="0">
-              <a:buNone/>
-            </a:pPr>
-            <a:r>
-              <a:rPr>
-                <a:solidFill>
-                  <a:srgbClr val="5E5E5E"/>
-                </a:solidFill>
-                <a:latin typeface="Courier"/>
-              </a:rPr>
-              <a:t># Load the leaf data from the data folder -----------------</a:t>
-            </a:r>
-            <a:br/>
-            <a:r>
-              <a:rPr>
-                <a:solidFill>
-                  <a:srgbClr val="003B4F"/>
-                </a:solidFill>
-                <a:latin typeface="Courier"/>
-              </a:rPr>
-              <a:t>leaf_df &lt;-</a:t>
-            </a:r>
-            <a:br/>
-            <a:r>
-              <a:rPr>
-                <a:solidFill>
-                  <a:srgbClr val="003B4F"/>
-                </a:solidFill>
-                <a:latin typeface="Courier"/>
-              </a:rPr>
-              <a:t>  </a:t>
-            </a:r>
-            <a:r>
-              <a:rPr>
-                <a:solidFill>
-                  <a:srgbClr val="4758AB"/>
-                </a:solidFill>
-                <a:latin typeface="Courier"/>
-              </a:rPr>
-              <a:t>read_excel</a:t>
-            </a:r>
-            <a:r>
-              <a:rPr>
-                <a:solidFill>
-                  <a:srgbClr val="003B4F"/>
-                </a:solidFill>
-                <a:latin typeface="Courier"/>
-              </a:rPr>
-              <a:t>(</a:t>
-            </a:r>
-            <a:r>
-              <a:rPr>
-                <a:solidFill>
-                  <a:srgbClr val="20794D"/>
-                </a:solidFill>
-                <a:latin typeface="Courier"/>
-              </a:rPr>
-              <a:t>"data/2026_09_03_data_sci_leaf_area.xlsx"</a:t>
-            </a:r>
-            <a:r>
-              <a:rPr>
-                <a:solidFill>
-                  <a:srgbClr val="003B4F"/>
-                </a:solidFill>
-                <a:latin typeface="Courier"/>
-              </a:rPr>
-              <a:t>) </a:t>
-            </a:r>
-            <a:r>
-              <a:rPr>
-                <a:solidFill>
-                  <a:srgbClr val="5E5E5E"/>
-                </a:solidFill>
-                <a:latin typeface="Courier"/>
-              </a:rPr>
-              <a:t>%&gt;%</a:t>
-            </a:r>
-            <a:br/>
-            <a:r>
-              <a:rPr>
-                <a:solidFill>
-                  <a:srgbClr val="003B4F"/>
-                </a:solidFill>
-                <a:latin typeface="Courier"/>
-              </a:rPr>
-              <a:t>  </a:t>
-            </a:r>
-            <a:r>
-              <a:rPr>
-                <a:solidFill>
-                  <a:srgbClr val="4758AB"/>
-                </a:solidFill>
-                <a:latin typeface="Courier"/>
-              </a:rPr>
-              <a:t>clean_names</a:t>
-            </a:r>
-            <a:r>
-              <a:rPr>
-                <a:solidFill>
-                  <a:srgbClr val="003B4F"/>
-                </a:solidFill>
-                <a:latin typeface="Courier"/>
-              </a:rPr>
-              <a:t>()</a:t>
-            </a:r>
-          </a:p>
-          <a:p>
-            <a:pPr lvl="0" indent="0" marL="1270000">
-              <a:buNone/>
-            </a:pPr>
-            <a:r>
-              <a:rPr sz="2000" b="1"/>
-              <a:t>Note</a:t>
-            </a:r>
-          </a:p>
-          <a:p>
-            <a:pPr lvl="0" indent="0" marL="1270000">
-              <a:buNone/>
-            </a:pPr>
-            <a:r>
-              <a:rPr sz="2000">
-                <a:latin typeface="Courier"/>
-              </a:rPr>
-              <a:t>car</a:t>
-            </a:r>
-            <a:r>
-              <a:rPr sz="2000"/>
-              <a:t> is the </a:t>
-            </a:r>
-            <a:r>
-              <a:rPr sz="2000" b="1"/>
-              <a:t>C</a:t>
-            </a:r>
-            <a:r>
-              <a:rPr sz="2000"/>
-              <a:t>ompanion to </a:t>
-            </a:r>
-            <a:r>
-              <a:rPr sz="2000" b="1"/>
-              <a:t>A</a:t>
-            </a:r>
-            <a:r>
-              <a:rPr sz="2000"/>
-              <a:t>pplied </a:t>
-            </a:r>
-            <a:r>
-              <a:rPr sz="2000" b="1"/>
-              <a:t>R</a:t>
-            </a:r>
-            <a:r>
-              <a:rPr sz="2000"/>
-              <a:t>egression package. It contains </a:t>
-            </a:r>
-            <a:r>
-              <a:rPr sz="2000">
-                <a:latin typeface="Courier"/>
-              </a:rPr>
-              <a:t>leveneTest()</a:t>
-            </a:r>
-            <a:r>
-              <a:rPr sz="2000"/>
-              <a:t>, which we use to check whether our two groups have similar variance.</a:t>
-            </a:r>
-          </a:p>
-          <a:p>
-            <a:pPr lvl="0" indent="0" marL="1270000">
-              <a:buNone/>
-            </a:pPr>
-            <a:r>
-              <a:rPr sz="2000"/>
-              <a:t>Install once: </a:t>
-            </a:r>
-            <a:r>
-              <a:rPr sz="2000">
-                <a:latin typeface="Courier"/>
-              </a:rPr>
-              <a:t>install.packages("car")</a:t>
-            </a:r>
-          </a:p>
-        </p:txBody>
-      </p:sp>
-    </p:spTree>
-  </p:cSld>
-</p:sld>
-</file>
-
-<file path=ppt/slides/slide7.xml><?xml version="1.0" encoding="utf-8"?>
-<p:sld xmlns:a="http://schemas.openxmlformats.org/drawingml/2006/main" xmlns:r="http://schemas.openxmlformats.org/officeDocument/2006/relationships" xmlns:p="http://schemas.openxmlformats.org/presentationml/2006/main">
-  <p:cSld>
-    <p:spTree>
-      <p:nvGrpSpPr>
-        <p:cNvPr id="1" name=""/>
-        <p:cNvGrpSpPr/>
-        <p:nvPr/>
-      </p:nvGrpSpPr>
-      <p:grpSpPr>
-        <a:xfrm>
-          <a:off x="0" y="0"/>
-          <a:ext cx="0" cy="0"/>
-          <a:chOff x="0" y="0"/>
-          <a:chExt cx="0" cy="0"/>
-        </a:xfrm>
-      </p:grpSpPr>
-      <p:sp>
-        <p:nvSpPr>
-          <p:cNvPr id="2" name="Title 1"/>
-          <p:cNvSpPr>
-            <a:spLocks noGrp="1"/>
-          </p:cNvSpPr>
-          <p:nvPr>
-            <p:ph type="title"/>
-          </p:nvPr>
-        </p:nvSpPr>
-        <p:spPr>
-          <a:xfrm>
-            <a:off x="0" y="0"/>
-            <a:ext cx="9144000" cy="582780"/>
-          </a:xfrm>
-        </p:spPr>
-        <p:txBody>
-          <a:bodyPr/>
-          <a:lstStyle/>
-          <a:p>
-            <a:pPr lvl="0" indent="0" marL="0">
-              <a:buNone/>
-            </a:pPr>
-            <a:r>
-              <a:rPr/>
-              <a:t>🧩 Chunk 1 of 2 · Why We Test &amp; the t-Statistic</a:t>
-            </a:r>
-          </a:p>
-        </p:txBody>
-      </p:sp>
-      <p:sp>
-        <p:nvSpPr>
-          <p:cNvPr id="3" name="Content Placeholder 2"/>
-          <p:cNvSpPr>
-            <a:spLocks noGrp="1"/>
-          </p:cNvSpPr>
-          <p:nvPr>
-            <p:ph idx="1"/>
-          </p:nvPr>
-        </p:nvSpPr>
-        <p:spPr/>
-        <p:txBody>
-          <a:bodyPr/>
-          <a:lstStyle/>
-          <a:p>
-            <a:pPr lvl="0" indent="0" marL="0">
-              <a:buNone/>
-            </a:pPr>
-            <a:r>
-              <a:rPr b="1"/>
-              <a:t>We will cover:</a:t>
-            </a:r>
-            <a:r>
-              <a:rPr/>
-              <a:t> why comparing means isn’t enough, the five-step framework we’ll use for every test this semester, what a two-sample t-test is, and why we default to Welch’s.</a:t>
-            </a:r>
-          </a:p>
-          <a:p>
-            <a:pPr lvl="0" indent="0" marL="0">
-              <a:buNone/>
-            </a:pPr>
-            <a:r>
-              <a:rPr b="1"/>
-              <a:t>🛑 After this chunk: Activity Parts 1–2</a:t>
-            </a:r>
-            <a:r>
-              <a:rPr/>
-              <a:t> (load data, recap the descriptive stats).</a:t>
-            </a:r>
-          </a:p>
-        </p:txBody>
-      </p:sp>
-    </p:spTree>
-  </p:cSld>
-</p:sld>
-</file>
-
-<file path=ppt/slides/slide8.xml><?xml version="1.0" encoding="utf-8"?>
-<p:sld xmlns:a="http://schemas.openxmlformats.org/drawingml/2006/main" xmlns:r="http://schemas.openxmlformats.org/officeDocument/2006/relationships" xmlns:p="http://schemas.openxmlformats.org/presentationml/2006/main">
-  <p:cSld>
-    <p:spTree>
-      <p:nvGrpSpPr>
-        <p:cNvPr id="1" name=""/>
-        <p:cNvGrpSpPr/>
-        <p:nvPr/>
-      </p:nvGrpSpPr>
-      <p:grpSpPr>
-        <a:xfrm>
-          <a:off x="0" y="0"/>
-          <a:ext cx="0" cy="0"/>
-          <a:chOff x="0" y="0"/>
-          <a:chExt cx="0" cy="0"/>
-        </a:xfrm>
-      </p:grpSpPr>
-      <p:sp>
-        <p:nvSpPr>
-          <p:cNvPr id="2" name="Title 1"/>
-          <p:cNvSpPr>
-            <a:spLocks noGrp="1"/>
-          </p:cNvSpPr>
-          <p:nvPr>
-            <p:ph type="title"/>
-          </p:nvPr>
-        </p:nvSpPr>
-        <p:spPr>
-          <a:xfrm>
             <a:off x="139485" y="78119"/>
             <a:ext cx="8229600" cy="607682"/>
           </a:xfrm>
@@ -9910,7 +8865,7 @@
                 </a:solidFill>
                 <a:latin typeface="Courier"/>
               </a:rPr>
-              <a:t>geom_point</a:t>
+              <a:t>geom_jitter</a:t>
             </a:r>
             <a:r>
               <a:rPr>
@@ -9921,16 +8876,6 @@
               </a:rPr>
               <a:t>(</a:t>
             </a:r>
-            <a:br/>
-            <a:r>
-              <a:rPr>
-                <a:solidFill>
-                  <a:srgbClr val="003B4F"/>
-                </a:solidFill>
-                <a:latin typeface="Courier"/>
-              </a:rPr>
-              <a:t>    </a:t>
-            </a:r>
             <a:r>
               <a:rPr>
                 <a:solidFill>
@@ -9938,7 +8883,7 @@
                 </a:solidFill>
                 <a:latin typeface="Courier"/>
               </a:rPr>
-              <a:t>position =</a:t>
+              <a:t>width =</a:t>
             </a:r>
             <a:r>
               <a:rPr>
@@ -9952,20 +8897,20 @@
             <a:r>
               <a:rPr>
                 <a:solidFill>
-                  <a:srgbClr val="4758AB"/>
-                </a:solidFill>
-                <a:latin typeface="Courier"/>
-              </a:rPr>
-              <a:t>position_jitter</a:t>
-            </a:r>
-            <a:r>
-              <a:rPr>
-                <a:solidFill>
-                  <a:srgbClr val="003B4F"/>
-                </a:solidFill>
-                <a:latin typeface="Courier"/>
-              </a:rPr>
-              <a:t>(</a:t>
+                  <a:srgbClr val="AD0000"/>
+                </a:solidFill>
+                <a:latin typeface="Courier"/>
+              </a:rPr>
+              <a:t>0.15</a:t>
+            </a:r>
+            <a:r>
+              <a:rPr>
+                <a:solidFill>
+                  <a:srgbClr val="003B4F"/>
+                </a:solidFill>
+                <a:latin typeface="Courier"/>
+              </a:rPr>
+              <a:t>, </a:t>
             </a:r>
             <a:r>
               <a:rPr>
@@ -9974,7 +8919,7 @@
                 </a:solidFill>
                 <a:latin typeface="Courier"/>
               </a:rPr>
-              <a:t>width =</a:t>
+              <a:t>alpha =</a:t>
             </a:r>
             <a:r>
               <a:rPr>
@@ -9992,7 +8937,7 @@
                 </a:solidFill>
                 <a:latin typeface="Courier"/>
               </a:rPr>
-              <a:t>0.15</a:t>
+              <a:t>0.5</a:t>
             </a:r>
             <a:r>
               <a:rPr>
@@ -10010,7 +8955,7 @@
                 </a:solidFill>
                 <a:latin typeface="Courier"/>
               </a:rPr>
-              <a:t>seed =</a:t>
+              <a:t>size =</a:t>
             </a:r>
             <a:r>
               <a:rPr>
@@ -10028,109 +8973,16 @@
                 </a:solidFill>
                 <a:latin typeface="Courier"/>
               </a:rPr>
-              <a:t>42</a:t>
-            </a:r>
-            <a:r>
-              <a:rPr>
-                <a:solidFill>
-                  <a:srgbClr val="003B4F"/>
-                </a:solidFill>
-                <a:latin typeface="Courier"/>
-              </a:rPr>
-              <a:t>),</a:t>
-            </a:r>
-            <a:br/>
-            <a:r>
-              <a:rPr>
-                <a:solidFill>
-                  <a:srgbClr val="003B4F"/>
-                </a:solidFill>
-                <a:latin typeface="Courier"/>
-              </a:rPr>
-              <a:t>    </a:t>
-            </a:r>
-            <a:r>
-              <a:rPr>
-                <a:solidFill>
-                  <a:srgbClr val="657422"/>
-                </a:solidFill>
-                <a:latin typeface="Courier"/>
-              </a:rPr>
-              <a:t>alpha =</a:t>
-            </a:r>
-            <a:r>
-              <a:rPr>
-                <a:solidFill>
-                  <a:srgbClr val="003B4F"/>
-                </a:solidFill>
-                <a:latin typeface="Courier"/>
-              </a:rPr>
-              <a:t> </a:t>
-            </a:r>
-            <a:r>
-              <a:rPr>
-                <a:solidFill>
-                  <a:srgbClr val="AD0000"/>
-                </a:solidFill>
-                <a:latin typeface="Courier"/>
-              </a:rPr>
-              <a:t>0.5</a:t>
-            </a:r>
-            <a:r>
-              <a:rPr>
-                <a:solidFill>
-                  <a:srgbClr val="003B4F"/>
-                </a:solidFill>
-                <a:latin typeface="Courier"/>
-              </a:rPr>
-              <a:t>,</a:t>
-            </a:r>
-            <a:br/>
-            <a:r>
-              <a:rPr>
-                <a:solidFill>
-                  <a:srgbClr val="003B4F"/>
-                </a:solidFill>
-                <a:latin typeface="Courier"/>
-              </a:rPr>
-              <a:t>    </a:t>
-            </a:r>
-            <a:r>
-              <a:rPr>
-                <a:solidFill>
-                  <a:srgbClr val="657422"/>
-                </a:solidFill>
-                <a:latin typeface="Courier"/>
-              </a:rPr>
-              <a:t>size =</a:t>
-            </a:r>
-            <a:r>
-              <a:rPr>
-                <a:solidFill>
-                  <a:srgbClr val="003B4F"/>
-                </a:solidFill>
-                <a:latin typeface="Courier"/>
-              </a:rPr>
-              <a:t> </a:t>
-            </a:r>
-            <a:r>
-              <a:rPr>
-                <a:solidFill>
-                  <a:srgbClr val="AD0000"/>
-                </a:solidFill>
-                <a:latin typeface="Courier"/>
-              </a:rPr>
               <a:t>2</a:t>
             </a:r>
-            <a:br/>
-            <a:r>
-              <a:rPr>
-                <a:solidFill>
-                  <a:srgbClr val="003B4F"/>
-                </a:solidFill>
-                <a:latin typeface="Courier"/>
-              </a:rPr>
-              <a:t>  ) </a:t>
+            <a:r>
+              <a:rPr>
+                <a:solidFill>
+                  <a:srgbClr val="003B4F"/>
+                </a:solidFill>
+                <a:latin typeface="Courier"/>
+              </a:rPr>
+              <a:t>) </a:t>
             </a:r>
             <a:r>
               <a:rPr>
@@ -10786,7 +9638,7 @@
             <a:pPr lvl="0"/>
             <a:r>
               <a:rPr/>
-              <a:t>The groups’ ranges </a:t>
+              <a:t>The groups </a:t>
             </a:r>
             <a:r>
               <a:rPr b="1"/>
@@ -10807,7 +9659,7 @@
             </a:r>
             <a:r>
               <a:rPr/>
-              <a:t>-value tells us:</a:t>
+              <a:t>-value answers:</a:t>
             </a:r>
           </a:p>
           <a:p>
@@ -10816,7 +9668,7 @@
             </a:pPr>
             <a:r>
               <a:rPr sz="2000" i="1"/>
-              <a:t>“If H₀ were true, how often would we see a gap at least this large just by chance?”</a:t>
+              <a:t>“If there were really no difference, how often would we see a gap at least this big just by chance?”</a:t>
             </a:r>
           </a:p>
           <a:p>
@@ -10833,7 +9685,7 @@
             </a:r>
             <a:r>
               <a:rPr/>
-              <a:t> → a gap this small is nothing unusual.</a:t>
+              <a:t> → a gap this size is nothing unusual.</a:t>
             </a:r>
           </a:p>
         </p:txBody>
@@ -10843,7 +9695,7 @@
 </p:sld>
 </file>
 
-<file path=ppt/slides/slide9.xml><?xml version="1.0" encoding="utf-8"?>
+<file path=ppt/slides/slide7.xml><?xml version="1.0" encoding="utf-8"?>
 <p:sld xmlns:a="http://schemas.openxmlformats.org/drawingml/2006/main" xmlns:r="http://schemas.openxmlformats.org/officeDocument/2006/relationships" xmlns:p="http://schemas.openxmlformats.org/presentationml/2006/main">
   <p:cSld>
     <p:spTree>
@@ -10910,7 +9762,7 @@
             </a:pPr>
             <a:r>
               <a:rPr/>
-              <a:t>Every hypothesis test this semester — t-test, ANOVA, regression — follows the same sequence:</a:t>
+              <a:t>Every hypothesis test this semester — t-test, ANOVA, regression — follows the same steps:</a:t>
             </a:r>
           </a:p>
         </p:txBody>
@@ -10936,9 +9788,9 @@
                 <a:tableStyleId>{5C22544A-7EE6-4342-B048-85BDC9FD1C3A}</a:tableStyleId>
               </a:tblPr>
               <a:tblGrid>
-                <a:gridCol w="1473200"/>
-                <a:gridCol w="1473200"/>
-                <a:gridCol w="1473200"/>
+                <a:gridCol w="533400"/>
+                <a:gridCol w="2565400"/>
+                <a:gridCol w="1333500"/>
               </a:tblGrid>
               <a:tr h="0">
                 <a:tc>
@@ -11118,7 +9970,7 @@
                       </a:r>
                       <a:r>
                         <a:rPr b="1"/>
-                        <a:t>variance</a:t>
+                        <a:t>equal variance</a:t>
                       </a:r>
                     </a:p>
                   </a:txBody>
@@ -11184,7 +10036,7 @@
                       </a:pPr>
                       <a:r>
                         <a:rPr/>
-                        <a:t>Next lecture</a:t>
+                        <a:t>Today (a first look)</a:t>
                       </a:r>
                     </a:p>
                   </a:txBody>
@@ -11287,7 +10139,7 @@
             </a:pPr>
             <a:r>
               <a:rPr sz="2000"/>
-              <a:t>If your data seriously violate assumptions, the </a:t>
+              <a:t>If the data badly break the assumptions, the </a:t>
             </a:r>
             <a:r>
               <a:rPr sz="2000" i="1"/>
@@ -11295,7 +10147,7 @@
             </a:r>
             <a:r>
               <a:rPr sz="2000"/>
-              <a:t>-value from the t-test is unreliable.</a:t>
+              <a:t>-value can’t be trusted.</a:t>
             </a:r>
           </a:p>
           <a:p>
@@ -11304,15 +10156,206 @@
             </a:pPr>
             <a:r>
               <a:rPr sz="2000"/>
-              <a:t>With ~25 per group, our main concern is </a:t>
+              <a:t>With ~25 per group our main worry is </a:t>
             </a:r>
             <a:r>
               <a:rPr sz="2000" b="1"/>
-              <a:t>gross non-normality</a:t>
+              <a:t>badly</a:t>
             </a:r>
             <a:r>
               <a:rPr sz="2000"/>
-              <a:t>. The t-test is quite robust to mild departures.</a:t>
+              <a:t> non-normal data. The t-test handles mild departures fine.</a:t>
+            </a:r>
+          </a:p>
+        </p:txBody>
+      </p:sp>
+    </p:spTree>
+  </p:cSld>
+</p:sld>
+</file>
+
+<file path=ppt/slides/slide8.xml><?xml version="1.0" encoding="UTF-8"?><p:sld xmlns:a="http://schemas.openxmlformats.org/drawingml/2006/main" xmlns:r="http://schemas.openxmlformats.org/officeDocument/2006/relationships" xmlns:p="http://schemas.openxmlformats.org/presentationml/2006/main"><p:cSld><p:spTree><p:nvGrpSpPr><p:cNvPr id="1" name="" /><p:cNvGrpSpPr /><p:nvPr /></p:nvGrpSpPr><p:grpSpPr><a:xfrm><a:off x="0" y="0" /><a:ext cx="0" cy="0" /><a:chOff x="0" y="0" /><a:chExt cx="0" cy="0" /></a:xfrm></p:grpSpPr><p:sp><p:nvSpPr><p:cNvPr id="2" name="Title 1" /><p:cNvSpPr><a:spLocks noGrp="1" /></p:cNvSpPr><p:nvPr><p:ph type="title" /></p:nvPr></p:nvSpPr><p:spPr><a:xfrm><a:off x="0" y="0" /><a:ext cx="9144000" cy="602780" /></a:xfrm><a:solidFill><a:srgbClr val="1A1A2E" /></a:solidFill></p:spPr><p:txBody><a:bodyPr /><a:lstStyle /><a:p><a:pPr lvl="0" indent="0" marL="0"><a:buNone /></a:pPr><a:r><a:rPr /><a:t>What Is a Two-Sample t-Test?</a:t></a:r></a:p></p:txBody></p:sp><mc:AlternateContent xmlns:mc="http://schemas.openxmlformats.org/markup-compatibility/2006"><mc:Choice xmlns:a14="http://schemas.microsoft.com/office/drawing/2010/main" Requires="a14"><p:sp><p:nvSpPr><p:cNvPr id="3" name="Content Placeholder 2" /><p:cNvSpPr><a:spLocks noGrp="1" /></p:cNvSpPr><p:nvPr><p:ph idx="1" sz="half" /></p:nvPr></p:nvSpPr><p:spPr /><p:txBody><a:bodyPr /><a:lstStyle /><a:p><a:pPr lvl="0" indent="0" marL="0"><a:buNone /></a:pPr><a:r><a:rPr /><a:t>A two-sample t-test compares the </a:t></a:r><a:r><a:rPr b="1" /><a:t>means of two independent groups</a:t></a:r><a:r><a:rPr /><a:t>.</a:t></a:r></a:p><a:p><a:pPr lvl="0" indent="0" marL="0"><a:buNone /></a:pPr><a:r><a:rPr /><a:t>It asks: </a:t></a:r><a:r><a:rPr i="1" /><a:t>is the gap between the two means big compared with the scatter inside each group?</a:t></a:r></a:p><a:p><a:pPr lvl="0" indent="0" marL="0"><a:buNone /></a:pPr><a14:m><m:oMathPara xmlns:m="http://schemas.openxmlformats.org/officeDocument/2006/math"><m:oMathParaPr><m:jc m:val="center" /></m:oMathParaPr><m:oMath><m:r><m:t>t</m:t></m:r><m:r><m:rPr><m:sty m:val="p" /></m:rPr><m:t>=</m:t></m:r><m:f><m:fPr><m:type m:val="bar" /></m:fPr><m:num><m:r><m:rPr><m:nor /><m:sty m:val="p" /></m:rPr><m:t>difference between the means</m:t></m:r></m:num><m:den><m:r><m:rPr><m:nor /><m:sty m:val="p" /></m:rPr><m:t>noise (scatter) in the data</m:t></m:r></m:den></m:f></m:oMath></m:oMathPara></a14:m></a:p><a:p><a:pPr lvl="0" /><a:r><a:rPr b="1" /><a:t>Big gap, little scatter</a:t></a:r><a:r><a:rPr /><a:t> → big </a:t></a:r><a:r><a:rPr i="1" /><a:t>t</a:t></a:r><a:r><a:rPr /><a:t> → small </a:t></a:r><a:r><a:rPr i="1" /><a:t>p</a:t></a:r><a:r><a:rPr /><a:t>-value</a:t></a:r></a:p><a:p><a:pPr lvl="0" /><a:r><a:rPr b="1" /><a:t>Small gap, lots of scatter</a:t></a:r><a:r><a:rPr /><a:t> → </a:t></a:r><a:r><a:rPr i="1" /><a:t>t</a:t></a:r><a:r><a:rPr /><a:t> near 0 → large </a:t></a:r><a:r><a:rPr i="1" /><a:t>p</a:t></a:r><a:r><a:rPr /><a:t>-value</a:t></a:r></a:p><a:p><a:pPr lvl="0" indent="0" marL="0"><a:buNone /></a:pPr><a:r><a:rPr /><a:t>R does the arithmetic — your job is to set the test up correctly and read the answer.</a:t></a:r></a:p></p:txBody></p:sp></mc:Choice></mc:AlternateContent><p:graphicFrame><p:nvGraphicFramePr><p:cNvPr id="6" name="Content Placeholder 5" /><p:cNvGraphicFramePr><a:graphicFrameLocks noGrp="1" /></p:cNvGraphicFramePr><p:nvPr><p:ph idx="1" /></p:nvPr></p:nvGraphicFramePr><p:xfrm><a:off x="4495800" y="660400" /><a:ext cx="4406900" cy="3810000" /></p:xfrm><a:graphic><a:graphicData uri="http://schemas.openxmlformats.org/drawingml/2006/table"><a:tbl><a:tblPr firstRow="1" bandRow="1"><a:tableStyleId>{5C22544A-7EE6-4342-B048-85BDC9FD1C3A}</a:tableStyleId></a:tblPr><a:tblGrid><a:gridCol w="1536700" /><a:gridCol w="2870200" /></a:tblGrid><a:tr h="0"><a:tc><a:txBody><a:bodyPr /><a:lstStyle /><a:p><a:pPr lvl="0" indent="0" marL="0"><a:buNone /></a:pPr><a:r><a:rPr /><a:t>Piece</a:t></a:r></a:p></a:txBody><a:tcPr /></a:tc><a:tc><a:txBody><a:bodyPr /><a:lstStyle /><a:p><a:pPr lvl="0" indent="0" marL="0"><a:buNone /></a:pPr><a:r><a:rPr /><a:t>Our leaves</a:t></a:r></a:p></a:txBody><a:tcPr /></a:tc></a:tr><a:tr h="0"><a:tc><a:txBody><a:bodyPr /><a:lstStyle /><a:p><a:pPr lvl="0" indent="0" marL="0"><a:buNone /></a:pPr><a:r><a:rPr /><a:t>Group 1</a:t></a:r></a:p></a:txBody></a:tc><a:tc><a:txBody><a:bodyPr /><a:lstStyle /><a:p><a:pPr lvl="0" indent="0" marL="0"><a:buNone /></a:pPr><a:r><a:rPr /><a:t>Shady leaves</a:t></a:r></a:p></a:txBody></a:tc></a:tr><a:tr h="0"><a:tc><a:txBody><a:bodyPr /><a:lstStyle /><a:p><a:pPr lvl="0" indent="0" marL="0"><a:buNone /></a:pPr><a:r><a:rPr /><a:t>Group 2</a:t></a:r></a:p></a:txBody></a:tc><a:tc><a:txBody><a:bodyPr /><a:lstStyle /><a:p><a:pPr lvl="0" indent="0" marL="0"><a:buNone /></a:pPr><a:r><a:rPr /><a:t>Sunny leaves</a:t></a:r></a:p></a:txBody></a:tc></a:tr><a:tr h="0"><a:tc><a:txBody><a:bodyPr /><a:lstStyle /><a:p><a:pPr lvl="0" indent="0" marL="0"><a:buNone /></a:pPr><a:r><a:rPr /><a:t>Measured</a:t></a:r></a:p></a:txBody></a:tc><a:tc><a:txBody><a:bodyPr /><a:lstStyle /><a:p><a:pPr lvl="0" indent="0" marL="0"><a:buNone /></a:pPr><a:r><a:rPr><a:latin typeface="Courier" /></a:rPr><a:t>mass_g</a:t></a:r></a:p></a:txBody></a:tc></a:tr><a:tr h="0"><a:tc><a:txBody><a:bodyPr /><a:lstStyle /><a:p><a:pPr lvl="0" indent="0" marL="0"><a:buNone /></a:pPr><a:r><a:rPr /><a:t>H₀</a:t></a:r></a:p></a:txBody></a:tc><a:tc><a:txBody><a:bodyPr /><a:lstStyle /><a:p><a:pPr lvl="0" indent="0" marL="0"><a:buNone /></a:pPr><a14:m><m:oMath xmlns:m="http://schemas.openxmlformats.org/officeDocument/2006/math"><m:sSub><m:e><m:r><m:t>μ</m:t></m:r></m:e><m:sub><m:r><m:t>s</m:t></m:r><m:r><m:t>h</m:t></m:r><m:r><m:t>a</m:t></m:r><m:r><m:t>d</m:t></m:r><m:r><m:t>y</m:t></m:r></m:sub></m:sSub><m:r><m:rPr><m:sty m:val="p" /></m:rPr><m:t>=</m:t></m:r><m:sSub><m:e><m:r><m:t>μ</m:t></m:r></m:e><m:sub><m:r><m:t>s</m:t></m:r><m:r><m:t>u</m:t></m:r><m:r><m:t>n</m:t></m:r><m:r><m:t>n</m:t></m:r><m:r><m:t>y</m:t></m:r></m:sub></m:sSub></m:oMath></a14:m></a:p></a:txBody></a:tc></a:tr><a:tr h="0"><a:tc><a:txBody><a:bodyPr /><a:lstStyle /><a:p><a:pPr lvl="0" indent="0" marL="0"><a:buNone /></a:pPr><a:r><a:rPr /><a:t>Hₐ</a:t></a:r></a:p></a:txBody></a:tc><a:tc><a:txBody><a:bodyPr /><a:lstStyle /><a:p><a:pPr lvl="0" indent="0" marL="0"><a:buNone /></a:pPr><a14:m><m:oMath xmlns:m="http://schemas.openxmlformats.org/officeDocument/2006/math"><m:sSub><m:e><m:r><m:t>μ</m:t></m:r></m:e><m:sub><m:r><m:t>s</m:t></m:r><m:r><m:t>h</m:t></m:r><m:r><m:t>a</m:t></m:r><m:r><m:t>d</m:t></m:r><m:r><m:t>y</m:t></m:r></m:sub></m:sSub><m:r><m:rPr><m:sty m:val="p" /></m:rPr><m:t>≠</m:t></m:r><m:sSub><m:e><m:r><m:t>μ</m:t></m:r></m:e><m:sub><m:r><m:t>s</m:t></m:r><m:r><m:t>u</m:t></m:r><m:r><m:t>n</m:t></m:r><m:r><m:t>n</m:t></m:r><m:r><m:t>y</m:t></m:r></m:sub></m:sSub></m:oMath></a14:m></a:p></a:txBody></a:tc></a:tr></a:tbl></a:graphicData></a:graphic></p:graphicFrame></p:spTree></p:cSld></p:sld>
+</file>
+
+<file path=ppt/slides/slide9.xml><?xml version="1.0" encoding="utf-8"?>
+<p:sld xmlns:a="http://schemas.openxmlformats.org/drawingml/2006/main" xmlns:r="http://schemas.openxmlformats.org/officeDocument/2006/relationships" xmlns:p="http://schemas.openxmlformats.org/presentationml/2006/main">
+  <p:cSld>
+    <p:spTree>
+      <p:nvGrpSpPr>
+        <p:cNvPr id="1" name=""/>
+        <p:cNvGrpSpPr/>
+        <p:nvPr/>
+      </p:nvGrpSpPr>
+      <p:grpSpPr>
+        <a:xfrm>
+          <a:off x="0" y="0"/>
+          <a:ext cx="0" cy="0"/>
+          <a:chOff x="0" y="0"/>
+          <a:chExt cx="0" cy="0"/>
+        </a:xfrm>
+      </p:grpSpPr>
+      <p:sp>
+        <p:nvSpPr>
+          <p:cNvPr id="2" name="Title 1"/>
+          <p:cNvSpPr>
+            <a:spLocks noGrp="1"/>
+          </p:cNvSpPr>
+          <p:nvPr>
+            <p:ph type="title"/>
+          </p:nvPr>
+        </p:nvSpPr>
+        <p:spPr>
+          <a:xfrm>
+            <a:off x="0" y="0"/>
+            <a:ext cx="9144000" cy="602780"/>
+          </a:xfrm>
+          <a:solidFill>
+            <a:srgbClr val="1A1A2E"/>
+          </a:solidFill>
+        </p:spPr>
+        <p:txBody>
+          <a:bodyPr/>
+          <a:lstStyle/>
+          <a:p>
+            <a:pPr lvl="0" indent="0" marL="0">
+              <a:buNone/>
+            </a:pPr>
+            <a:r>
+              <a:rPr/>
+              <a:t>Why Welch’s? — Don’t Assume Equal Variance</a:t>
+            </a:r>
+          </a:p>
+        </p:txBody>
+      </p:sp>
+      <p:sp>
+        <p:nvSpPr>
+          <p:cNvPr id="3" name="Content Placeholder 2"/>
+          <p:cNvSpPr>
+            <a:spLocks noGrp="1"/>
+          </p:cNvSpPr>
+          <p:nvPr>
+            <p:ph idx="1" sz="half"/>
+          </p:nvPr>
+        </p:nvSpPr>
+        <p:spPr/>
+        <p:txBody>
+          <a:bodyPr/>
+          <a:lstStyle/>
+          <a:p>
+            <a:pPr lvl="0" indent="0" marL="0">
+              <a:buNone/>
+            </a:pPr>
+            <a:r>
+              <a:rPr/>
+              <a:t>There are two versions of the two-sample t-test:</a:t>
+            </a:r>
+          </a:p>
+          <a:p>
+            <a:pPr lvl="0"/>
+            <a:r>
+              <a:rPr b="1"/>
+              <a:t>Standard (Student’s) t-test</a:t>
+            </a:r>
+            <a:r>
+              <a:rPr/>
+              <a:t> — assumes both groups have the </a:t>
+            </a:r>
+            <a:r>
+              <a:rPr b="1"/>
+              <a:t>same spread</a:t>
+            </a:r>
+          </a:p>
+          <a:p>
+            <a:pPr lvl="0"/>
+            <a:r>
+              <a:rPr b="1"/>
+              <a:t>Welch’s t-test</a:t>
+            </a:r>
+            <a:r>
+              <a:rPr/>
+              <a:t> — lets each group have </a:t>
+            </a:r>
+            <a:r>
+              <a:rPr b="1"/>
+              <a:t>its own spread</a:t>
+            </a:r>
+          </a:p>
+          <a:p>
+            <a:pPr lvl="0" indent="0" marL="0">
+              <a:buNone/>
+            </a:pPr>
+            <a:r>
+              <a:rPr/>
+              <a:t>When the spreads really are equal, both give almost the same answer. When they are not, the standard test gives </a:t>
+            </a:r>
+            <a:r>
+              <a:rPr b="1"/>
+              <a:t>too many false positives</a:t>
+            </a:r>
+            <a:r>
+              <a:rPr/>
+              <a:t>.</a:t>
+            </a:r>
+          </a:p>
+        </p:txBody>
+      </p:sp>
+      <p:sp>
+        <p:nvSpPr>
+          <p:cNvPr id="4" name="Content Placeholder 3"/>
+          <p:cNvSpPr>
+            <a:spLocks noGrp="1"/>
+          </p:cNvSpPr>
+          <p:nvPr>
+            <p:ph idx="2" sz="half"/>
+          </p:nvPr>
+        </p:nvSpPr>
+        <p:spPr/>
+        <p:txBody>
+          <a:bodyPr/>
+          <a:lstStyle/>
+          <a:p>
+            <a:pPr lvl="0" indent="0" marL="1270000">
+              <a:buNone/>
+            </a:pPr>
+            <a:r>
+              <a:rPr sz="2000" b="1"/>
+              <a:t>Tip</a:t>
+            </a:r>
+          </a:p>
+          <a:p>
+            <a:pPr lvl="0" indent="0" marL="1270000">
+              <a:buNone/>
+            </a:pPr>
+            <a:r>
+              <a:rPr sz="2000" b="1"/>
+              <a:t>Best practice:</a:t>
+            </a:r>
+            <a:r>
+              <a:rPr sz="2000"/>
+              <a:t> use </a:t>
+            </a:r>
+            <a:r>
+              <a:rPr sz="2000" b="1"/>
+              <a:t>Welch’s</a:t>
+            </a:r>
+            <a:r>
+              <a:rPr sz="2000"/>
+              <a:t> as your default for every two-group comparison.</a:t>
+            </a:r>
+          </a:p>
+          <a:p>
+            <a:pPr lvl="0" indent="0" marL="1270000">
+              <a:buNone/>
+            </a:pPr>
+            <a:r>
+              <a:rPr sz="2000"/>
+              <a:t>In R: </a:t>
+            </a:r>
+            <a:r>
+              <a:rPr sz="2000" b="1">
+                <a:latin typeface="Courier"/>
+              </a:rPr>
+              <a:t>var.equal = FALSE</a:t>
             </a:r>
           </a:p>
         </p:txBody>

--- a/docs/content/t_tests/t_tests_lecture.pptx
+++ b/docs/content/t_tests/t_tests_lecture.pptx
@@ -3366,7 +3366,7 @@
             </a:pPr>
             <a:r>
               <a:rPr/>
-              <a:t>2026-09-29</a:t>
+              <a:t>2026-10-01</a:t>
             </a:r>
           </a:p>
         </p:txBody>

--- a/docs/content/t_tests/t_tests_lecture.pptx
+++ b/docs/content/t_tests/t_tests_lecture.pptx
@@ -3366,7 +3366,7 @@
             </a:pPr>
             <a:r>
               <a:rPr/>
-              <a:t>2026-10-01</a:t>
+              <a:t>2026-10-05</a:t>
             </a:r>
           </a:p>
         </p:txBody>
@@ -9563,8 +9563,8 @@
         </p:blipFill>
         <p:spPr bwMode="auto">
           <a:xfrm>
-            <a:off x="127000" y="1562100"/>
-            <a:ext cx="4432300" cy="2730500"/>
+            <a:off x="127000" y="1930400"/>
+            <a:ext cx="4432300" cy="1981200"/>
           </a:xfrm>
           <a:prstGeom prst="rect">
             <a:avLst/>

--- a/docs/content/t_tests/t_tests_lecture.pptx
+++ b/docs/content/t_tests/t_tests_lecture.pptx
@@ -3366,7 +3366,7 @@
             </a:pPr>
             <a:r>
               <a:rPr/>
-              <a:t>2026-10-05</a:t>
+              <a:t>2026-10-08</a:t>
             </a:r>
           </a:p>
         </p:txBody>

--- a/docs/content/t_tests/t_tests_lecture.pptx
+++ b/docs/content/t_tests/t_tests_lecture.pptx
@@ -3366,7 +3366,7 @@
             </a:pPr>
             <a:r>
               <a:rPr/>
-              <a:t>2026-10-08</a:t>
+              <a:t>2026-10-09</a:t>
             </a:r>
           </a:p>
         </p:txBody>

--- a/docs/content/t_tests/t_tests_lecture.pptx
+++ b/docs/content/t_tests/t_tests_lecture.pptx
@@ -3366,7 +3366,7 @@
             </a:pPr>
             <a:r>
               <a:rPr/>
-              <a:t>2026-10-09</a:t>
+              <a:t>2026-10-19</a:t>
             </a:r>
           </a:p>
         </p:txBody>

--- a/docs/content/t_tests/t_tests_lecture.pptx
+++ b/docs/content/t_tests/t_tests_lecture.pptx
@@ -3366,7 +3366,7 @@
             </a:pPr>
             <a:r>
               <a:rPr/>
-              <a:t>2026-10-19</a:t>
+              <a:t>2026-10-22</a:t>
             </a:r>
           </a:p>
         </p:txBody>
